--- a/第1章-计算机编程与开发环境/第1章-计算机编程与开发环境.pptx
+++ b/第1章-计算机编程与开发环境/第1章-计算机编程与开发环境.pptx
@@ -6,10 +6,10 @@
     <p:sldMasterId id="2147484986" r:id="rId2"/>
   </p:sldMasterIdLst>
   <p:notesMasterIdLst>
-    <p:notesMasterId r:id="rId38"/>
+    <p:notesMasterId r:id="rId39"/>
   </p:notesMasterIdLst>
   <p:handoutMasterIdLst>
-    <p:handoutMasterId r:id="rId39"/>
+    <p:handoutMasterId r:id="rId40"/>
   </p:handoutMasterIdLst>
   <p:sldIdLst>
     <p:sldId id="2763" r:id="rId3"/>
@@ -17,41 +17,42 @@
     <p:sldId id="2731" r:id="rId5"/>
     <p:sldId id="2778" r:id="rId6"/>
     <p:sldId id="2707" r:id="rId7"/>
-    <p:sldId id="2708" r:id="rId8"/>
-    <p:sldId id="2387" r:id="rId9"/>
-    <p:sldId id="2447" r:id="rId10"/>
-    <p:sldId id="2781" r:id="rId11"/>
-    <p:sldId id="2783" r:id="rId12"/>
-    <p:sldId id="2795" r:id="rId13"/>
-    <p:sldId id="2788" r:id="rId14"/>
-    <p:sldId id="2794" r:id="rId15"/>
-    <p:sldId id="2709" r:id="rId16"/>
-    <p:sldId id="2605" r:id="rId17"/>
-    <p:sldId id="2724" r:id="rId18"/>
-    <p:sldId id="2790" r:id="rId19"/>
-    <p:sldId id="2762" r:id="rId20"/>
-    <p:sldId id="2720" r:id="rId21"/>
-    <p:sldId id="2721" r:id="rId22"/>
-    <p:sldId id="2716" r:id="rId23"/>
-    <p:sldId id="2757" r:id="rId24"/>
-    <p:sldId id="2756" r:id="rId25"/>
-    <p:sldId id="2740" r:id="rId26"/>
-    <p:sldId id="2745" r:id="rId27"/>
-    <p:sldId id="2758" r:id="rId28"/>
-    <p:sldId id="2744" r:id="rId29"/>
-    <p:sldId id="2746" r:id="rId30"/>
-    <p:sldId id="2792" r:id="rId31"/>
-    <p:sldId id="2747" r:id="rId32"/>
-    <p:sldId id="2748" r:id="rId33"/>
-    <p:sldId id="2750" r:id="rId34"/>
-    <p:sldId id="2741" r:id="rId35"/>
-    <p:sldId id="2793" r:id="rId36"/>
-    <p:sldId id="2742" r:id="rId37"/>
+    <p:sldId id="2796" r:id="rId8"/>
+    <p:sldId id="2708" r:id="rId9"/>
+    <p:sldId id="2387" r:id="rId10"/>
+    <p:sldId id="2447" r:id="rId11"/>
+    <p:sldId id="2781" r:id="rId12"/>
+    <p:sldId id="2783" r:id="rId13"/>
+    <p:sldId id="2795" r:id="rId14"/>
+    <p:sldId id="2788" r:id="rId15"/>
+    <p:sldId id="2794" r:id="rId16"/>
+    <p:sldId id="2709" r:id="rId17"/>
+    <p:sldId id="2605" r:id="rId18"/>
+    <p:sldId id="2724" r:id="rId19"/>
+    <p:sldId id="2790" r:id="rId20"/>
+    <p:sldId id="2762" r:id="rId21"/>
+    <p:sldId id="2720" r:id="rId22"/>
+    <p:sldId id="2721" r:id="rId23"/>
+    <p:sldId id="2716" r:id="rId24"/>
+    <p:sldId id="2757" r:id="rId25"/>
+    <p:sldId id="2756" r:id="rId26"/>
+    <p:sldId id="2740" r:id="rId27"/>
+    <p:sldId id="2745" r:id="rId28"/>
+    <p:sldId id="2758" r:id="rId29"/>
+    <p:sldId id="2744" r:id="rId30"/>
+    <p:sldId id="2746" r:id="rId31"/>
+    <p:sldId id="2792" r:id="rId32"/>
+    <p:sldId id="2747" r:id="rId33"/>
+    <p:sldId id="2748" r:id="rId34"/>
+    <p:sldId id="2750" r:id="rId35"/>
+    <p:sldId id="2741" r:id="rId36"/>
+    <p:sldId id="2793" r:id="rId37"/>
+    <p:sldId id="2742" r:id="rId38"/>
   </p:sldIdLst>
   <p:sldSz cx="12192000" cy="6858000"/>
   <p:notesSz cx="7099300" cy="10234613"/>
   <p:custDataLst>
-    <p:tags r:id="rId40"/>
+    <p:tags r:id="rId41"/>
   </p:custDataLst>
   <p:defaultTextStyle>
     <a:defPPr>
@@ -1268,7 +1269,7 @@
               </a14:hiddenFill>
             </a:ext>
             <a:ext uri="{FAA26D3D-D897-4be2-8F04-BA451C77F1D7}">
-              <ma14:placeholderFlag xmlns:ma14="http://schemas.microsoft.com/office/mac/drawingml/2011/main" xmlns="" val="1"/>
+              <ma14:placeholderFlag xmlns="" xmlns:ma14="http://schemas.microsoft.com/office/mac/drawingml/2011/main" val="1"/>
             </a:ext>
           </a:extLst>
         </p:spPr>
@@ -1656,7 +1657,7 @@
               </a14:hiddenLine>
             </a:ext>
             <a:ext uri="{FAA26D3D-D897-4be2-8F04-BA451C77F1D7}">
-              <ma14:placeholderFlag xmlns="" xmlns:ma14="http://schemas.microsoft.com/office/mac/drawingml/2011/main" val="1"/>
+              <ma14:placeholderFlag xmlns:ma14="http://schemas.microsoft.com/office/mac/drawingml/2011/main" xmlns="" val="1"/>
             </a:ext>
           </a:extLst>
         </p:spPr>
@@ -1707,6 +1708,128 @@
 </file>
 
 <file path=ppt/notesSlides/notesSlide10.xml><?xml version="1.0" encoding="utf-8"?>
+<p:notes xmlns:a="http://schemas.openxmlformats.org/drawingml/2006/main" xmlns:r="http://schemas.openxmlformats.org/officeDocument/2006/relationships" xmlns:p="http://schemas.openxmlformats.org/presentationml/2006/main">
+  <p:cSld>
+    <p:spTree>
+      <p:nvGrpSpPr>
+        <p:cNvPr id="1" name="">
+          <a:extLst>
+            <a:ext uri="{FF2B5EF4-FFF2-40B4-BE49-F238E27FC236}">
+              <a16:creationId xmlns:a16="http://schemas.microsoft.com/office/drawing/2014/main" id="{979E65CF-9525-F48B-7663-08A96690664C}"/>
+            </a:ext>
+          </a:extLst>
+        </p:cNvPr>
+        <p:cNvGrpSpPr/>
+        <p:nvPr/>
+      </p:nvGrpSpPr>
+      <p:grpSpPr>
+        <a:xfrm>
+          <a:off x="0" y="0"/>
+          <a:ext cx="0" cy="0"/>
+          <a:chOff x="0" y="0"/>
+          <a:chExt cx="0" cy="0"/>
+        </a:xfrm>
+      </p:grpSpPr>
+      <p:sp>
+        <p:nvSpPr>
+          <p:cNvPr id="2" name="幻灯片图像占位符 1">
+            <a:extLst>
+              <a:ext uri="{FF2B5EF4-FFF2-40B4-BE49-F238E27FC236}">
+                <a16:creationId xmlns:a16="http://schemas.microsoft.com/office/drawing/2014/main" id="{C3AAC67B-6FA3-0CCB-AAB1-BDA97E2301AD}"/>
+              </a:ext>
+            </a:extLst>
+          </p:cNvPr>
+          <p:cNvSpPr>
+            <a:spLocks noGrp="1" noRot="1" noChangeAspect="1"/>
+          </p:cNvSpPr>
+          <p:nvPr>
+            <p:ph type="sldImg"/>
+          </p:nvPr>
+        </p:nvSpPr>
+        <p:spPr>
+          <a:xfrm>
+            <a:off x="142875" y="768350"/>
+            <a:ext cx="6818313" cy="3836988"/>
+          </a:xfrm>
+        </p:spPr>
+      </p:sp>
+      <p:sp>
+        <p:nvSpPr>
+          <p:cNvPr id="3" name="备注占位符 2">
+            <a:extLst>
+              <a:ext uri="{FF2B5EF4-FFF2-40B4-BE49-F238E27FC236}">
+                <a16:creationId xmlns:a16="http://schemas.microsoft.com/office/drawing/2014/main" id="{D94A2576-06A2-4AA2-EA21-8FB5DA72F761}"/>
+              </a:ext>
+            </a:extLst>
+          </p:cNvPr>
+          <p:cNvSpPr>
+            <a:spLocks noGrp="1"/>
+          </p:cNvSpPr>
+          <p:nvPr>
+            <p:ph type="body" idx="1"/>
+          </p:nvPr>
+        </p:nvSpPr>
+        <p:spPr/>
+        <p:txBody>
+          <a:bodyPr/>
+          <a:lstStyle/>
+          <a:p>
+            <a:r>
+              <a:rPr lang="en-US" altLang="zh-CN" dirty="0"/>
+              <a:t>1.</a:t>
+            </a:r>
+            <a:r>
+              <a:rPr lang="zh-CN" altLang="en-US" dirty="0"/>
+              <a:t> </a:t>
+            </a:r>
+            <a:r>
+              <a:rPr lang="en-US" altLang="zh-CN" dirty="0"/>
+              <a:t>CPU</a:t>
+            </a:r>
+            <a:r>
+              <a:rPr lang="zh-CN" altLang="en-US" dirty="0"/>
+              <a:t>、内存、硬盘计算机三大核心硬件。内存与硬盘的区分</a:t>
+            </a:r>
+            <a:endParaRPr lang="en-US" altLang="zh-CN" dirty="0"/>
+          </a:p>
+          <a:p>
+            <a:r>
+              <a:rPr lang="en-US" altLang="zh-CN" dirty="0"/>
+              <a:t>2.</a:t>
+            </a:r>
+            <a:r>
+              <a:rPr lang="zh-CN" altLang="en-US" dirty="0"/>
+              <a:t> 键盘、鼠标用于接收信息，相当于</a:t>
+            </a:r>
+            <a:r>
+              <a:rPr lang="zh-CN" altLang="en-US" baseline="0" dirty="0"/>
+              <a:t>人的眼睛、耳朵；</a:t>
+            </a:r>
+            <a:r>
+              <a:rPr lang="zh-CN" altLang="en-US" dirty="0"/>
+              <a:t>显示器用于输出信息，相当于人的嘴巴。</a:t>
+            </a:r>
+            <a:endParaRPr lang="en-US" altLang="zh-CN" dirty="0"/>
+          </a:p>
+          <a:p>
+            <a:endParaRPr lang="zh-CN" altLang="en-US" dirty="0"/>
+          </a:p>
+        </p:txBody>
+      </p:sp>
+    </p:spTree>
+    <p:extLst>
+      <p:ext uri="{BB962C8B-B14F-4D97-AF65-F5344CB8AC3E}">
+        <p14:creationId xmlns:p14="http://schemas.microsoft.com/office/powerpoint/2010/main" val="3531991757"/>
+      </p:ext>
+    </p:extLst>
+  </p:cSld>
+  <p:clrMapOvr>
+    <a:masterClrMapping/>
+  </p:clrMapOvr>
+</p:notes>
+</file>
+
+<file path=ppt/notesSlides/notesSlide11.xml><?xml version="1.0" encoding="utf-8"?>
 <p:notes xmlns:a="http://schemas.openxmlformats.org/drawingml/2006/main" xmlns:r="http://schemas.openxmlformats.org/officeDocument/2006/relationships" xmlns:p="http://schemas.openxmlformats.org/presentationml/2006/main">
   <p:cSld>
     <p:spTree>
@@ -1790,7 +1913,7 @@
 </p:notes>
 </file>
 
-<file path=ppt/notesSlides/notesSlide11.xml><?xml version="1.0" encoding="utf-8"?>
+<file path=ppt/notesSlides/notesSlide12.xml><?xml version="1.0" encoding="utf-8"?>
 <p:notes xmlns:a="http://schemas.openxmlformats.org/drawingml/2006/main" xmlns:r="http://schemas.openxmlformats.org/officeDocument/2006/relationships" xmlns:p="http://schemas.openxmlformats.org/presentationml/2006/main">
   <p:cSld>
     <p:spTree>
@@ -1881,7 +2004,7 @@
 </p:notes>
 </file>
 
-<file path=ppt/notesSlides/notesSlide12.xml><?xml version="1.0" encoding="utf-8"?>
+<file path=ppt/notesSlides/notesSlide13.xml><?xml version="1.0" encoding="utf-8"?>
 <p:notes xmlns:a="http://schemas.openxmlformats.org/drawingml/2006/main" xmlns:r="http://schemas.openxmlformats.org/officeDocument/2006/relationships" xmlns:p="http://schemas.openxmlformats.org/presentationml/2006/main">
   <p:cSld>
     <p:spTree>
@@ -1972,7 +2095,7 @@
 </p:notes>
 </file>
 
-<file path=ppt/notesSlides/notesSlide13.xml><?xml version="1.0" encoding="utf-8"?>
+<file path=ppt/notesSlides/notesSlide14.xml><?xml version="1.0" encoding="utf-8"?>
 <p:notes xmlns:a="http://schemas.openxmlformats.org/drawingml/2006/main" xmlns:r="http://schemas.openxmlformats.org/officeDocument/2006/relationships" xmlns:p="http://schemas.openxmlformats.org/presentationml/2006/main">
   <p:cSld>
     <p:spTree>
@@ -2056,72 +2179,6 @@
 </p:notes>
 </file>
 
-<file path=ppt/notesSlides/notesSlide14.xml><?xml version="1.0" encoding="utf-8"?>
-<p:notes xmlns:a="http://schemas.openxmlformats.org/drawingml/2006/main" xmlns:r="http://schemas.openxmlformats.org/officeDocument/2006/relationships" xmlns:p="http://schemas.openxmlformats.org/presentationml/2006/main">
-  <p:cSld>
-    <p:spTree>
-      <p:nvGrpSpPr>
-        <p:cNvPr id="1" name=""/>
-        <p:cNvGrpSpPr/>
-        <p:nvPr/>
-      </p:nvGrpSpPr>
-      <p:grpSpPr>
-        <a:xfrm>
-          <a:off x="0" y="0"/>
-          <a:ext cx="0" cy="0"/>
-          <a:chOff x="0" y="0"/>
-          <a:chExt cx="0" cy="0"/>
-        </a:xfrm>
-      </p:grpSpPr>
-      <p:sp>
-        <p:nvSpPr>
-          <p:cNvPr id="2" name="幻灯片图像占位符 1"/>
-          <p:cNvSpPr>
-            <a:spLocks noGrp="1" noRot="1" noChangeAspect="1"/>
-          </p:cNvSpPr>
-          <p:nvPr>
-            <p:ph type="sldImg"/>
-          </p:nvPr>
-        </p:nvSpPr>
-        <p:spPr>
-          <a:xfrm>
-            <a:off x="142875" y="768350"/>
-            <a:ext cx="6818313" cy="3836988"/>
-          </a:xfrm>
-        </p:spPr>
-      </p:sp>
-      <p:sp>
-        <p:nvSpPr>
-          <p:cNvPr id="3" name="备注占位符 2"/>
-          <p:cNvSpPr>
-            <a:spLocks noGrp="1"/>
-          </p:cNvSpPr>
-          <p:nvPr>
-            <p:ph type="body" idx="1"/>
-          </p:nvPr>
-        </p:nvSpPr>
-        <p:spPr/>
-        <p:txBody>
-          <a:bodyPr/>
-          <a:lstStyle/>
-          <a:p>
-            <a:endParaRPr lang="zh-CN" altLang="en-US"/>
-          </a:p>
-        </p:txBody>
-      </p:sp>
-    </p:spTree>
-    <p:extLst>
-      <p:ext uri="{BB962C8B-B14F-4D97-AF65-F5344CB8AC3E}">
-        <p14:creationId xmlns:p14="http://schemas.microsoft.com/office/powerpoint/2010/main" val="2585555465"/>
-      </p:ext>
-    </p:extLst>
-  </p:cSld>
-  <p:clrMapOvr>
-    <a:masterClrMapping/>
-  </p:clrMapOvr>
-</p:notes>
-</file>
-
 <file path=ppt/notesSlides/notesSlide15.xml><?xml version="1.0" encoding="utf-8"?>
 <p:notes xmlns:a="http://schemas.openxmlformats.org/drawingml/2006/main" xmlns:r="http://schemas.openxmlformats.org/officeDocument/2006/relationships" xmlns:p="http://schemas.openxmlformats.org/presentationml/2006/main">
   <p:cSld>
@@ -2171,75 +2228,14 @@
           <a:bodyPr/>
           <a:lstStyle/>
           <a:p>
-            <a:pPr marL="228600" indent="-228600">
-              <a:buAutoNum type="arabicPeriod"/>
-            </a:pPr>
-            <a:r>
-              <a:rPr lang="zh-CN" altLang="en-US" dirty="0"/>
-              <a:t>解释型：对应编译型</a:t>
-            </a:r>
-            <a:r>
-              <a:rPr lang="en-US" altLang="zh-CN" dirty="0"/>
-              <a:t>(</a:t>
-            </a:r>
-            <a:r>
-              <a:rPr lang="zh-CN" altLang="en-US" dirty="0"/>
-              <a:t>需先将代码编译为机器码再运行</a:t>
-            </a:r>
-            <a:r>
-              <a:rPr lang="en-US" altLang="zh-CN" dirty="0"/>
-              <a:t>)</a:t>
-            </a:r>
-            <a:r>
-              <a:rPr lang="zh-CN" altLang="en-US" dirty="0"/>
-              <a:t>。通过解释器解释，直接执行代码（编译和运行是连续步骤）。</a:t>
-            </a:r>
-            <a:endParaRPr lang="en-US" altLang="zh-CN" dirty="0"/>
-          </a:p>
-          <a:p>
-            <a:pPr marL="228600" indent="-228600">
-              <a:buAutoNum type="arabicPeriod"/>
-            </a:pPr>
-            <a:r>
-              <a:rPr lang="zh-CN" altLang="en-US" dirty="0"/>
-              <a:t>高级编程语言：高度封装的编程语言。以人类日常语言为基础，对人类具有较高可读性的编程语言。</a:t>
-            </a:r>
-            <a:endParaRPr lang="en-US" altLang="zh-CN" dirty="0"/>
-          </a:p>
-          <a:p>
-            <a:pPr marL="228600" indent="-228600">
-              <a:buAutoNum type="arabicPeriod"/>
-            </a:pPr>
-            <a:r>
-              <a:rPr lang="zh-CN" altLang="en-US" dirty="0"/>
-              <a:t>通用：能够用于不同领域的编程语言。反例，</a:t>
-            </a:r>
-            <a:r>
-              <a:rPr lang="en-US" altLang="zh-CN" dirty="0"/>
-              <a:t>ENVI-IDL</a:t>
-            </a:r>
-            <a:r>
-              <a:rPr lang="zh-CN" altLang="en-US" dirty="0"/>
-              <a:t>编程语言</a:t>
-            </a:r>
-            <a:endParaRPr lang="en-US" altLang="zh-CN" dirty="0"/>
-          </a:p>
-          <a:p>
-            <a:pPr marL="228600" indent="-228600">
-              <a:buAutoNum type="arabicPeriod"/>
-            </a:pPr>
-            <a:r>
-              <a:rPr lang="zh-CN" altLang="en-US" dirty="0"/>
-              <a:t>范罗苏姆头发茂盛。</a:t>
-            </a:r>
-            <a:endParaRPr lang="en-US" altLang="zh-CN" dirty="0"/>
+            <a:endParaRPr lang="zh-CN" altLang="en-US"/>
           </a:p>
         </p:txBody>
       </p:sp>
     </p:spTree>
     <p:extLst>
       <p:ext uri="{BB962C8B-B14F-4D97-AF65-F5344CB8AC3E}">
-        <p14:creationId xmlns:p14="http://schemas.microsoft.com/office/powerpoint/2010/main" val="2800426961"/>
+        <p14:creationId xmlns:p14="http://schemas.microsoft.com/office/powerpoint/2010/main" val="2585555465"/>
       </p:ext>
     </p:extLst>
   </p:cSld>
@@ -2301,14 +2297,72 @@
             <a:pPr marL="228600" indent="-228600">
               <a:buAutoNum type="arabicPeriod"/>
             </a:pPr>
-            <a:endParaRPr lang="zh-CN" altLang="en-US" dirty="0"/>
+            <a:r>
+              <a:rPr lang="zh-CN" altLang="en-US" dirty="0"/>
+              <a:t>解释型：对应编译型</a:t>
+            </a:r>
+            <a:r>
+              <a:rPr lang="en-US" altLang="zh-CN" dirty="0"/>
+              <a:t>(</a:t>
+            </a:r>
+            <a:r>
+              <a:rPr lang="zh-CN" altLang="en-US" dirty="0"/>
+              <a:t>需先将代码编译为机器码再运行</a:t>
+            </a:r>
+            <a:r>
+              <a:rPr lang="en-US" altLang="zh-CN" dirty="0"/>
+              <a:t>)</a:t>
+            </a:r>
+            <a:r>
+              <a:rPr lang="zh-CN" altLang="en-US" dirty="0"/>
+              <a:t>。通过解释器解释，直接执行代码（编译和运行是连续步骤）。</a:t>
+            </a:r>
+            <a:endParaRPr lang="en-US" altLang="zh-CN" dirty="0"/>
+          </a:p>
+          <a:p>
+            <a:pPr marL="228600" indent="-228600">
+              <a:buAutoNum type="arabicPeriod"/>
+            </a:pPr>
+            <a:r>
+              <a:rPr lang="zh-CN" altLang="en-US" dirty="0"/>
+              <a:t>高级编程语言：高度封装的编程语言。以人类日常语言为基础，对人类具有较高可读性的编程语言。</a:t>
+            </a:r>
+            <a:endParaRPr lang="en-US" altLang="zh-CN" dirty="0"/>
+          </a:p>
+          <a:p>
+            <a:pPr marL="228600" indent="-228600">
+              <a:buAutoNum type="arabicPeriod"/>
+            </a:pPr>
+            <a:r>
+              <a:rPr lang="zh-CN" altLang="en-US" dirty="0"/>
+              <a:t>通用：能够用于不同领域的编程语言。反例，</a:t>
+            </a:r>
+            <a:r>
+              <a:rPr lang="en-US" altLang="zh-CN" dirty="0"/>
+              <a:t>ENVI-IDL</a:t>
+            </a:r>
+            <a:r>
+              <a:rPr lang="zh-CN" altLang="en-US" dirty="0"/>
+              <a:t>编程语言</a:t>
+            </a:r>
+            <a:endParaRPr lang="en-US" altLang="zh-CN" dirty="0"/>
+          </a:p>
+          <a:p>
+            <a:pPr marL="228600" indent="-228600">
+              <a:buAutoNum type="arabicPeriod"/>
+            </a:pPr>
+            <a:r>
+              <a:rPr lang="zh-CN" altLang="en-US" dirty="0"/>
+              <a:t>范罗苏姆头发茂盛。</a:t>
+            </a:r>
+            <a:endParaRPr lang="en-US" altLang="zh-CN" dirty="0"/>
           </a:p>
         </p:txBody>
       </p:sp>
     </p:spTree>
     <p:extLst>
       <p:ext uri="{BB962C8B-B14F-4D97-AF65-F5344CB8AC3E}">
-        <p14:creationId xmlns:p14="http://schemas.microsoft.com/office/powerpoint/2010/main" val="1577010930"/>
+        <p14:creationId xmlns:p14="http://schemas.microsoft.com/office/powerpoint/2010/main" val="2800426961"/>
       </p:ext>
     </p:extLst>
   </p:cSld>
@@ -2377,7 +2431,7 @@
     </p:spTree>
     <p:extLst>
       <p:ext uri="{BB962C8B-B14F-4D97-AF65-F5344CB8AC3E}">
-        <p14:creationId xmlns:p14="http://schemas.microsoft.com/office/powerpoint/2010/main" val="2454910235"/>
+        <p14:creationId xmlns:p14="http://schemas.microsoft.com/office/powerpoint/2010/main" val="1577010930"/>
       </p:ext>
     </p:extLst>
   </p:cSld>
@@ -2436,14 +2490,17 @@
           <a:bodyPr/>
           <a:lstStyle/>
           <a:p>
-            <a:endParaRPr lang="zh-CN" altLang="en-US"/>
+            <a:pPr marL="228600" indent="-228600">
+              <a:buAutoNum type="arabicPeriod"/>
+            </a:pPr>
+            <a:endParaRPr lang="zh-CN" altLang="en-US" dirty="0"/>
           </a:p>
         </p:txBody>
       </p:sp>
     </p:spTree>
     <p:extLst>
       <p:ext uri="{BB962C8B-B14F-4D97-AF65-F5344CB8AC3E}">
-        <p14:creationId xmlns:p14="http://schemas.microsoft.com/office/powerpoint/2010/main" val="3133025803"/>
+        <p14:creationId xmlns:p14="http://schemas.microsoft.com/office/powerpoint/2010/main" val="2454910235"/>
       </p:ext>
     </p:extLst>
   </p:cSld>
@@ -2509,7 +2566,7 @@
     </p:spTree>
     <p:extLst>
       <p:ext uri="{BB962C8B-B14F-4D97-AF65-F5344CB8AC3E}">
-        <p14:creationId xmlns:p14="http://schemas.microsoft.com/office/powerpoint/2010/main" val="2541570655"/>
+        <p14:creationId xmlns:p14="http://schemas.microsoft.com/office/powerpoint/2010/main" val="3133025803"/>
       </p:ext>
     </p:extLst>
   </p:cSld>
@@ -2641,7 +2698,7 @@
     </p:spTree>
     <p:extLst>
       <p:ext uri="{BB962C8B-B14F-4D97-AF65-F5344CB8AC3E}">
-        <p14:creationId xmlns:p14="http://schemas.microsoft.com/office/powerpoint/2010/main" val="1560160027"/>
+        <p14:creationId xmlns:p14="http://schemas.microsoft.com/office/powerpoint/2010/main" val="2541570655"/>
       </p:ext>
     </p:extLst>
   </p:cSld>
@@ -2707,7 +2764,7 @@
     </p:spTree>
     <p:extLst>
       <p:ext uri="{BB962C8B-B14F-4D97-AF65-F5344CB8AC3E}">
-        <p14:creationId xmlns:p14="http://schemas.microsoft.com/office/powerpoint/2010/main" val="513116671"/>
+        <p14:creationId xmlns:p14="http://schemas.microsoft.com/office/powerpoint/2010/main" val="1560160027"/>
       </p:ext>
     </p:extLst>
   </p:cSld>
@@ -2773,7 +2830,7 @@
     </p:spTree>
     <p:extLst>
       <p:ext uri="{BB962C8B-B14F-4D97-AF65-F5344CB8AC3E}">
-        <p14:creationId xmlns:p14="http://schemas.microsoft.com/office/powerpoint/2010/main" val="3287899020"/>
+        <p14:creationId xmlns:p14="http://schemas.microsoft.com/office/powerpoint/2010/main" val="513116671"/>
       </p:ext>
     </p:extLst>
   </p:cSld>
@@ -2839,7 +2896,7 @@
     </p:spTree>
     <p:extLst>
       <p:ext uri="{BB962C8B-B14F-4D97-AF65-F5344CB8AC3E}">
-        <p14:creationId xmlns:p14="http://schemas.microsoft.com/office/powerpoint/2010/main" val="1357873307"/>
+        <p14:creationId xmlns:p14="http://schemas.microsoft.com/office/powerpoint/2010/main" val="3287899020"/>
       </p:ext>
     </p:extLst>
   </p:cSld>
@@ -2905,7 +2962,7 @@
     </p:spTree>
     <p:extLst>
       <p:ext uri="{BB962C8B-B14F-4D97-AF65-F5344CB8AC3E}">
-        <p14:creationId xmlns:p14="http://schemas.microsoft.com/office/powerpoint/2010/main" val="3967688125"/>
+        <p14:creationId xmlns:p14="http://schemas.microsoft.com/office/powerpoint/2010/main" val="1357873307"/>
       </p:ext>
     </p:extLst>
   </p:cSld>
@@ -2971,7 +3028,7 @@
     </p:spTree>
     <p:extLst>
       <p:ext uri="{BB962C8B-B14F-4D97-AF65-F5344CB8AC3E}">
-        <p14:creationId xmlns:p14="http://schemas.microsoft.com/office/powerpoint/2010/main" val="1356241983"/>
+        <p14:creationId xmlns:p14="http://schemas.microsoft.com/office/powerpoint/2010/main" val="3967688125"/>
       </p:ext>
     </p:extLst>
   </p:cSld>
@@ -3037,7 +3094,7 @@
     </p:spTree>
     <p:extLst>
       <p:ext uri="{BB962C8B-B14F-4D97-AF65-F5344CB8AC3E}">
-        <p14:creationId xmlns:p14="http://schemas.microsoft.com/office/powerpoint/2010/main" val="3766728333"/>
+        <p14:creationId xmlns:p14="http://schemas.microsoft.com/office/powerpoint/2010/main" val="1356241983"/>
       </p:ext>
     </p:extLst>
   </p:cSld>
@@ -3103,7 +3160,7 @@
     </p:spTree>
     <p:extLst>
       <p:ext uri="{BB962C8B-B14F-4D97-AF65-F5344CB8AC3E}">
-        <p14:creationId xmlns:p14="http://schemas.microsoft.com/office/powerpoint/2010/main" val="4214623760"/>
+        <p14:creationId xmlns:p14="http://schemas.microsoft.com/office/powerpoint/2010/main" val="3766728333"/>
       </p:ext>
     </p:extLst>
   </p:cSld>
@@ -3169,6 +3226,72 @@
     </p:spTree>
     <p:extLst>
       <p:ext uri="{BB962C8B-B14F-4D97-AF65-F5344CB8AC3E}">
+        <p14:creationId xmlns:p14="http://schemas.microsoft.com/office/powerpoint/2010/main" val="4214623760"/>
+      </p:ext>
+    </p:extLst>
+  </p:cSld>
+  <p:clrMapOvr>
+    <a:masterClrMapping/>
+  </p:clrMapOvr>
+</p:notes>
+</file>
+
+<file path=ppt/notesSlides/notesSlide29.xml><?xml version="1.0" encoding="utf-8"?>
+<p:notes xmlns:a="http://schemas.openxmlformats.org/drawingml/2006/main" xmlns:r="http://schemas.openxmlformats.org/officeDocument/2006/relationships" xmlns:p="http://schemas.openxmlformats.org/presentationml/2006/main">
+  <p:cSld>
+    <p:spTree>
+      <p:nvGrpSpPr>
+        <p:cNvPr id="1" name=""/>
+        <p:cNvGrpSpPr/>
+        <p:nvPr/>
+      </p:nvGrpSpPr>
+      <p:grpSpPr>
+        <a:xfrm>
+          <a:off x="0" y="0"/>
+          <a:ext cx="0" cy="0"/>
+          <a:chOff x="0" y="0"/>
+          <a:chExt cx="0" cy="0"/>
+        </a:xfrm>
+      </p:grpSpPr>
+      <p:sp>
+        <p:nvSpPr>
+          <p:cNvPr id="2" name="幻灯片图像占位符 1"/>
+          <p:cNvSpPr>
+            <a:spLocks noGrp="1" noRot="1" noChangeAspect="1"/>
+          </p:cNvSpPr>
+          <p:nvPr>
+            <p:ph type="sldImg"/>
+          </p:nvPr>
+        </p:nvSpPr>
+        <p:spPr>
+          <a:xfrm>
+            <a:off x="142875" y="768350"/>
+            <a:ext cx="6818313" cy="3836988"/>
+          </a:xfrm>
+        </p:spPr>
+      </p:sp>
+      <p:sp>
+        <p:nvSpPr>
+          <p:cNvPr id="3" name="备注占位符 2"/>
+          <p:cNvSpPr>
+            <a:spLocks noGrp="1"/>
+          </p:cNvSpPr>
+          <p:nvPr>
+            <p:ph type="body" idx="1"/>
+          </p:nvPr>
+        </p:nvSpPr>
+        <p:spPr/>
+        <p:txBody>
+          <a:bodyPr/>
+          <a:lstStyle/>
+          <a:p>
+            <a:endParaRPr lang="zh-CN" altLang="en-US"/>
+          </a:p>
+        </p:txBody>
+      </p:sp>
+    </p:spTree>
+    <p:extLst>
+      <p:ext uri="{BB962C8B-B14F-4D97-AF65-F5344CB8AC3E}">
         <p14:creationId xmlns:p14="http://schemas.microsoft.com/office/powerpoint/2010/main" val="1192313296"/>
       </p:ext>
     </p:extLst>
@@ -3179,7 +3302,73 @@
 </p:notes>
 </file>
 
-<file path=ppt/notesSlides/notesSlide29.xml><?xml version="1.0" encoding="utf-8"?>
+<file path=ppt/notesSlides/notesSlide3.xml><?xml version="1.0" encoding="utf-8"?>
+<p:notes xmlns:a="http://schemas.openxmlformats.org/drawingml/2006/main" xmlns:r="http://schemas.openxmlformats.org/officeDocument/2006/relationships" xmlns:p="http://schemas.openxmlformats.org/presentationml/2006/main">
+  <p:cSld>
+    <p:spTree>
+      <p:nvGrpSpPr>
+        <p:cNvPr id="1" name=""/>
+        <p:cNvGrpSpPr/>
+        <p:nvPr/>
+      </p:nvGrpSpPr>
+      <p:grpSpPr>
+        <a:xfrm>
+          <a:off x="0" y="0"/>
+          <a:ext cx="0" cy="0"/>
+          <a:chOff x="0" y="0"/>
+          <a:chExt cx="0" cy="0"/>
+        </a:xfrm>
+      </p:grpSpPr>
+      <p:sp>
+        <p:nvSpPr>
+          <p:cNvPr id="2" name="幻灯片图像占位符 1"/>
+          <p:cNvSpPr>
+            <a:spLocks noGrp="1" noRot="1" noChangeAspect="1"/>
+          </p:cNvSpPr>
+          <p:nvPr>
+            <p:ph type="sldImg"/>
+          </p:nvPr>
+        </p:nvSpPr>
+        <p:spPr>
+          <a:xfrm>
+            <a:off x="142875" y="768350"/>
+            <a:ext cx="6818313" cy="3836988"/>
+          </a:xfrm>
+        </p:spPr>
+      </p:sp>
+      <p:sp>
+        <p:nvSpPr>
+          <p:cNvPr id="3" name="备注占位符 2"/>
+          <p:cNvSpPr>
+            <a:spLocks noGrp="1"/>
+          </p:cNvSpPr>
+          <p:nvPr>
+            <p:ph type="body" idx="1"/>
+          </p:nvPr>
+        </p:nvSpPr>
+        <p:spPr/>
+        <p:txBody>
+          <a:bodyPr/>
+          <a:lstStyle/>
+          <a:p>
+            <a:endParaRPr lang="zh-CN" altLang="en-US" dirty="0"/>
+          </a:p>
+        </p:txBody>
+      </p:sp>
+    </p:spTree>
+    <p:extLst>
+      <p:ext uri="{BB962C8B-B14F-4D97-AF65-F5344CB8AC3E}">
+        <p14:creationId xmlns:p14="http://schemas.microsoft.com/office/powerpoint/2010/main" val="2420041332"/>
+      </p:ext>
+    </p:extLst>
+  </p:cSld>
+  <p:clrMapOvr>
+    <a:masterClrMapping/>
+  </p:clrMapOvr>
+</p:notes>
+</file>
+
+<file path=ppt/notesSlides/notesSlide30.xml><?xml version="1.0" encoding="utf-8"?>
 <p:notes xmlns:a="http://schemas.openxmlformats.org/drawingml/2006/main" xmlns:r="http://schemas.openxmlformats.org/officeDocument/2006/relationships" xmlns:p="http://schemas.openxmlformats.org/presentationml/2006/main">
   <p:cSld>
     <p:spTree>
@@ -3263,138 +3452,6 @@
 </p:notes>
 </file>
 
-<file path=ppt/notesSlides/notesSlide3.xml><?xml version="1.0" encoding="utf-8"?>
-<p:notes xmlns:a="http://schemas.openxmlformats.org/drawingml/2006/main" xmlns:r="http://schemas.openxmlformats.org/officeDocument/2006/relationships" xmlns:p="http://schemas.openxmlformats.org/presentationml/2006/main">
-  <p:cSld>
-    <p:spTree>
-      <p:nvGrpSpPr>
-        <p:cNvPr id="1" name=""/>
-        <p:cNvGrpSpPr/>
-        <p:nvPr/>
-      </p:nvGrpSpPr>
-      <p:grpSpPr>
-        <a:xfrm>
-          <a:off x="0" y="0"/>
-          <a:ext cx="0" cy="0"/>
-          <a:chOff x="0" y="0"/>
-          <a:chExt cx="0" cy="0"/>
-        </a:xfrm>
-      </p:grpSpPr>
-      <p:sp>
-        <p:nvSpPr>
-          <p:cNvPr id="2" name="幻灯片图像占位符 1"/>
-          <p:cNvSpPr>
-            <a:spLocks noGrp="1" noRot="1" noChangeAspect="1"/>
-          </p:cNvSpPr>
-          <p:nvPr>
-            <p:ph type="sldImg"/>
-          </p:nvPr>
-        </p:nvSpPr>
-        <p:spPr>
-          <a:xfrm>
-            <a:off x="142875" y="768350"/>
-            <a:ext cx="6818313" cy="3836988"/>
-          </a:xfrm>
-        </p:spPr>
-      </p:sp>
-      <p:sp>
-        <p:nvSpPr>
-          <p:cNvPr id="3" name="备注占位符 2"/>
-          <p:cNvSpPr>
-            <a:spLocks noGrp="1"/>
-          </p:cNvSpPr>
-          <p:nvPr>
-            <p:ph type="body" idx="1"/>
-          </p:nvPr>
-        </p:nvSpPr>
-        <p:spPr/>
-        <p:txBody>
-          <a:bodyPr/>
-          <a:lstStyle/>
-          <a:p>
-            <a:endParaRPr lang="zh-CN" altLang="en-US" dirty="0"/>
-          </a:p>
-        </p:txBody>
-      </p:sp>
-    </p:spTree>
-    <p:extLst>
-      <p:ext uri="{BB962C8B-B14F-4D97-AF65-F5344CB8AC3E}">
-        <p14:creationId xmlns:p14="http://schemas.microsoft.com/office/powerpoint/2010/main" val="2420041332"/>
-      </p:ext>
-    </p:extLst>
-  </p:cSld>
-  <p:clrMapOvr>
-    <a:masterClrMapping/>
-  </p:clrMapOvr>
-</p:notes>
-</file>
-
-<file path=ppt/notesSlides/notesSlide30.xml><?xml version="1.0" encoding="utf-8"?>
-<p:notes xmlns:a="http://schemas.openxmlformats.org/drawingml/2006/main" xmlns:r="http://schemas.openxmlformats.org/officeDocument/2006/relationships" xmlns:p="http://schemas.openxmlformats.org/presentationml/2006/main">
-  <p:cSld>
-    <p:spTree>
-      <p:nvGrpSpPr>
-        <p:cNvPr id="1" name=""/>
-        <p:cNvGrpSpPr/>
-        <p:nvPr/>
-      </p:nvGrpSpPr>
-      <p:grpSpPr>
-        <a:xfrm>
-          <a:off x="0" y="0"/>
-          <a:ext cx="0" cy="0"/>
-          <a:chOff x="0" y="0"/>
-          <a:chExt cx="0" cy="0"/>
-        </a:xfrm>
-      </p:grpSpPr>
-      <p:sp>
-        <p:nvSpPr>
-          <p:cNvPr id="2" name="幻灯片图像占位符 1"/>
-          <p:cNvSpPr>
-            <a:spLocks noGrp="1" noRot="1" noChangeAspect="1"/>
-          </p:cNvSpPr>
-          <p:nvPr>
-            <p:ph type="sldImg"/>
-          </p:nvPr>
-        </p:nvSpPr>
-        <p:spPr>
-          <a:xfrm>
-            <a:off x="142875" y="768350"/>
-            <a:ext cx="6818313" cy="3836988"/>
-          </a:xfrm>
-        </p:spPr>
-      </p:sp>
-      <p:sp>
-        <p:nvSpPr>
-          <p:cNvPr id="3" name="备注占位符 2"/>
-          <p:cNvSpPr>
-            <a:spLocks noGrp="1"/>
-          </p:cNvSpPr>
-          <p:nvPr>
-            <p:ph type="body" idx="1"/>
-          </p:nvPr>
-        </p:nvSpPr>
-        <p:spPr/>
-        <p:txBody>
-          <a:bodyPr/>
-          <a:lstStyle/>
-          <a:p>
-            <a:endParaRPr lang="zh-CN" altLang="en-US"/>
-          </a:p>
-        </p:txBody>
-      </p:sp>
-    </p:spTree>
-    <p:extLst>
-      <p:ext uri="{BB962C8B-B14F-4D97-AF65-F5344CB8AC3E}">
-        <p14:creationId xmlns:p14="http://schemas.microsoft.com/office/powerpoint/2010/main" val="1477229609"/>
-      </p:ext>
-    </p:extLst>
-  </p:cSld>
-  <p:clrMapOvr>
-    <a:masterClrMapping/>
-  </p:clrMapOvr>
-</p:notes>
-</file>
-
 <file path=ppt/notesSlides/notesSlide31.xml><?xml version="1.0" encoding="utf-8"?>
 <p:notes xmlns:a="http://schemas.openxmlformats.org/drawingml/2006/main" xmlns:r="http://schemas.openxmlformats.org/officeDocument/2006/relationships" xmlns:p="http://schemas.openxmlformats.org/presentationml/2006/main">
   <p:cSld>
@@ -3451,7 +3508,7 @@
     </p:spTree>
     <p:extLst>
       <p:ext uri="{BB962C8B-B14F-4D97-AF65-F5344CB8AC3E}">
-        <p14:creationId xmlns:p14="http://schemas.microsoft.com/office/powerpoint/2010/main" val="408023687"/>
+        <p14:creationId xmlns:p14="http://schemas.microsoft.com/office/powerpoint/2010/main" val="1477229609"/>
       </p:ext>
     </p:extLst>
   </p:cSld>
@@ -3517,6 +3574,72 @@
     </p:spTree>
     <p:extLst>
       <p:ext uri="{BB962C8B-B14F-4D97-AF65-F5344CB8AC3E}">
+        <p14:creationId xmlns:p14="http://schemas.microsoft.com/office/powerpoint/2010/main" val="408023687"/>
+      </p:ext>
+    </p:extLst>
+  </p:cSld>
+  <p:clrMapOvr>
+    <a:masterClrMapping/>
+  </p:clrMapOvr>
+</p:notes>
+</file>
+
+<file path=ppt/notesSlides/notesSlide33.xml><?xml version="1.0" encoding="utf-8"?>
+<p:notes xmlns:a="http://schemas.openxmlformats.org/drawingml/2006/main" xmlns:r="http://schemas.openxmlformats.org/officeDocument/2006/relationships" xmlns:p="http://schemas.openxmlformats.org/presentationml/2006/main">
+  <p:cSld>
+    <p:spTree>
+      <p:nvGrpSpPr>
+        <p:cNvPr id="1" name=""/>
+        <p:cNvGrpSpPr/>
+        <p:nvPr/>
+      </p:nvGrpSpPr>
+      <p:grpSpPr>
+        <a:xfrm>
+          <a:off x="0" y="0"/>
+          <a:ext cx="0" cy="0"/>
+          <a:chOff x="0" y="0"/>
+          <a:chExt cx="0" cy="0"/>
+        </a:xfrm>
+      </p:grpSpPr>
+      <p:sp>
+        <p:nvSpPr>
+          <p:cNvPr id="2" name="幻灯片图像占位符 1"/>
+          <p:cNvSpPr>
+            <a:spLocks noGrp="1" noRot="1" noChangeAspect="1"/>
+          </p:cNvSpPr>
+          <p:nvPr>
+            <p:ph type="sldImg"/>
+          </p:nvPr>
+        </p:nvSpPr>
+        <p:spPr>
+          <a:xfrm>
+            <a:off x="142875" y="768350"/>
+            <a:ext cx="6818313" cy="3836988"/>
+          </a:xfrm>
+        </p:spPr>
+      </p:sp>
+      <p:sp>
+        <p:nvSpPr>
+          <p:cNvPr id="3" name="备注占位符 2"/>
+          <p:cNvSpPr>
+            <a:spLocks noGrp="1"/>
+          </p:cNvSpPr>
+          <p:nvPr>
+            <p:ph type="body" idx="1"/>
+          </p:nvPr>
+        </p:nvSpPr>
+        <p:spPr/>
+        <p:txBody>
+          <a:bodyPr/>
+          <a:lstStyle/>
+          <a:p>
+            <a:endParaRPr lang="zh-CN" altLang="en-US"/>
+          </a:p>
+        </p:txBody>
+      </p:sp>
+    </p:spTree>
+    <p:extLst>
+      <p:ext uri="{BB962C8B-B14F-4D97-AF65-F5344CB8AC3E}">
         <p14:creationId xmlns:p14="http://schemas.microsoft.com/office/powerpoint/2010/main" val="4257943572"/>
       </p:ext>
     </p:extLst>
@@ -3527,7 +3650,7 @@
 </p:notes>
 </file>
 
-<file path=ppt/notesSlides/notesSlide33.xml><?xml version="1.0" encoding="utf-8"?>
+<file path=ppt/notesSlides/notesSlide34.xml><?xml version="1.0" encoding="utf-8"?>
 <p:notes xmlns:a="http://schemas.openxmlformats.org/drawingml/2006/main" xmlns:r="http://schemas.openxmlformats.org/officeDocument/2006/relationships" xmlns:p="http://schemas.openxmlformats.org/presentationml/2006/main">
   <p:cSld>
     <p:spTree>
@@ -3588,7 +3711,7 @@
 </p:notes>
 </file>
 
-<file path=ppt/notesSlides/notesSlide34.xml><?xml version="1.0" encoding="utf-8"?>
+<file path=ppt/notesSlides/notesSlide35.xml><?xml version="1.0" encoding="utf-8"?>
 <p:notes xmlns:a="http://schemas.openxmlformats.org/drawingml/2006/main" xmlns:r="http://schemas.openxmlformats.org/officeDocument/2006/relationships" xmlns:p="http://schemas.openxmlformats.org/presentationml/2006/main">
   <p:cSld>
     <p:spTree>
@@ -3812,6 +3935,93 @@
   <p:cSld>
     <p:spTree>
       <p:nvGrpSpPr>
+        <p:cNvPr id="1" name="">
+          <a:extLst>
+            <a:ext uri="{FF2B5EF4-FFF2-40B4-BE49-F238E27FC236}">
+              <a16:creationId xmlns:a16="http://schemas.microsoft.com/office/drawing/2014/main" id="{000078B0-23BC-1FED-8F36-F8A04A26BB8E}"/>
+            </a:ext>
+          </a:extLst>
+        </p:cNvPr>
+        <p:cNvGrpSpPr/>
+        <p:nvPr/>
+      </p:nvGrpSpPr>
+      <p:grpSpPr>
+        <a:xfrm>
+          <a:off x="0" y="0"/>
+          <a:ext cx="0" cy="0"/>
+          <a:chOff x="0" y="0"/>
+          <a:chExt cx="0" cy="0"/>
+        </a:xfrm>
+      </p:grpSpPr>
+      <p:sp>
+        <p:nvSpPr>
+          <p:cNvPr id="2" name="幻灯片图像占位符 1">
+            <a:extLst>
+              <a:ext uri="{FF2B5EF4-FFF2-40B4-BE49-F238E27FC236}">
+                <a16:creationId xmlns:a16="http://schemas.microsoft.com/office/drawing/2014/main" id="{4F14E2FD-184B-7C01-40AD-587583C601AE}"/>
+              </a:ext>
+            </a:extLst>
+          </p:cNvPr>
+          <p:cNvSpPr>
+            <a:spLocks noGrp="1" noRot="1" noChangeAspect="1"/>
+          </p:cNvSpPr>
+          <p:nvPr>
+            <p:ph type="sldImg"/>
+          </p:nvPr>
+        </p:nvSpPr>
+        <p:spPr>
+          <a:xfrm>
+            <a:off x="142875" y="768350"/>
+            <a:ext cx="6818313" cy="3836988"/>
+          </a:xfrm>
+        </p:spPr>
+      </p:sp>
+      <p:sp>
+        <p:nvSpPr>
+          <p:cNvPr id="3" name="备注占位符 2">
+            <a:extLst>
+              <a:ext uri="{FF2B5EF4-FFF2-40B4-BE49-F238E27FC236}">
+                <a16:creationId xmlns:a16="http://schemas.microsoft.com/office/drawing/2014/main" id="{590D5518-3BEC-8E17-B40B-AA3D22F62F8F}"/>
+              </a:ext>
+            </a:extLst>
+          </p:cNvPr>
+          <p:cNvSpPr>
+            <a:spLocks noGrp="1"/>
+          </p:cNvSpPr>
+          <p:nvPr>
+            <p:ph type="body" idx="1"/>
+          </p:nvPr>
+        </p:nvSpPr>
+        <p:spPr/>
+        <p:txBody>
+          <a:bodyPr/>
+          <a:lstStyle/>
+          <a:p>
+            <a:r>
+              <a:rPr lang="zh-CN" altLang="en-US" dirty="0"/>
+              <a:t>期末考试前进行考前测试，熟悉试题。</a:t>
+            </a:r>
+          </a:p>
+        </p:txBody>
+      </p:sp>
+    </p:spTree>
+    <p:extLst>
+      <p:ext uri="{BB962C8B-B14F-4D97-AF65-F5344CB8AC3E}">
+        <p14:creationId xmlns:p14="http://schemas.microsoft.com/office/powerpoint/2010/main" val="1222284824"/>
+      </p:ext>
+    </p:extLst>
+  </p:cSld>
+  <p:clrMapOvr>
+    <a:masterClrMapping/>
+  </p:clrMapOvr>
+</p:notes>
+</file>
+
+<file path=ppt/notesSlides/notesSlide7.xml><?xml version="1.0" encoding="utf-8"?>
+<p:notes xmlns:a="http://schemas.openxmlformats.org/drawingml/2006/main" xmlns:r="http://schemas.openxmlformats.org/officeDocument/2006/relationships" xmlns:p="http://schemas.openxmlformats.org/presentationml/2006/main">
+  <p:cSld>
+    <p:spTree>
+      <p:nvGrpSpPr>
         <p:cNvPr id="1" name=""/>
         <p:cNvGrpSpPr/>
         <p:nvPr/>
@@ -3874,7 +4084,7 @@
               </a14:hiddenLine>
             </a:ext>
             <a:ext uri="{FAA26D3D-D897-4be2-8F04-BA451C77F1D7}">
-              <ma14:placeholderFlag xmlns:ma14="http://schemas.microsoft.com/office/mac/drawingml/2011/main" xmlns="" val="1"/>
+              <ma14:placeholderFlag xmlns="" xmlns:ma14="http://schemas.microsoft.com/office/mac/drawingml/2011/main" val="1"/>
             </a:ext>
           </a:extLst>
         </p:spPr>
@@ -3915,104 +4125,6 @@
     <p:extLst>
       <p:ext uri="{BB962C8B-B14F-4D97-AF65-F5344CB8AC3E}">
         <p14:creationId xmlns:p14="http://schemas.microsoft.com/office/powerpoint/2010/main" val="4128186715"/>
-      </p:ext>
-    </p:extLst>
-  </p:cSld>
-  <p:clrMapOvr>
-    <a:masterClrMapping/>
-  </p:clrMapOvr>
-</p:notes>
-</file>
-
-<file path=ppt/notesSlides/notesSlide7.xml><?xml version="1.0" encoding="utf-8"?>
-<p:notes xmlns:a="http://schemas.openxmlformats.org/drawingml/2006/main" xmlns:r="http://schemas.openxmlformats.org/officeDocument/2006/relationships" xmlns:p="http://schemas.openxmlformats.org/presentationml/2006/main">
-  <p:cSld>
-    <p:spTree>
-      <p:nvGrpSpPr>
-        <p:cNvPr id="1" name=""/>
-        <p:cNvGrpSpPr/>
-        <p:nvPr/>
-      </p:nvGrpSpPr>
-      <p:grpSpPr>
-        <a:xfrm>
-          <a:off x="0" y="0"/>
-          <a:ext cx="0" cy="0"/>
-          <a:chOff x="0" y="0"/>
-          <a:chExt cx="0" cy="0"/>
-        </a:xfrm>
-      </p:grpSpPr>
-      <p:sp>
-        <p:nvSpPr>
-          <p:cNvPr id="2" name="幻灯片图像占位符 1"/>
-          <p:cNvSpPr>
-            <a:spLocks noGrp="1" noRot="1" noChangeAspect="1"/>
-          </p:cNvSpPr>
-          <p:nvPr>
-            <p:ph type="sldImg"/>
-          </p:nvPr>
-        </p:nvSpPr>
-        <p:spPr>
-          <a:xfrm>
-            <a:off x="142875" y="768350"/>
-            <a:ext cx="6818313" cy="3836988"/>
-          </a:xfrm>
-        </p:spPr>
-      </p:sp>
-      <p:sp>
-        <p:nvSpPr>
-          <p:cNvPr id="3" name="备注占位符 2"/>
-          <p:cNvSpPr>
-            <a:spLocks noGrp="1"/>
-          </p:cNvSpPr>
-          <p:nvPr>
-            <p:ph type="body" idx="1"/>
-          </p:nvPr>
-        </p:nvSpPr>
-        <p:spPr/>
-        <p:txBody>
-          <a:bodyPr/>
-          <a:lstStyle/>
-          <a:p>
-            <a:endParaRPr lang="zh-CN" altLang="en-US"/>
-          </a:p>
-        </p:txBody>
-      </p:sp>
-      <p:sp>
-        <p:nvSpPr>
-          <p:cNvPr id="4" name="灯片编号占位符 3"/>
-          <p:cNvSpPr>
-            <a:spLocks noGrp="1"/>
-          </p:cNvSpPr>
-          <p:nvPr>
-            <p:ph type="sldNum" sz="quarter" idx="10"/>
-          </p:nvPr>
-        </p:nvSpPr>
-        <p:spPr/>
-        <p:txBody>
-          <a:bodyPr/>
-          <a:lstStyle/>
-          <a:p>
-            <a:fld id="{B77ECF62-1638-4DD4-9C28-B7A1E023F854}" type="slidenum">
-              <a:rPr lang="zh-CN" altLang="en-US" smtClean="0">
-                <a:solidFill>
-                  <a:prstClr val="black"/>
-                </a:solidFill>
-              </a:rPr>
-              <a:pPr/>
-              <a:t>7</a:t>
-            </a:fld>
-            <a:endParaRPr lang="zh-CN" altLang="en-US">
-              <a:solidFill>
-                <a:prstClr val="black"/>
-              </a:solidFill>
-            </a:endParaRPr>
-          </a:p>
-        </p:txBody>
-      </p:sp>
-    </p:spTree>
-    <p:extLst>
-      <p:ext uri="{BB962C8B-B14F-4D97-AF65-F5344CB8AC3E}">
-        <p14:creationId xmlns:p14="http://schemas.microsoft.com/office/powerpoint/2010/main" val="2582552139"/>
       </p:ext>
     </p:extLst>
   </p:cSld>
@@ -4075,10 +4187,42 @@
           </a:p>
         </p:txBody>
       </p:sp>
+      <p:sp>
+        <p:nvSpPr>
+          <p:cNvPr id="4" name="灯片编号占位符 3"/>
+          <p:cNvSpPr>
+            <a:spLocks noGrp="1"/>
+          </p:cNvSpPr>
+          <p:nvPr>
+            <p:ph type="sldNum" sz="quarter" idx="10"/>
+          </p:nvPr>
+        </p:nvSpPr>
+        <p:spPr/>
+        <p:txBody>
+          <a:bodyPr/>
+          <a:lstStyle/>
+          <a:p>
+            <a:fld id="{B77ECF62-1638-4DD4-9C28-B7A1E023F854}" type="slidenum">
+              <a:rPr lang="zh-CN" altLang="en-US" smtClean="0">
+                <a:solidFill>
+                  <a:prstClr val="black"/>
+                </a:solidFill>
+              </a:rPr>
+              <a:pPr/>
+              <a:t>8</a:t>
+            </a:fld>
+            <a:endParaRPr lang="zh-CN" altLang="en-US">
+              <a:solidFill>
+                <a:prstClr val="black"/>
+              </a:solidFill>
+            </a:endParaRPr>
+          </a:p>
+        </p:txBody>
+      </p:sp>
     </p:spTree>
     <p:extLst>
       <p:ext uri="{BB962C8B-B14F-4D97-AF65-F5344CB8AC3E}">
-        <p14:creationId xmlns:p14="http://schemas.microsoft.com/office/powerpoint/2010/main" val="3047110815"/>
+        <p14:creationId xmlns:p14="http://schemas.microsoft.com/office/powerpoint/2010/main" val="2582552139"/>
       </p:ext>
     </p:extLst>
   </p:cSld>
@@ -4093,13 +4237,7 @@
   <p:cSld>
     <p:spTree>
       <p:nvGrpSpPr>
-        <p:cNvPr id="1" name="">
-          <a:extLst>
-            <a:ext uri="{FF2B5EF4-FFF2-40B4-BE49-F238E27FC236}">
-              <a16:creationId xmlns:a16="http://schemas.microsoft.com/office/drawing/2014/main" id="{979E65CF-9525-F48B-7663-08A96690664C}"/>
-            </a:ext>
-          </a:extLst>
-        </p:cNvPr>
+        <p:cNvPr id="1" name=""/>
         <p:cNvGrpSpPr/>
         <p:nvPr/>
       </p:nvGrpSpPr>
@@ -4113,13 +4251,7 @@
       </p:grpSpPr>
       <p:sp>
         <p:nvSpPr>
-          <p:cNvPr id="2" name="幻灯片图像占位符 1">
-            <a:extLst>
-              <a:ext uri="{FF2B5EF4-FFF2-40B4-BE49-F238E27FC236}">
-                <a16:creationId xmlns:a16="http://schemas.microsoft.com/office/drawing/2014/main" id="{C3AAC67B-6FA3-0CCB-AAB1-BDA97E2301AD}"/>
-              </a:ext>
-            </a:extLst>
-          </p:cNvPr>
+          <p:cNvPr id="2" name="幻灯片图像占位符 1"/>
           <p:cNvSpPr>
             <a:spLocks noGrp="1" noRot="1" noChangeAspect="1"/>
           </p:cNvSpPr>
@@ -4136,13 +4268,7 @@
       </p:sp>
       <p:sp>
         <p:nvSpPr>
-          <p:cNvPr id="3" name="备注占位符 2">
-            <a:extLst>
-              <a:ext uri="{FF2B5EF4-FFF2-40B4-BE49-F238E27FC236}">
-                <a16:creationId xmlns:a16="http://schemas.microsoft.com/office/drawing/2014/main" id="{D94A2576-06A2-4AA2-EA21-8FB5DA72F761}"/>
-              </a:ext>
-            </a:extLst>
-          </p:cNvPr>
+          <p:cNvPr id="3" name="备注占位符 2"/>
           <p:cNvSpPr>
             <a:spLocks noGrp="1"/>
           </p:cNvSpPr>
@@ -4155,52 +4281,14 @@
           <a:bodyPr/>
           <a:lstStyle/>
           <a:p>
-            <a:r>
-              <a:rPr lang="en-US" altLang="zh-CN" dirty="0"/>
-              <a:t>1.</a:t>
-            </a:r>
-            <a:r>
-              <a:rPr lang="zh-CN" altLang="en-US" dirty="0"/>
-              <a:t> </a:t>
-            </a:r>
-            <a:r>
-              <a:rPr lang="en-US" altLang="zh-CN" dirty="0"/>
-              <a:t>CPU</a:t>
-            </a:r>
-            <a:r>
-              <a:rPr lang="zh-CN" altLang="en-US" dirty="0"/>
-              <a:t>、内存、硬盘计算机三大核心硬件。内存与硬盘的区分</a:t>
-            </a:r>
-            <a:endParaRPr lang="en-US" altLang="zh-CN" dirty="0"/>
-          </a:p>
-          <a:p>
-            <a:r>
-              <a:rPr lang="en-US" altLang="zh-CN" dirty="0"/>
-              <a:t>2.</a:t>
-            </a:r>
-            <a:r>
-              <a:rPr lang="zh-CN" altLang="en-US" dirty="0"/>
-              <a:t> 键盘、鼠标用于接收信息，相当于</a:t>
-            </a:r>
-            <a:r>
-              <a:rPr lang="zh-CN" altLang="en-US" baseline="0" dirty="0"/>
-              <a:t>人的眼睛、耳朵；</a:t>
-            </a:r>
-            <a:r>
-              <a:rPr lang="zh-CN" altLang="en-US" dirty="0"/>
-              <a:t>显示器用于输出信息，相当于人的嘴巴。</a:t>
-            </a:r>
-            <a:endParaRPr lang="en-US" altLang="zh-CN" dirty="0"/>
-          </a:p>
-          <a:p>
-            <a:endParaRPr lang="zh-CN" altLang="en-US" dirty="0"/>
+            <a:endParaRPr lang="zh-CN" altLang="en-US"/>
           </a:p>
         </p:txBody>
       </p:sp>
     </p:spTree>
     <p:extLst>
       <p:ext uri="{BB962C8B-B14F-4D97-AF65-F5344CB8AC3E}">
-        <p14:creationId xmlns:p14="http://schemas.microsoft.com/office/powerpoint/2010/main" val="3531991757"/>
+        <p14:creationId xmlns:p14="http://schemas.microsoft.com/office/powerpoint/2010/main" val="3047110815"/>
       </p:ext>
     </p:extLst>
   </p:cSld>
@@ -6024,7 +6112,7 @@
               </a14:hiddenLine>
             </a:ext>
             <a:ext uri="{FAA26D3D-D897-4be2-8F04-BA451C77F1D7}">
-              <ma14:placeholderFlag xmlns:ma14="http://schemas.microsoft.com/office/mac/drawingml/2011/main" xmlns="" val="1"/>
+              <ma14:placeholderFlag xmlns="" xmlns:ma14="http://schemas.microsoft.com/office/mac/drawingml/2011/main" val="1"/>
             </a:ext>
           </a:extLst>
         </p:spPr>
@@ -9720,7 +9808,7 @@
               </a14:hiddenLine>
             </a:ext>
             <a:ext uri="{FAA26D3D-D897-4be2-8F04-BA451C77F1D7}">
-              <ma14:placeholderFlag xmlns:ma14="http://schemas.microsoft.com/office/mac/drawingml/2011/main" xmlns="" val="1"/>
+              <ma14:placeholderFlag xmlns="" xmlns:ma14="http://schemas.microsoft.com/office/mac/drawingml/2011/main" val="1"/>
             </a:ext>
           </a:extLst>
         </p:spPr>
@@ -11758,6 +11846,755 @@
         <p:cNvPr id="1" name="">
           <a:extLst>
             <a:ext uri="{FF2B5EF4-FFF2-40B4-BE49-F238E27FC236}">
+              <a16:creationId xmlns:a16="http://schemas.microsoft.com/office/drawing/2014/main" id="{44FF129A-FF63-24A6-A57D-00161683056E}"/>
+            </a:ext>
+          </a:extLst>
+        </p:cNvPr>
+        <p:cNvGrpSpPr/>
+        <p:nvPr/>
+      </p:nvGrpSpPr>
+      <p:grpSpPr>
+        <a:xfrm>
+          <a:off x="0" y="0"/>
+          <a:ext cx="0" cy="0"/>
+          <a:chOff x="0" y="0"/>
+          <a:chExt cx="0" cy="0"/>
+        </a:xfrm>
+      </p:grpSpPr>
+      <p:pic>
+        <p:nvPicPr>
+          <p:cNvPr id="9" name="图片 8">
+            <a:extLst>
+              <a:ext uri="{FF2B5EF4-FFF2-40B4-BE49-F238E27FC236}">
+                <a16:creationId xmlns:a16="http://schemas.microsoft.com/office/drawing/2014/main" id="{D994883C-DAA1-878F-1EEC-D7703207ECA1}"/>
+              </a:ext>
+            </a:extLst>
+          </p:cNvPr>
+          <p:cNvPicPr>
+            <a:picLocks noChangeAspect="1"/>
+          </p:cNvPicPr>
+          <p:nvPr/>
+        </p:nvPicPr>
+        <p:blipFill>
+          <a:blip r:embed="rId3"/>
+          <a:stretch>
+            <a:fillRect/>
+          </a:stretch>
+        </p:blipFill>
+        <p:spPr>
+          <a:xfrm>
+            <a:off x="6096000" y="1636800"/>
+            <a:ext cx="5861538" cy="3782483"/>
+          </a:xfrm>
+          <a:prstGeom prst="rect">
+            <a:avLst/>
+          </a:prstGeom>
+        </p:spPr>
+      </p:pic>
+      <p:sp>
+        <p:nvSpPr>
+          <p:cNvPr id="3" name="标题 2">
+            <a:extLst>
+              <a:ext uri="{FF2B5EF4-FFF2-40B4-BE49-F238E27FC236}">
+                <a16:creationId xmlns:a16="http://schemas.microsoft.com/office/drawing/2014/main" id="{99B66C00-EDCE-04F7-7400-295D59EC35A0}"/>
+              </a:ext>
+            </a:extLst>
+          </p:cNvPr>
+          <p:cNvSpPr>
+            <a:spLocks noGrp="1"/>
+          </p:cNvSpPr>
+          <p:nvPr>
+            <p:ph type="title"/>
+          </p:nvPr>
+        </p:nvSpPr>
+        <p:spPr>
+          <a:xfrm>
+            <a:off x="1" y="8526"/>
+            <a:ext cx="10537374" cy="792162"/>
+          </a:xfrm>
+        </p:spPr>
+        <p:txBody>
+          <a:bodyPr/>
+          <a:lstStyle/>
+          <a:p>
+            <a:r>
+              <a:rPr lang="zh-CN" altLang="en-US" dirty="0">
+                <a:latin typeface="微软雅黑" pitchFamily="34" charset="-122"/>
+                <a:ea typeface="微软雅黑" pitchFamily="34" charset="-122"/>
+              </a:rPr>
+              <a:t>一、计算机原理与程序设计概述</a:t>
+            </a:r>
+          </a:p>
+        </p:txBody>
+      </p:sp>
+      <p:sp>
+        <p:nvSpPr>
+          <p:cNvPr id="2" name="TextBox 1">
+            <a:extLst>
+              <a:ext uri="{FF2B5EF4-FFF2-40B4-BE49-F238E27FC236}">
+                <a16:creationId xmlns:a16="http://schemas.microsoft.com/office/drawing/2014/main" id="{71639ACD-DB86-70B8-79B8-0619E0D2588B}"/>
+              </a:ext>
+            </a:extLst>
+          </p:cNvPr>
+          <p:cNvSpPr txBox="1"/>
+          <p:nvPr/>
+        </p:nvSpPr>
+        <p:spPr>
+          <a:xfrm>
+            <a:off x="4966636" y="846751"/>
+            <a:ext cx="5383699" cy="743986"/>
+          </a:xfrm>
+          <a:prstGeom prst="rect">
+            <a:avLst/>
+          </a:prstGeom>
+          <a:noFill/>
+        </p:spPr>
+        <p:txBody>
+          <a:bodyPr wrap="square" rtlCol="0">
+            <a:spAutoFit/>
+          </a:bodyPr>
+          <a:lstStyle/>
+          <a:p>
+            <a:pPr algn="just">
+              <a:lnSpc>
+                <a:spcPct val="150000"/>
+              </a:lnSpc>
+            </a:pPr>
+            <a:r>
+              <a:rPr lang="zh-CN" altLang="en-US" sz="3200" b="1" dirty="0">
+                <a:solidFill>
+                  <a:srgbClr val="333333"/>
+                </a:solidFill>
+                <a:latin typeface="+mn-ea"/>
+                <a:ea typeface="+mn-ea"/>
+              </a:rPr>
+              <a:t>计算机核心组成</a:t>
+            </a:r>
+            <a:endParaRPr lang="en-US" altLang="zh-CN" sz="3200" b="1" dirty="0">
+              <a:solidFill>
+                <a:srgbClr val="333333"/>
+              </a:solidFill>
+              <a:latin typeface="+mn-ea"/>
+              <a:ea typeface="+mn-ea"/>
+            </a:endParaRPr>
+          </a:p>
+        </p:txBody>
+      </p:sp>
+      <p:sp>
+        <p:nvSpPr>
+          <p:cNvPr id="6" name="TextBox 5">
+            <a:extLst>
+              <a:ext uri="{FF2B5EF4-FFF2-40B4-BE49-F238E27FC236}">
+                <a16:creationId xmlns:a16="http://schemas.microsoft.com/office/drawing/2014/main" id="{7CFDB476-000D-1357-72EF-2B78C59AC79D}"/>
+              </a:ext>
+            </a:extLst>
+          </p:cNvPr>
+          <p:cNvSpPr txBox="1"/>
+          <p:nvPr/>
+        </p:nvSpPr>
+        <p:spPr>
+          <a:xfrm>
+            <a:off x="234462" y="1021247"/>
+            <a:ext cx="7127344" cy="4401205"/>
+          </a:xfrm>
+          <a:prstGeom prst="rect">
+            <a:avLst/>
+          </a:prstGeom>
+          <a:noFill/>
+        </p:spPr>
+        <p:txBody>
+          <a:bodyPr wrap="square">
+            <a:spAutoFit/>
+          </a:bodyPr>
+          <a:lstStyle/>
+          <a:p>
+            <a:pPr algn="just"/>
+            <a:r>
+              <a:rPr lang="zh-CN" altLang="en-US" sz="2800" b="1" dirty="0">
+                <a:solidFill>
+                  <a:schemeClr val="bg2"/>
+                </a:solidFill>
+                <a:highlight>
+                  <a:srgbClr val="FFFFFF"/>
+                </a:highlight>
+                <a:latin typeface="Microsoft YaHei" panose="020B0503020204020204" pitchFamily="34" charset="-122"/>
+                <a:ea typeface="Microsoft YaHei" panose="020B0503020204020204" pitchFamily="34" charset="-122"/>
+              </a:rPr>
+              <a:t>硬件层</a:t>
+            </a:r>
+            <a:r>
+              <a:rPr lang="zh-CN" altLang="en-US" dirty="0">
+                <a:solidFill>
+                  <a:schemeClr val="bg2"/>
+                </a:solidFill>
+                <a:highlight>
+                  <a:srgbClr val="FFFFFF"/>
+                </a:highlight>
+                <a:latin typeface="Microsoft YaHei" panose="020B0503020204020204" pitchFamily="34" charset="-122"/>
+                <a:ea typeface="Microsoft YaHei" panose="020B0503020204020204" pitchFamily="34" charset="-122"/>
+              </a:rPr>
+              <a:t>：</a:t>
+            </a:r>
+            <a:endParaRPr lang="en-US" altLang="zh-CN" dirty="0">
+              <a:solidFill>
+                <a:schemeClr val="bg2"/>
+              </a:solidFill>
+              <a:highlight>
+                <a:srgbClr val="FFFFFF"/>
+              </a:highlight>
+              <a:latin typeface="Microsoft YaHei" panose="020B0503020204020204" pitchFamily="34" charset="-122"/>
+              <a:ea typeface="Microsoft YaHei" panose="020B0503020204020204" pitchFamily="34" charset="-122"/>
+            </a:endParaRPr>
+          </a:p>
+          <a:p>
+            <a:pPr algn="just"/>
+            <a:r>
+              <a:rPr lang="en-US" altLang="zh-CN" b="1" dirty="0">
+                <a:solidFill>
+                  <a:schemeClr val="accent2"/>
+                </a:solidFill>
+                <a:highlight>
+                  <a:srgbClr val="FFFFFF"/>
+                </a:highlight>
+                <a:latin typeface="Microsoft YaHei" panose="020B0503020204020204" pitchFamily="34" charset="-122"/>
+                <a:ea typeface="Microsoft YaHei" panose="020B0503020204020204" pitchFamily="34" charset="-122"/>
+              </a:rPr>
+              <a:t>CPU</a:t>
+            </a:r>
+            <a:r>
+              <a:rPr lang="zh-CN" altLang="en-US" dirty="0">
+                <a:solidFill>
+                  <a:schemeClr val="bg2"/>
+                </a:solidFill>
+                <a:highlight>
+                  <a:srgbClr val="FFFFFF"/>
+                </a:highlight>
+                <a:latin typeface="Microsoft YaHei" panose="020B0503020204020204" pitchFamily="34" charset="-122"/>
+                <a:ea typeface="Microsoft YaHei" panose="020B0503020204020204" pitchFamily="34" charset="-122"/>
+              </a:rPr>
+              <a:t>：运算器、控制器、寄存器</a:t>
+            </a:r>
+            <a:endParaRPr lang="en-US" altLang="zh-CN" dirty="0">
+              <a:solidFill>
+                <a:schemeClr val="bg2"/>
+              </a:solidFill>
+              <a:highlight>
+                <a:srgbClr val="FFFFFF"/>
+              </a:highlight>
+              <a:latin typeface="Microsoft YaHei" panose="020B0503020204020204" pitchFamily="34" charset="-122"/>
+              <a:ea typeface="Microsoft YaHei" panose="020B0503020204020204" pitchFamily="34" charset="-122"/>
+            </a:endParaRPr>
+          </a:p>
+          <a:p>
+            <a:pPr algn="just"/>
+            <a:r>
+              <a:rPr lang="zh-CN" altLang="en-US" b="1" dirty="0">
+                <a:solidFill>
+                  <a:schemeClr val="accent2"/>
+                </a:solidFill>
+                <a:highlight>
+                  <a:srgbClr val="FFFFFF"/>
+                </a:highlight>
+                <a:latin typeface="Microsoft YaHei" panose="020B0503020204020204" pitchFamily="34" charset="-122"/>
+                <a:ea typeface="Microsoft YaHei" panose="020B0503020204020204" pitchFamily="34" charset="-122"/>
+              </a:rPr>
+              <a:t>内存（</a:t>
+            </a:r>
+            <a:r>
+              <a:rPr lang="en-US" altLang="zh-CN" b="1" dirty="0">
+                <a:solidFill>
+                  <a:schemeClr val="accent2"/>
+                </a:solidFill>
+                <a:highlight>
+                  <a:srgbClr val="FFFFFF"/>
+                </a:highlight>
+                <a:latin typeface="Microsoft YaHei" panose="020B0503020204020204" pitchFamily="34" charset="-122"/>
+                <a:ea typeface="Microsoft YaHei" panose="020B0503020204020204" pitchFamily="34" charset="-122"/>
+              </a:rPr>
+              <a:t>RAM</a:t>
+            </a:r>
+            <a:r>
+              <a:rPr lang="zh-CN" altLang="en-US" b="1" dirty="0">
+                <a:solidFill>
+                  <a:schemeClr val="accent2"/>
+                </a:solidFill>
+                <a:highlight>
+                  <a:srgbClr val="FFFFFF"/>
+                </a:highlight>
+                <a:latin typeface="Microsoft YaHei" panose="020B0503020204020204" pitchFamily="34" charset="-122"/>
+                <a:ea typeface="Microsoft YaHei" panose="020B0503020204020204" pitchFamily="34" charset="-122"/>
+              </a:rPr>
+              <a:t>）</a:t>
+            </a:r>
+            <a:r>
+              <a:rPr lang="zh-CN" altLang="en-US" dirty="0">
+                <a:solidFill>
+                  <a:schemeClr val="bg2"/>
+                </a:solidFill>
+                <a:highlight>
+                  <a:srgbClr val="FFFFFF"/>
+                </a:highlight>
+                <a:latin typeface="Microsoft YaHei" panose="020B0503020204020204" pitchFamily="34" charset="-122"/>
+                <a:ea typeface="Microsoft YaHei" panose="020B0503020204020204" pitchFamily="34" charset="-122"/>
+              </a:rPr>
+              <a:t>：临时存储程序与数据</a:t>
+            </a:r>
+            <a:endParaRPr lang="en-US" altLang="zh-CN" dirty="0">
+              <a:solidFill>
+                <a:schemeClr val="bg2"/>
+              </a:solidFill>
+              <a:highlight>
+                <a:srgbClr val="FFFFFF"/>
+              </a:highlight>
+              <a:latin typeface="Microsoft YaHei" panose="020B0503020204020204" pitchFamily="34" charset="-122"/>
+              <a:ea typeface="Microsoft YaHei" panose="020B0503020204020204" pitchFamily="34" charset="-122"/>
+            </a:endParaRPr>
+          </a:p>
+          <a:p>
+            <a:pPr algn="just"/>
+            <a:r>
+              <a:rPr lang="zh-CN" altLang="en-US" b="1" dirty="0">
+                <a:solidFill>
+                  <a:schemeClr val="accent2"/>
+                </a:solidFill>
+                <a:highlight>
+                  <a:srgbClr val="FFFFFF"/>
+                </a:highlight>
+                <a:latin typeface="Microsoft YaHei" panose="020B0503020204020204" pitchFamily="34" charset="-122"/>
+                <a:ea typeface="Microsoft YaHei" panose="020B0503020204020204" pitchFamily="34" charset="-122"/>
+              </a:rPr>
+              <a:t>硬盘</a:t>
+            </a:r>
+            <a:r>
+              <a:rPr lang="zh-CN" altLang="en-US" dirty="0">
+                <a:solidFill>
+                  <a:schemeClr val="bg2"/>
+                </a:solidFill>
+                <a:highlight>
+                  <a:srgbClr val="FFFFFF"/>
+                </a:highlight>
+                <a:latin typeface="Microsoft YaHei" panose="020B0503020204020204" pitchFamily="34" charset="-122"/>
+                <a:ea typeface="Microsoft YaHei" panose="020B0503020204020204" pitchFamily="34" charset="-122"/>
+              </a:rPr>
+              <a:t>：永久存储数据。</a:t>
+            </a:r>
+            <a:endParaRPr lang="en-US" altLang="zh-CN" dirty="0">
+              <a:solidFill>
+                <a:schemeClr val="bg2"/>
+              </a:solidFill>
+              <a:highlight>
+                <a:srgbClr val="FFFFFF"/>
+              </a:highlight>
+              <a:latin typeface="Microsoft YaHei" panose="020B0503020204020204" pitchFamily="34" charset="-122"/>
+              <a:ea typeface="Microsoft YaHei" panose="020B0503020204020204" pitchFamily="34" charset="-122"/>
+            </a:endParaRPr>
+          </a:p>
+          <a:p>
+            <a:pPr algn="just"/>
+            <a:r>
+              <a:rPr lang="zh-CN" altLang="en-US" b="1" dirty="0">
+                <a:solidFill>
+                  <a:schemeClr val="accent2"/>
+                </a:solidFill>
+                <a:highlight>
+                  <a:srgbClr val="FFFFFF"/>
+                </a:highlight>
+                <a:latin typeface="Microsoft YaHei" panose="020B0503020204020204" pitchFamily="34" charset="-122"/>
+                <a:ea typeface="Microsoft YaHei" panose="020B0503020204020204" pitchFamily="34" charset="-122"/>
+              </a:rPr>
+              <a:t>电源</a:t>
+            </a:r>
+            <a:r>
+              <a:rPr lang="zh-CN" altLang="en-US" dirty="0">
+                <a:solidFill>
+                  <a:schemeClr val="bg2"/>
+                </a:solidFill>
+                <a:highlight>
+                  <a:srgbClr val="FFFFFF"/>
+                </a:highlight>
+                <a:latin typeface="Microsoft YaHei" panose="020B0503020204020204" pitchFamily="34" charset="-122"/>
+                <a:ea typeface="Microsoft YaHei" panose="020B0503020204020204" pitchFamily="34" charset="-122"/>
+              </a:rPr>
+              <a:t>：为主板、</a:t>
+            </a:r>
+            <a:r>
+              <a:rPr lang="en-US" altLang="zh-CN" dirty="0">
+                <a:solidFill>
+                  <a:schemeClr val="bg2"/>
+                </a:solidFill>
+                <a:highlight>
+                  <a:srgbClr val="FFFFFF"/>
+                </a:highlight>
+                <a:latin typeface="Microsoft YaHei" panose="020B0503020204020204" pitchFamily="34" charset="-122"/>
+                <a:ea typeface="Microsoft YaHei" panose="020B0503020204020204" pitchFamily="34" charset="-122"/>
+              </a:rPr>
+              <a:t>CPU</a:t>
+            </a:r>
+            <a:r>
+              <a:rPr lang="zh-CN" altLang="en-US" dirty="0">
+                <a:solidFill>
+                  <a:schemeClr val="bg2"/>
+                </a:solidFill>
+                <a:highlight>
+                  <a:srgbClr val="FFFFFF"/>
+                </a:highlight>
+                <a:latin typeface="Microsoft YaHei" panose="020B0503020204020204" pitchFamily="34" charset="-122"/>
+                <a:ea typeface="Microsoft YaHei" panose="020B0503020204020204" pitchFamily="34" charset="-122"/>
+              </a:rPr>
+              <a:t>、硬盘等供电。</a:t>
+            </a:r>
+            <a:endParaRPr lang="en-US" altLang="zh-CN" dirty="0">
+              <a:solidFill>
+                <a:schemeClr val="bg2"/>
+              </a:solidFill>
+              <a:highlight>
+                <a:srgbClr val="FFFFFF"/>
+              </a:highlight>
+              <a:latin typeface="Microsoft YaHei" panose="020B0503020204020204" pitchFamily="34" charset="-122"/>
+              <a:ea typeface="Microsoft YaHei" panose="020B0503020204020204" pitchFamily="34" charset="-122"/>
+            </a:endParaRPr>
+          </a:p>
+          <a:p>
+            <a:pPr algn="just"/>
+            <a:r>
+              <a:rPr lang="zh-CN" altLang="en-US" b="1" dirty="0">
+                <a:solidFill>
+                  <a:schemeClr val="accent2"/>
+                </a:solidFill>
+                <a:highlight>
+                  <a:srgbClr val="FFFFFF"/>
+                </a:highlight>
+                <a:latin typeface="Microsoft YaHei" panose="020B0503020204020204" pitchFamily="34" charset="-122"/>
+                <a:ea typeface="Microsoft YaHei" panose="020B0503020204020204" pitchFamily="34" charset="-122"/>
+              </a:rPr>
+              <a:t>主板</a:t>
+            </a:r>
+            <a:r>
+              <a:rPr lang="zh-CN" altLang="en-US" dirty="0">
+                <a:solidFill>
+                  <a:schemeClr val="bg2"/>
+                </a:solidFill>
+                <a:highlight>
+                  <a:srgbClr val="FFFFFF"/>
+                </a:highlight>
+                <a:latin typeface="Microsoft YaHei" panose="020B0503020204020204" pitchFamily="34" charset="-122"/>
+                <a:ea typeface="Microsoft YaHei" panose="020B0503020204020204" pitchFamily="34" charset="-122"/>
+              </a:rPr>
+              <a:t>：连接并协调</a:t>
+            </a:r>
+            <a:r>
+              <a:rPr lang="en-US" altLang="zh-CN" dirty="0">
+                <a:solidFill>
+                  <a:schemeClr val="bg2"/>
+                </a:solidFill>
+                <a:highlight>
+                  <a:srgbClr val="FFFFFF"/>
+                </a:highlight>
+                <a:latin typeface="Microsoft YaHei" panose="020B0503020204020204" pitchFamily="34" charset="-122"/>
+                <a:ea typeface="Microsoft YaHei" panose="020B0503020204020204" pitchFamily="34" charset="-122"/>
+              </a:rPr>
+              <a:t>CPU</a:t>
+            </a:r>
+            <a:r>
+              <a:rPr lang="zh-CN" altLang="en-US" dirty="0">
+                <a:solidFill>
+                  <a:schemeClr val="bg2"/>
+                </a:solidFill>
+                <a:highlight>
+                  <a:srgbClr val="FFFFFF"/>
+                </a:highlight>
+                <a:latin typeface="Microsoft YaHei" panose="020B0503020204020204" pitchFamily="34" charset="-122"/>
+                <a:ea typeface="Microsoft YaHei" panose="020B0503020204020204" pitchFamily="34" charset="-122"/>
+              </a:rPr>
+              <a:t>、内存等设备；</a:t>
+            </a:r>
+            <a:endParaRPr lang="en-US" altLang="zh-CN" dirty="0">
+              <a:solidFill>
+                <a:schemeClr val="bg2"/>
+              </a:solidFill>
+              <a:highlight>
+                <a:srgbClr val="FFFFFF"/>
+              </a:highlight>
+              <a:latin typeface="Microsoft YaHei" panose="020B0503020204020204" pitchFamily="34" charset="-122"/>
+              <a:ea typeface="Microsoft YaHei" panose="020B0503020204020204" pitchFamily="34" charset="-122"/>
+            </a:endParaRPr>
+          </a:p>
+          <a:p>
+            <a:pPr algn="just"/>
+            <a:r>
+              <a:rPr lang="zh-CN" altLang="en-US" b="1" dirty="0">
+                <a:solidFill>
+                  <a:schemeClr val="accent2"/>
+                </a:solidFill>
+                <a:highlight>
+                  <a:srgbClr val="FFFFFF"/>
+                </a:highlight>
+                <a:latin typeface="Microsoft YaHei" panose="020B0503020204020204" pitchFamily="34" charset="-122"/>
+                <a:ea typeface="Microsoft YaHei" panose="020B0503020204020204" pitchFamily="34" charset="-122"/>
+              </a:rPr>
+              <a:t>显卡</a:t>
+            </a:r>
+            <a:r>
+              <a:rPr lang="zh-CN" altLang="en-US" dirty="0">
+                <a:solidFill>
+                  <a:schemeClr val="bg2"/>
+                </a:solidFill>
+                <a:highlight>
+                  <a:srgbClr val="FFFFFF"/>
+                </a:highlight>
+                <a:latin typeface="Microsoft YaHei" panose="020B0503020204020204" pitchFamily="34" charset="-122"/>
+                <a:ea typeface="Microsoft YaHei" panose="020B0503020204020204" pitchFamily="34" charset="-122"/>
+              </a:rPr>
+              <a:t>：处理图形图像并输出显示内容；</a:t>
+            </a:r>
+            <a:endParaRPr lang="en-US" altLang="zh-CN" dirty="0">
+              <a:solidFill>
+                <a:schemeClr val="bg2"/>
+              </a:solidFill>
+              <a:highlight>
+                <a:srgbClr val="FFFFFF"/>
+              </a:highlight>
+              <a:latin typeface="Microsoft YaHei" panose="020B0503020204020204" pitchFamily="34" charset="-122"/>
+              <a:ea typeface="Microsoft YaHei" panose="020B0503020204020204" pitchFamily="34" charset="-122"/>
+            </a:endParaRPr>
+          </a:p>
+          <a:p>
+            <a:pPr algn="just"/>
+            <a:r>
+              <a:rPr lang="en-US" altLang="zh-CN" b="1" dirty="0">
+                <a:solidFill>
+                  <a:schemeClr val="accent2"/>
+                </a:solidFill>
+                <a:highlight>
+                  <a:srgbClr val="FFFFFF"/>
+                </a:highlight>
+                <a:latin typeface="Microsoft YaHei" panose="020B0503020204020204" pitchFamily="34" charset="-122"/>
+                <a:ea typeface="Microsoft YaHei" panose="020B0503020204020204" pitchFamily="34" charset="-122"/>
+              </a:rPr>
+              <a:t>I/O</a:t>
+            </a:r>
+            <a:r>
+              <a:rPr lang="zh-CN" altLang="en-US" b="1" dirty="0">
+                <a:solidFill>
+                  <a:schemeClr val="accent2"/>
+                </a:solidFill>
+                <a:highlight>
+                  <a:srgbClr val="FFFFFF"/>
+                </a:highlight>
+                <a:latin typeface="Microsoft YaHei" panose="020B0503020204020204" pitchFamily="34" charset="-122"/>
+                <a:ea typeface="Microsoft YaHei" panose="020B0503020204020204" pitchFamily="34" charset="-122"/>
+              </a:rPr>
+              <a:t>设备 </a:t>
+            </a:r>
+            <a:r>
+              <a:rPr lang="zh-CN" altLang="en-US" dirty="0">
+                <a:solidFill>
+                  <a:schemeClr val="bg2"/>
+                </a:solidFill>
+                <a:highlight>
+                  <a:srgbClr val="FFFFFF"/>
+                </a:highlight>
+                <a:latin typeface="Microsoft YaHei" panose="020B0503020204020204" pitchFamily="34" charset="-122"/>
+                <a:ea typeface="Microsoft YaHei" panose="020B0503020204020204" pitchFamily="34" charset="-122"/>
+              </a:rPr>
+              <a:t>：键盘、鼠标、网络接口、显示器。</a:t>
+            </a:r>
+            <a:endParaRPr lang="en-US" dirty="0">
+              <a:solidFill>
+                <a:schemeClr val="bg2"/>
+              </a:solidFill>
+              <a:highlight>
+                <a:srgbClr val="FFFFFF"/>
+              </a:highlight>
+              <a:latin typeface="Microsoft YaHei" panose="020B0503020204020204" pitchFamily="34" charset="-122"/>
+              <a:ea typeface="Microsoft YaHei" panose="020B0503020204020204" pitchFamily="34" charset="-122"/>
+            </a:endParaRPr>
+          </a:p>
+        </p:txBody>
+      </p:sp>
+      <p:sp>
+        <p:nvSpPr>
+          <p:cNvPr id="5" name="TextBox 4">
+            <a:extLst>
+              <a:ext uri="{FF2B5EF4-FFF2-40B4-BE49-F238E27FC236}">
+                <a16:creationId xmlns:a16="http://schemas.microsoft.com/office/drawing/2014/main" id="{7AC6B5E3-0388-9AA6-FF0C-4997994FECC5}"/>
+              </a:ext>
+            </a:extLst>
+          </p:cNvPr>
+          <p:cNvSpPr txBox="1"/>
+          <p:nvPr/>
+        </p:nvSpPr>
+        <p:spPr>
+          <a:xfrm>
+            <a:off x="234462" y="5578515"/>
+            <a:ext cx="10807928" cy="1077218"/>
+          </a:xfrm>
+          <a:prstGeom prst="rect">
+            <a:avLst/>
+          </a:prstGeom>
+          <a:noFill/>
+        </p:spPr>
+        <p:txBody>
+          <a:bodyPr wrap="square">
+            <a:spAutoFit/>
+          </a:bodyPr>
+          <a:lstStyle/>
+          <a:p>
+            <a:pPr algn="just"/>
+            <a:r>
+              <a:rPr lang="en-US" sz="2800" b="1" dirty="0" err="1">
+                <a:solidFill>
+                  <a:schemeClr val="bg2"/>
+                </a:solidFill>
+                <a:highlight>
+                  <a:srgbClr val="FFFFFF"/>
+                </a:highlight>
+                <a:latin typeface="Microsoft YaHei" panose="020B0503020204020204" pitchFamily="34" charset="-122"/>
+                <a:ea typeface="Microsoft YaHei" panose="020B0503020204020204" pitchFamily="34" charset="-122"/>
+              </a:rPr>
+              <a:t>软件层</a:t>
+            </a:r>
+            <a:r>
+              <a:rPr lang="zh-CN" altLang="en-US" dirty="0">
+                <a:solidFill>
+                  <a:schemeClr val="bg2"/>
+                </a:solidFill>
+                <a:highlight>
+                  <a:srgbClr val="FFFFFF"/>
+                </a:highlight>
+                <a:latin typeface="Microsoft YaHei" panose="020B0503020204020204" pitchFamily="34" charset="-122"/>
+                <a:ea typeface="Microsoft YaHei" panose="020B0503020204020204" pitchFamily="34" charset="-122"/>
+              </a:rPr>
+              <a:t>：</a:t>
+            </a:r>
+            <a:endParaRPr lang="en-US" dirty="0">
+              <a:solidFill>
+                <a:schemeClr val="bg2"/>
+              </a:solidFill>
+              <a:highlight>
+                <a:srgbClr val="FFFFFF"/>
+              </a:highlight>
+              <a:latin typeface="Microsoft YaHei" panose="020B0503020204020204" pitchFamily="34" charset="-122"/>
+              <a:ea typeface="Microsoft YaHei" panose="020B0503020204020204" pitchFamily="34" charset="-122"/>
+            </a:endParaRPr>
+          </a:p>
+          <a:p>
+            <a:pPr algn="just"/>
+            <a:r>
+              <a:rPr lang="en-US" b="1" dirty="0" err="1">
+                <a:solidFill>
+                  <a:schemeClr val="accent2"/>
+                </a:solidFill>
+                <a:highlight>
+                  <a:srgbClr val="FFFFFF"/>
+                </a:highlight>
+                <a:latin typeface="Microsoft YaHei" panose="020B0503020204020204" pitchFamily="34" charset="-122"/>
+                <a:ea typeface="Microsoft YaHei" panose="020B0503020204020204" pitchFamily="34" charset="-122"/>
+              </a:rPr>
+              <a:t>操作系统</a:t>
+            </a:r>
+            <a:r>
+              <a:rPr lang="zh-CN" altLang="en-US" dirty="0">
+                <a:solidFill>
+                  <a:schemeClr val="bg2"/>
+                </a:solidFill>
+                <a:highlight>
+                  <a:srgbClr val="FFFFFF"/>
+                </a:highlight>
+                <a:latin typeface="Microsoft YaHei" panose="020B0503020204020204" pitchFamily="34" charset="-122"/>
+                <a:ea typeface="Microsoft YaHei" panose="020B0503020204020204" pitchFamily="34" charset="-122"/>
+              </a:rPr>
+              <a:t>：资源管理、进程调度。</a:t>
+            </a:r>
+            <a:r>
+              <a:rPr lang="zh-CN" altLang="en-US" b="1" dirty="0">
+                <a:solidFill>
+                  <a:schemeClr val="accent2"/>
+                </a:solidFill>
+                <a:highlight>
+                  <a:srgbClr val="FFFFFF"/>
+                </a:highlight>
+                <a:latin typeface="Microsoft YaHei" panose="020B0503020204020204" pitchFamily="34" charset="-122"/>
+                <a:ea typeface="Microsoft YaHei" panose="020B0503020204020204" pitchFamily="34" charset="-122"/>
+              </a:rPr>
+              <a:t>应用程序</a:t>
+            </a:r>
+            <a:r>
+              <a:rPr lang="zh-CN" altLang="en-US" dirty="0">
+                <a:solidFill>
+                  <a:schemeClr val="bg2"/>
+                </a:solidFill>
+                <a:highlight>
+                  <a:srgbClr val="FFFFFF"/>
+                </a:highlight>
+                <a:latin typeface="Microsoft YaHei" panose="020B0503020204020204" pitchFamily="34" charset="-122"/>
+                <a:ea typeface="Microsoft YaHei" panose="020B0503020204020204" pitchFamily="34" charset="-122"/>
+              </a:rPr>
+              <a:t>：如微信、</a:t>
+            </a:r>
+            <a:r>
+              <a:rPr lang="en-US" altLang="zh-CN" dirty="0">
+                <a:solidFill>
+                  <a:schemeClr val="bg2"/>
+                </a:solidFill>
+                <a:highlight>
+                  <a:srgbClr val="FFFFFF"/>
+                </a:highlight>
+                <a:latin typeface="Microsoft YaHei" panose="020B0503020204020204" pitchFamily="34" charset="-122"/>
+                <a:ea typeface="Microsoft YaHei" panose="020B0503020204020204" pitchFamily="34" charset="-122"/>
+              </a:rPr>
+              <a:t>office</a:t>
+            </a:r>
+            <a:r>
+              <a:rPr lang="zh-CN" altLang="en-US" dirty="0">
+                <a:solidFill>
+                  <a:schemeClr val="bg2"/>
+                </a:solidFill>
+                <a:highlight>
+                  <a:srgbClr val="FFFFFF"/>
+                </a:highlight>
+                <a:latin typeface="Microsoft YaHei" panose="020B0503020204020204" pitchFamily="34" charset="-122"/>
+                <a:ea typeface="Microsoft YaHei" panose="020B0503020204020204" pitchFamily="34" charset="-122"/>
+              </a:rPr>
+              <a:t>办公软件等。</a:t>
+            </a:r>
+            <a:endParaRPr lang="en-US" altLang="zh-CN" dirty="0">
+              <a:solidFill>
+                <a:schemeClr val="bg2"/>
+              </a:solidFill>
+              <a:highlight>
+                <a:srgbClr val="FFFFFF"/>
+              </a:highlight>
+              <a:latin typeface="Microsoft YaHei" panose="020B0503020204020204" pitchFamily="34" charset="-122"/>
+              <a:ea typeface="Microsoft YaHei" panose="020B0503020204020204" pitchFamily="34" charset="-122"/>
+            </a:endParaRPr>
+          </a:p>
+        </p:txBody>
+      </p:sp>
+    </p:spTree>
+    <p:extLst>
+      <p:ext uri="{BB962C8B-B14F-4D97-AF65-F5344CB8AC3E}">
+        <p14:creationId xmlns:p14="http://schemas.microsoft.com/office/powerpoint/2010/main" val="3058806288"/>
+      </p:ext>
+    </p:extLst>
+  </p:cSld>
+  <p:clrMapOvr>
+    <a:masterClrMapping/>
+  </p:clrMapOvr>
+  <p:transition>
+    <p:fade/>
+  </p:transition>
+</p:sld>
+</file>
+
+<file path=ppt/slides/slide11.xml><?xml version="1.0" encoding="utf-8"?>
+<p:sld xmlns:a="http://schemas.openxmlformats.org/drawingml/2006/main" xmlns:r="http://schemas.openxmlformats.org/officeDocument/2006/relationships" xmlns:p="http://schemas.openxmlformats.org/presentationml/2006/main">
+  <p:cSld>
+    <p:spTree>
+      <p:nvGrpSpPr>
+        <p:cNvPr id="1" name="">
+          <a:extLst>
+            <a:ext uri="{FF2B5EF4-FFF2-40B4-BE49-F238E27FC236}">
               <a16:creationId xmlns:a16="http://schemas.microsoft.com/office/drawing/2014/main" id="{6E2D71C0-BA42-82F4-F42A-EECC3E8458FA}"/>
             </a:ext>
           </a:extLst>
@@ -12110,7 +12947,7 @@
 </p:sld>
 </file>
 
-<file path=ppt/slides/slide11.xml><?xml version="1.0" encoding="utf-8"?>
+<file path=ppt/slides/slide12.xml><?xml version="1.0" encoding="utf-8"?>
 <p:sld xmlns:a="http://schemas.openxmlformats.org/drawingml/2006/main" xmlns:r="http://schemas.openxmlformats.org/officeDocument/2006/relationships" xmlns:p="http://schemas.openxmlformats.org/presentationml/2006/main">
   <p:cSld>
     <p:spTree>
@@ -13094,7 +13931,7 @@
 </p:sld>
 </file>
 
-<file path=ppt/slides/slide12.xml><?xml version="1.0" encoding="utf-8"?>
+<file path=ppt/slides/slide13.xml><?xml version="1.0" encoding="utf-8"?>
 <p:sld xmlns:a="http://schemas.openxmlformats.org/drawingml/2006/main" xmlns:r="http://schemas.openxmlformats.org/officeDocument/2006/relationships" xmlns:p="http://schemas.openxmlformats.org/presentationml/2006/main">
   <p:cSld>
     <p:spTree>
@@ -14117,7 +14954,7 @@
 </p:sld>
 </file>
 
-<file path=ppt/slides/slide13.xml><?xml version="1.0" encoding="utf-8"?>
+<file path=ppt/slides/slide14.xml><?xml version="1.0" encoding="utf-8"?>
 <p:sld xmlns:a="http://schemas.openxmlformats.org/drawingml/2006/main" xmlns:r="http://schemas.openxmlformats.org/officeDocument/2006/relationships" xmlns:p="http://schemas.openxmlformats.org/presentationml/2006/main">
   <p:cSld>
     <p:spTree>
@@ -15055,7 +15892,7 @@
 </p:sld>
 </file>
 
-<file path=ppt/slides/slide14.xml><?xml version="1.0" encoding="utf-8"?>
+<file path=ppt/slides/slide15.xml><?xml version="1.0" encoding="utf-8"?>
 <p:sld xmlns:a="http://schemas.openxmlformats.org/drawingml/2006/main" xmlns:r="http://schemas.openxmlformats.org/officeDocument/2006/relationships" xmlns:p="http://schemas.openxmlformats.org/presentationml/2006/main">
   <p:cSld>
     <p:spTree>
@@ -15217,7 +16054,7 @@
 </p:sld>
 </file>
 
-<file path=ppt/slides/slide15.xml><?xml version="1.0" encoding="utf-8"?>
+<file path=ppt/slides/slide16.xml><?xml version="1.0" encoding="utf-8"?>
 <p:sld xmlns:a="http://schemas.openxmlformats.org/drawingml/2006/main" xmlns:r="http://schemas.openxmlformats.org/officeDocument/2006/relationships" xmlns:p="http://schemas.openxmlformats.org/presentationml/2006/main">
   <p:cSld>
     <p:spTree>
@@ -15822,7 +16659,7 @@
 </p:sld>
 </file>
 
-<file path=ppt/slides/slide16.xml><?xml version="1.0" encoding="utf-8"?>
+<file path=ppt/slides/slide17.xml><?xml version="1.0" encoding="utf-8"?>
 <p:sld xmlns:a="http://schemas.openxmlformats.org/drawingml/2006/main" xmlns:r="http://schemas.openxmlformats.org/officeDocument/2006/relationships" xmlns:p="http://schemas.openxmlformats.org/presentationml/2006/main">
   <p:cSld>
     <p:spTree>
@@ -16435,7 +17272,7 @@
 </p:sld>
 </file>
 
-<file path=ppt/slides/slide17.xml><?xml version="1.0" encoding="utf-8"?>
+<file path=ppt/slides/slide18.xml><?xml version="1.0" encoding="utf-8"?>
 <p:sld xmlns:a="http://schemas.openxmlformats.org/drawingml/2006/main" xmlns:r="http://schemas.openxmlformats.org/officeDocument/2006/relationships" xmlns:p="http://schemas.openxmlformats.org/presentationml/2006/main">
   <p:cSld>
     <p:spTree>
@@ -16873,7 +17710,7 @@
 </p:sld>
 </file>
 
-<file path=ppt/slides/slide18.xml><?xml version="1.0" encoding="utf-8"?>
+<file path=ppt/slides/slide19.xml><?xml version="1.0" encoding="utf-8"?>
 <p:sld xmlns:a="http://schemas.openxmlformats.org/drawingml/2006/main" xmlns:r="http://schemas.openxmlformats.org/officeDocument/2006/relationships" xmlns:p="http://schemas.openxmlformats.org/presentationml/2006/main">
   <p:cSld>
     <p:spTree>
@@ -17127,168 +17964,6 @@
     <p:extLst>
       <p:ext uri="{BB962C8B-B14F-4D97-AF65-F5344CB8AC3E}">
         <p14:creationId xmlns:p14="http://schemas.microsoft.com/office/powerpoint/2010/main" val="2062870849"/>
-      </p:ext>
-    </p:extLst>
-  </p:cSld>
-  <p:clrMapOvr>
-    <a:masterClrMapping/>
-  </p:clrMapOvr>
-  <p:transition>
-    <p:fade/>
-  </p:transition>
-</p:sld>
-</file>
-
-<file path=ppt/slides/slide19.xml><?xml version="1.0" encoding="utf-8"?>
-<p:sld xmlns:a="http://schemas.openxmlformats.org/drawingml/2006/main" xmlns:r="http://schemas.openxmlformats.org/officeDocument/2006/relationships" xmlns:p="http://schemas.openxmlformats.org/presentationml/2006/main">
-  <p:cSld>
-    <p:spTree>
-      <p:nvGrpSpPr>
-        <p:cNvPr id="1" name=""/>
-        <p:cNvGrpSpPr/>
-        <p:nvPr/>
-      </p:nvGrpSpPr>
-      <p:grpSpPr>
-        <a:xfrm>
-          <a:off x="0" y="0"/>
-          <a:ext cx="0" cy="0"/>
-          <a:chOff x="0" y="0"/>
-          <a:chExt cx="0" cy="0"/>
-        </a:xfrm>
-      </p:grpSpPr>
-      <p:sp>
-        <p:nvSpPr>
-          <p:cNvPr id="3" name="矩形 2"/>
-          <p:cNvSpPr/>
-          <p:nvPr/>
-        </p:nvSpPr>
-        <p:spPr>
-          <a:xfrm>
-            <a:off x="0" y="3471863"/>
-            <a:ext cx="12192000" cy="1543050"/>
-          </a:xfrm>
-          <a:prstGeom prst="rect">
-            <a:avLst/>
-          </a:prstGeom>
-          <a:solidFill>
-            <a:schemeClr val="accent1"/>
-          </a:solidFill>
-          <a:ln>
-            <a:noFill/>
-          </a:ln>
-        </p:spPr>
-        <p:txBody>
-          <a:bodyPr wrap="square" lIns="0" rtlCol="0" anchor="ctr">
-            <a:noAutofit/>
-          </a:bodyPr>
-          <a:lstStyle/>
-          <a:p>
-            <a:pPr algn="l"/>
-            <a:endParaRPr lang="zh-CN" altLang="en-US" b="1">
-              <a:solidFill>
-                <a:srgbClr val="FF0000"/>
-              </a:solidFill>
-              <a:latin typeface="微软雅黑" pitchFamily="34" charset="-122"/>
-              <a:ea typeface="微软雅黑" pitchFamily="34" charset="-122"/>
-            </a:endParaRPr>
-          </a:p>
-        </p:txBody>
-      </p:sp>
-      <p:sp>
-        <p:nvSpPr>
-          <p:cNvPr id="7" name="矩形 6"/>
-          <p:cNvSpPr/>
-          <p:nvPr/>
-        </p:nvSpPr>
-        <p:spPr>
-          <a:xfrm>
-            <a:off x="254224" y="3868895"/>
-            <a:ext cx="11670743" cy="646331"/>
-          </a:xfrm>
-          <a:prstGeom prst="rect">
-            <a:avLst/>
-          </a:prstGeom>
-        </p:spPr>
-        <p:txBody>
-          <a:bodyPr wrap="square">
-            <a:spAutoFit/>
-          </a:bodyPr>
-          <a:lstStyle/>
-          <a:p>
-            <a:pPr algn="l" fontAlgn="auto">
-              <a:spcBef>
-                <a:spcPts val="0"/>
-              </a:spcBef>
-              <a:spcAft>
-                <a:spcPts val="0"/>
-              </a:spcAft>
-            </a:pPr>
-            <a:r>
-              <a:rPr lang="zh-CN" altLang="en-US" sz="3600" b="1" dirty="0">
-                <a:latin typeface="微软雅黑" pitchFamily="34" charset="-122"/>
-                <a:ea typeface="微软雅黑" pitchFamily="34" charset="-122"/>
-              </a:rPr>
-              <a:t>三、</a:t>
-            </a:r>
-            <a:r>
-              <a:rPr lang="en-US" altLang="zh-CN" sz="3600" b="1" dirty="0">
-                <a:latin typeface="微软雅黑" pitchFamily="34" charset="-122"/>
-                <a:ea typeface="微软雅黑" pitchFamily="34" charset="-122"/>
-              </a:rPr>
-              <a:t>Python</a:t>
-            </a:r>
-            <a:r>
-              <a:rPr lang="zh-CN" altLang="en-US" sz="3600" b="1" dirty="0">
-                <a:latin typeface="微软雅黑" pitchFamily="34" charset="-122"/>
-                <a:ea typeface="微软雅黑" pitchFamily="34" charset="-122"/>
-              </a:rPr>
-              <a:t>编程环境配置</a:t>
-            </a:r>
-          </a:p>
-        </p:txBody>
-      </p:sp>
-      <p:sp>
-        <p:nvSpPr>
-          <p:cNvPr id="8" name="矩形 7"/>
-          <p:cNvSpPr/>
-          <p:nvPr/>
-        </p:nvSpPr>
-        <p:spPr>
-          <a:xfrm>
-            <a:off x="0" y="5014912"/>
-            <a:ext cx="12192000" cy="72000"/>
-          </a:xfrm>
-          <a:prstGeom prst="rect">
-            <a:avLst/>
-          </a:prstGeom>
-          <a:solidFill>
-            <a:schemeClr val="tx1">
-              <a:lumMod val="75000"/>
-            </a:schemeClr>
-          </a:solidFill>
-          <a:effectLst/>
-        </p:spPr>
-        <p:txBody>
-          <a:bodyPr wrap="square" lIns="0" rtlCol="0" anchor="ctr">
-            <a:noAutofit/>
-          </a:bodyPr>
-          <a:lstStyle/>
-          <a:p>
-            <a:pPr algn="l"/>
-            <a:endParaRPr lang="zh-CN" altLang="en-US" b="1">
-              <a:solidFill>
-                <a:srgbClr val="FF0000"/>
-              </a:solidFill>
-              <a:latin typeface="微软雅黑" pitchFamily="34" charset="-122"/>
-              <a:ea typeface="微软雅黑" pitchFamily="34" charset="-122"/>
-            </a:endParaRPr>
-          </a:p>
-        </p:txBody>
-      </p:sp>
-    </p:spTree>
-    <p:extLst>
-      <p:ext uri="{BB962C8B-B14F-4D97-AF65-F5344CB8AC3E}">
-        <p14:creationId xmlns:p14="http://schemas.microsoft.com/office/powerpoint/2010/main" val="972163772"/>
       </p:ext>
     </p:extLst>
   </p:cSld>
@@ -17476,6 +18151,168 @@
       </p:grpSpPr>
       <p:sp>
         <p:nvSpPr>
+          <p:cNvPr id="3" name="矩形 2"/>
+          <p:cNvSpPr/>
+          <p:nvPr/>
+        </p:nvSpPr>
+        <p:spPr>
+          <a:xfrm>
+            <a:off x="0" y="3471863"/>
+            <a:ext cx="12192000" cy="1543050"/>
+          </a:xfrm>
+          <a:prstGeom prst="rect">
+            <a:avLst/>
+          </a:prstGeom>
+          <a:solidFill>
+            <a:schemeClr val="accent1"/>
+          </a:solidFill>
+          <a:ln>
+            <a:noFill/>
+          </a:ln>
+        </p:spPr>
+        <p:txBody>
+          <a:bodyPr wrap="square" lIns="0" rtlCol="0" anchor="ctr">
+            <a:noAutofit/>
+          </a:bodyPr>
+          <a:lstStyle/>
+          <a:p>
+            <a:pPr algn="l"/>
+            <a:endParaRPr lang="zh-CN" altLang="en-US" b="1">
+              <a:solidFill>
+                <a:srgbClr val="FF0000"/>
+              </a:solidFill>
+              <a:latin typeface="微软雅黑" pitchFamily="34" charset="-122"/>
+              <a:ea typeface="微软雅黑" pitchFamily="34" charset="-122"/>
+            </a:endParaRPr>
+          </a:p>
+        </p:txBody>
+      </p:sp>
+      <p:sp>
+        <p:nvSpPr>
+          <p:cNvPr id="7" name="矩形 6"/>
+          <p:cNvSpPr/>
+          <p:nvPr/>
+        </p:nvSpPr>
+        <p:spPr>
+          <a:xfrm>
+            <a:off x="254224" y="3868895"/>
+            <a:ext cx="11670743" cy="646331"/>
+          </a:xfrm>
+          <a:prstGeom prst="rect">
+            <a:avLst/>
+          </a:prstGeom>
+        </p:spPr>
+        <p:txBody>
+          <a:bodyPr wrap="square">
+            <a:spAutoFit/>
+          </a:bodyPr>
+          <a:lstStyle/>
+          <a:p>
+            <a:pPr algn="l" fontAlgn="auto">
+              <a:spcBef>
+                <a:spcPts val="0"/>
+              </a:spcBef>
+              <a:spcAft>
+                <a:spcPts val="0"/>
+              </a:spcAft>
+            </a:pPr>
+            <a:r>
+              <a:rPr lang="zh-CN" altLang="en-US" sz="3600" b="1" dirty="0">
+                <a:latin typeface="微软雅黑" pitchFamily="34" charset="-122"/>
+                <a:ea typeface="微软雅黑" pitchFamily="34" charset="-122"/>
+              </a:rPr>
+              <a:t>三、</a:t>
+            </a:r>
+            <a:r>
+              <a:rPr lang="en-US" altLang="zh-CN" sz="3600" b="1" dirty="0">
+                <a:latin typeface="微软雅黑" pitchFamily="34" charset="-122"/>
+                <a:ea typeface="微软雅黑" pitchFamily="34" charset="-122"/>
+              </a:rPr>
+              <a:t>Python</a:t>
+            </a:r>
+            <a:r>
+              <a:rPr lang="zh-CN" altLang="en-US" sz="3600" b="1" dirty="0">
+                <a:latin typeface="微软雅黑" pitchFamily="34" charset="-122"/>
+                <a:ea typeface="微软雅黑" pitchFamily="34" charset="-122"/>
+              </a:rPr>
+              <a:t>编程环境配置</a:t>
+            </a:r>
+          </a:p>
+        </p:txBody>
+      </p:sp>
+      <p:sp>
+        <p:nvSpPr>
+          <p:cNvPr id="8" name="矩形 7"/>
+          <p:cNvSpPr/>
+          <p:nvPr/>
+        </p:nvSpPr>
+        <p:spPr>
+          <a:xfrm>
+            <a:off x="0" y="5014912"/>
+            <a:ext cx="12192000" cy="72000"/>
+          </a:xfrm>
+          <a:prstGeom prst="rect">
+            <a:avLst/>
+          </a:prstGeom>
+          <a:solidFill>
+            <a:schemeClr val="tx1">
+              <a:lumMod val="75000"/>
+            </a:schemeClr>
+          </a:solidFill>
+          <a:effectLst/>
+        </p:spPr>
+        <p:txBody>
+          <a:bodyPr wrap="square" lIns="0" rtlCol="0" anchor="ctr">
+            <a:noAutofit/>
+          </a:bodyPr>
+          <a:lstStyle/>
+          <a:p>
+            <a:pPr algn="l"/>
+            <a:endParaRPr lang="zh-CN" altLang="en-US" b="1">
+              <a:solidFill>
+                <a:srgbClr val="FF0000"/>
+              </a:solidFill>
+              <a:latin typeface="微软雅黑" pitchFamily="34" charset="-122"/>
+              <a:ea typeface="微软雅黑" pitchFamily="34" charset="-122"/>
+            </a:endParaRPr>
+          </a:p>
+        </p:txBody>
+      </p:sp>
+    </p:spTree>
+    <p:extLst>
+      <p:ext uri="{BB962C8B-B14F-4D97-AF65-F5344CB8AC3E}">
+        <p14:creationId xmlns:p14="http://schemas.microsoft.com/office/powerpoint/2010/main" val="972163772"/>
+      </p:ext>
+    </p:extLst>
+  </p:cSld>
+  <p:clrMapOvr>
+    <a:masterClrMapping/>
+  </p:clrMapOvr>
+  <p:transition>
+    <p:fade/>
+  </p:transition>
+</p:sld>
+</file>
+
+<file path=ppt/slides/slide21.xml><?xml version="1.0" encoding="utf-8"?>
+<p:sld xmlns:a="http://schemas.openxmlformats.org/drawingml/2006/main" xmlns:r="http://schemas.openxmlformats.org/officeDocument/2006/relationships" xmlns:p="http://schemas.openxmlformats.org/presentationml/2006/main">
+  <p:cSld>
+    <p:spTree>
+      <p:nvGrpSpPr>
+        <p:cNvPr id="1" name=""/>
+        <p:cNvGrpSpPr/>
+        <p:nvPr/>
+      </p:nvGrpSpPr>
+      <p:grpSpPr>
+        <a:xfrm>
+          <a:off x="0" y="0"/>
+          <a:ext cx="0" cy="0"/>
+          <a:chOff x="0" y="0"/>
+          <a:chExt cx="0" cy="0"/>
+        </a:xfrm>
+      </p:grpSpPr>
+      <p:sp>
+        <p:nvSpPr>
           <p:cNvPr id="3" name="标题 2"/>
           <p:cNvSpPr>
             <a:spLocks noGrp="1"/>
@@ -18017,7 +18854,7 @@
 </p:sld>
 </file>
 
-<file path=ppt/slides/slide21.xml><?xml version="1.0" encoding="utf-8"?>
+<file path=ppt/slides/slide22.xml><?xml version="1.0" encoding="utf-8"?>
 <p:sld xmlns:a="http://schemas.openxmlformats.org/drawingml/2006/main" xmlns:r="http://schemas.openxmlformats.org/officeDocument/2006/relationships" xmlns:p="http://schemas.openxmlformats.org/presentationml/2006/main">
   <p:cSld>
     <p:spTree>
@@ -18529,7 +19366,7 @@
 </p:sld>
 </file>
 
-<file path=ppt/slides/slide22.xml><?xml version="1.0" encoding="utf-8"?>
+<file path=ppt/slides/slide23.xml><?xml version="1.0" encoding="utf-8"?>
 <p:sld xmlns:a="http://schemas.openxmlformats.org/drawingml/2006/main" xmlns:r="http://schemas.openxmlformats.org/officeDocument/2006/relationships" xmlns:p="http://schemas.openxmlformats.org/presentationml/2006/main">
   <p:cSld>
     <p:spTree>
@@ -19031,7 +19868,7 @@
 </p:sld>
 </file>
 
-<file path=ppt/slides/slide23.xml><?xml version="1.0" encoding="utf-8"?>
+<file path=ppt/slides/slide24.xml><?xml version="1.0" encoding="utf-8"?>
 <p:sld xmlns:a="http://schemas.openxmlformats.org/drawingml/2006/main" xmlns:r="http://schemas.openxmlformats.org/officeDocument/2006/relationships" xmlns:p="http://schemas.openxmlformats.org/presentationml/2006/main">
   <p:cSld>
     <p:spTree>
@@ -19460,533 +20297,6 @@
 </p:sld>
 </file>
 
-<file path=ppt/slides/slide24.xml><?xml version="1.0" encoding="utf-8"?>
-<p:sld xmlns:a="http://schemas.openxmlformats.org/drawingml/2006/main" xmlns:r="http://schemas.openxmlformats.org/officeDocument/2006/relationships" xmlns:p="http://schemas.openxmlformats.org/presentationml/2006/main">
-  <p:cSld>
-    <p:spTree>
-      <p:nvGrpSpPr>
-        <p:cNvPr id="1" name=""/>
-        <p:cNvGrpSpPr/>
-        <p:nvPr/>
-      </p:nvGrpSpPr>
-      <p:grpSpPr>
-        <a:xfrm>
-          <a:off x="0" y="0"/>
-          <a:ext cx="0" cy="0"/>
-          <a:chOff x="0" y="0"/>
-          <a:chExt cx="0" cy="0"/>
-        </a:xfrm>
-      </p:grpSpPr>
-      <p:sp>
-        <p:nvSpPr>
-          <p:cNvPr id="3" name="标题 2"/>
-          <p:cNvSpPr>
-            <a:spLocks noGrp="1"/>
-          </p:cNvSpPr>
-          <p:nvPr>
-            <p:ph type="title"/>
-          </p:nvPr>
-        </p:nvSpPr>
-        <p:spPr>
-          <a:xfrm>
-            <a:off x="1" y="8526"/>
-            <a:ext cx="10537374" cy="792162"/>
-          </a:xfrm>
-        </p:spPr>
-        <p:txBody>
-          <a:bodyPr/>
-          <a:lstStyle/>
-          <a:p>
-            <a:pPr fontAlgn="auto">
-              <a:spcBef>
-                <a:spcPts val="0"/>
-              </a:spcBef>
-              <a:spcAft>
-                <a:spcPts val="0"/>
-              </a:spcAft>
-            </a:pPr>
-            <a:r>
-              <a:rPr lang="zh-CN" altLang="en-US" dirty="0">
-                <a:latin typeface="微软雅黑" pitchFamily="34" charset="-122"/>
-                <a:ea typeface="微软雅黑" pitchFamily="34" charset="-122"/>
-              </a:rPr>
-              <a:t>三、基于</a:t>
-            </a:r>
-            <a:r>
-              <a:rPr lang="en-US" altLang="zh-CN" dirty="0">
-                <a:latin typeface="微软雅黑" pitchFamily="34" charset="-122"/>
-                <a:ea typeface="微软雅黑" pitchFamily="34" charset="-122"/>
-              </a:rPr>
-              <a:t>Python</a:t>
-            </a:r>
-            <a:r>
-              <a:rPr lang="zh-CN" altLang="en-US" dirty="0">
-                <a:latin typeface="微软雅黑" pitchFamily="34" charset="-122"/>
-                <a:ea typeface="微软雅黑" pitchFamily="34" charset="-122"/>
-              </a:rPr>
-              <a:t>的开源软件开发环境配置</a:t>
-            </a:r>
-          </a:p>
-        </p:txBody>
-      </p:sp>
-      <p:sp>
-        <p:nvSpPr>
-          <p:cNvPr id="2" name="TextBox 1">
-            <a:extLst>
-              <a:ext uri="{FF2B5EF4-FFF2-40B4-BE49-F238E27FC236}">
-                <a16:creationId xmlns:a16="http://schemas.microsoft.com/office/drawing/2014/main" id="{631AADB6-C88A-D817-4683-FC087E4E240F}"/>
-              </a:ext>
-            </a:extLst>
-          </p:cNvPr>
-          <p:cNvSpPr txBox="1"/>
-          <p:nvPr/>
-        </p:nvSpPr>
-        <p:spPr>
-          <a:xfrm>
-            <a:off x="497633" y="968099"/>
-            <a:ext cx="7344040" cy="662489"/>
-          </a:xfrm>
-          <a:prstGeom prst="rect">
-            <a:avLst/>
-          </a:prstGeom>
-          <a:noFill/>
-        </p:spPr>
-        <p:txBody>
-          <a:bodyPr wrap="square" rtlCol="0">
-            <a:spAutoFit/>
-          </a:bodyPr>
-          <a:lstStyle/>
-          <a:p>
-            <a:pPr algn="just">
-              <a:lnSpc>
-                <a:spcPct val="150000"/>
-              </a:lnSpc>
-            </a:pPr>
-            <a:r>
-              <a:rPr lang="en-US" altLang="zh-CN" sz="2800" b="1" dirty="0">
-                <a:solidFill>
-                  <a:srgbClr val="333333"/>
-                </a:solidFill>
-                <a:latin typeface="+mn-ea"/>
-                <a:ea typeface="+mn-ea"/>
-              </a:rPr>
-              <a:t>2</a:t>
-            </a:r>
-            <a:r>
-              <a:rPr lang="zh-CN" altLang="en-US" sz="2800" b="1" dirty="0">
-                <a:solidFill>
-                  <a:srgbClr val="333333"/>
-                </a:solidFill>
-                <a:latin typeface="+mn-ea"/>
-                <a:ea typeface="+mn-ea"/>
-              </a:rPr>
-              <a:t>、</a:t>
-            </a:r>
-            <a:r>
-              <a:rPr lang="en-US" altLang="zh-CN" sz="2800" b="1" dirty="0">
-                <a:solidFill>
-                  <a:srgbClr val="333333"/>
-                </a:solidFill>
-                <a:latin typeface="+mn-ea"/>
-                <a:ea typeface="+mn-ea"/>
-              </a:rPr>
-              <a:t>Python</a:t>
-            </a:r>
-            <a:r>
-              <a:rPr lang="zh-CN" altLang="en-US" sz="2800" b="1" dirty="0">
-                <a:solidFill>
-                  <a:srgbClr val="333333"/>
-                </a:solidFill>
-                <a:latin typeface="+mn-ea"/>
-                <a:ea typeface="+mn-ea"/>
-              </a:rPr>
-              <a:t>第三方软件包安装</a:t>
-            </a:r>
-            <a:endParaRPr lang="en-US" altLang="zh-CN" sz="2800" b="1" dirty="0">
-              <a:solidFill>
-                <a:srgbClr val="333333"/>
-              </a:solidFill>
-              <a:latin typeface="+mn-ea"/>
-              <a:ea typeface="+mn-ea"/>
-            </a:endParaRPr>
-          </a:p>
-        </p:txBody>
-      </p:sp>
-      <p:sp>
-        <p:nvSpPr>
-          <p:cNvPr id="17" name="TextBox 16">
-            <a:extLst>
-              <a:ext uri="{FF2B5EF4-FFF2-40B4-BE49-F238E27FC236}">
-                <a16:creationId xmlns:a16="http://schemas.microsoft.com/office/drawing/2014/main" id="{9E05FFCA-3371-AF5C-381D-71D984055F5A}"/>
-              </a:ext>
-            </a:extLst>
-          </p:cNvPr>
-          <p:cNvSpPr txBox="1"/>
-          <p:nvPr/>
-        </p:nvSpPr>
-        <p:spPr>
-          <a:xfrm>
-            <a:off x="497633" y="1699889"/>
-            <a:ext cx="11117064" cy="4832092"/>
-          </a:xfrm>
-          <a:prstGeom prst="rect">
-            <a:avLst/>
-          </a:prstGeom>
-          <a:noFill/>
-        </p:spPr>
-        <p:txBody>
-          <a:bodyPr wrap="square">
-            <a:spAutoFit/>
-          </a:bodyPr>
-          <a:lstStyle/>
-          <a:p>
-            <a:pPr algn="just">
-              <a:lnSpc>
-                <a:spcPct val="150000"/>
-              </a:lnSpc>
-            </a:pPr>
-            <a:r>
-              <a:rPr lang="en-US" sz="2800" b="1" dirty="0" err="1">
-                <a:solidFill>
-                  <a:srgbClr val="333333"/>
-                </a:solidFill>
-                <a:latin typeface="Microsoft YaHei" panose="020B0503020204020204" pitchFamily="34" charset="-122"/>
-                <a:ea typeface="Microsoft YaHei" panose="020B0503020204020204" pitchFamily="34" charset="-122"/>
-              </a:rPr>
-              <a:t>Anaconda简介</a:t>
-            </a:r>
-            <a:r>
-              <a:rPr lang="zh-CN" altLang="en-US" sz="2800" b="1" dirty="0">
-                <a:solidFill>
-                  <a:srgbClr val="333333"/>
-                </a:solidFill>
-                <a:latin typeface="Microsoft YaHei" panose="020B0503020204020204" pitchFamily="34" charset="-122"/>
-                <a:ea typeface="Microsoft YaHei" panose="020B0503020204020204" pitchFamily="34" charset="-122"/>
-              </a:rPr>
-              <a:t>：</a:t>
-            </a:r>
-            <a:r>
-              <a:rPr lang="zh-CN" altLang="en-US" sz="2800" dirty="0">
-                <a:solidFill>
-                  <a:srgbClr val="333333"/>
-                </a:solidFill>
-                <a:latin typeface="Microsoft YaHei" panose="020B0503020204020204" pitchFamily="34" charset="-122"/>
-                <a:ea typeface="Microsoft YaHei" panose="020B0503020204020204" pitchFamily="34" charset="-122"/>
-              </a:rPr>
-              <a:t>是一个广泛应用于计算科学（数据科学、机器学习、大数据处理和预测分析）的开源</a:t>
-            </a:r>
-            <a:r>
-              <a:rPr lang="en-US" altLang="zh-CN" sz="2800" dirty="0">
-                <a:solidFill>
-                  <a:srgbClr val="333333"/>
-                </a:solidFill>
-                <a:latin typeface="Microsoft YaHei" panose="020B0503020204020204" pitchFamily="34" charset="-122"/>
-                <a:ea typeface="Microsoft YaHei" panose="020B0503020204020204" pitchFamily="34" charset="-122"/>
-              </a:rPr>
-              <a:t>Python</a:t>
-            </a:r>
-            <a:r>
-              <a:rPr lang="zh-CN" altLang="en-US" sz="2800" dirty="0">
-                <a:solidFill>
-                  <a:srgbClr val="333333"/>
-                </a:solidFill>
-                <a:latin typeface="Microsoft YaHei" panose="020B0503020204020204" pitchFamily="34" charset="-122"/>
-                <a:ea typeface="Microsoft YaHei" panose="020B0503020204020204" pitchFamily="34" charset="-122"/>
-              </a:rPr>
-              <a:t>发行版本。</a:t>
-            </a:r>
-            <a:r>
-              <a:rPr lang="en-US" sz="2800" dirty="0">
-                <a:solidFill>
-                  <a:srgbClr val="333333"/>
-                </a:solidFill>
-                <a:latin typeface="Microsoft YaHei" panose="020B0503020204020204" pitchFamily="34" charset="-122"/>
-                <a:ea typeface="Microsoft YaHei" panose="020B0503020204020204" pitchFamily="34" charset="-122"/>
-              </a:rPr>
-              <a:t>Anaconda</a:t>
-            </a:r>
-            <a:r>
-              <a:rPr lang="zh-CN" altLang="en-US" sz="2800" dirty="0">
-                <a:solidFill>
-                  <a:srgbClr val="333333"/>
-                </a:solidFill>
-                <a:latin typeface="Microsoft YaHei" panose="020B0503020204020204" pitchFamily="34" charset="-122"/>
-                <a:ea typeface="Microsoft YaHei" panose="020B0503020204020204" pitchFamily="34" charset="-122"/>
-              </a:rPr>
-              <a:t>致力于简化软件包管理系统和部署。</a:t>
-            </a:r>
-            <a:endParaRPr lang="en-US" altLang="zh-CN" sz="2800" dirty="0">
-              <a:solidFill>
-                <a:srgbClr val="333333"/>
-              </a:solidFill>
-              <a:latin typeface="Microsoft YaHei" panose="020B0503020204020204" pitchFamily="34" charset="-122"/>
-              <a:ea typeface="Microsoft YaHei" panose="020B0503020204020204" pitchFamily="34" charset="-122"/>
-            </a:endParaRPr>
-          </a:p>
-          <a:p>
-            <a:pPr algn="just">
-              <a:lnSpc>
-                <a:spcPct val="150000"/>
-              </a:lnSpc>
-            </a:pPr>
-            <a:r>
-              <a:rPr lang="en-US" altLang="zh-CN" sz="2800" b="1" dirty="0">
-                <a:solidFill>
-                  <a:srgbClr val="333333"/>
-                </a:solidFill>
-                <a:latin typeface="Microsoft YaHei" panose="020B0503020204020204" pitchFamily="34" charset="-122"/>
-                <a:ea typeface="Microsoft YaHei" panose="020B0503020204020204" pitchFamily="34" charset="-122"/>
-              </a:rPr>
-              <a:t>Anaconda</a:t>
-            </a:r>
-            <a:r>
-              <a:rPr lang="zh-CN" altLang="en-US" sz="2800" b="1" dirty="0">
-                <a:solidFill>
-                  <a:srgbClr val="333333"/>
-                </a:solidFill>
-                <a:latin typeface="Microsoft YaHei" panose="020B0503020204020204" pitchFamily="34" charset="-122"/>
-                <a:ea typeface="Microsoft YaHei" panose="020B0503020204020204" pitchFamily="34" charset="-122"/>
-              </a:rPr>
-              <a:t>特点：</a:t>
-            </a:r>
-            <a:endParaRPr lang="en-US" altLang="zh-CN" sz="2800" b="1" dirty="0">
-              <a:solidFill>
-                <a:srgbClr val="333333"/>
-              </a:solidFill>
-              <a:latin typeface="Microsoft YaHei" panose="020B0503020204020204" pitchFamily="34" charset="-122"/>
-              <a:ea typeface="Microsoft YaHei" panose="020B0503020204020204" pitchFamily="34" charset="-122"/>
-            </a:endParaRPr>
-          </a:p>
-          <a:p>
-            <a:pPr algn="l">
-              <a:buFont typeface="+mj-lt"/>
-              <a:buAutoNum type="arabicPeriod"/>
-            </a:pPr>
-            <a:r>
-              <a:rPr lang="en-US" altLang="zh-CN" sz="2800" dirty="0">
-                <a:solidFill>
-                  <a:srgbClr val="333333"/>
-                </a:solidFill>
-                <a:latin typeface="PingFang SC" panose="020B0400000000000000" pitchFamily="34" charset="-122"/>
-                <a:ea typeface="PingFang SC" panose="020B0400000000000000" pitchFamily="34" charset="-122"/>
-              </a:rPr>
-              <a:t> </a:t>
-            </a:r>
-            <a:r>
-              <a:rPr lang="zh-CN" altLang="en-US" sz="2800" dirty="0">
-                <a:solidFill>
-                  <a:srgbClr val="333333"/>
-                </a:solidFill>
-                <a:latin typeface="PingFang SC" panose="020B0400000000000000" pitchFamily="34" charset="-122"/>
-                <a:ea typeface="PingFang SC" panose="020B0400000000000000" pitchFamily="34" charset="-122"/>
-              </a:rPr>
-              <a:t>内置</a:t>
-            </a:r>
-            <a:r>
-              <a:rPr lang="en-US" sz="2800" dirty="0">
-                <a:solidFill>
-                  <a:srgbClr val="333333"/>
-                </a:solidFill>
-                <a:latin typeface="PingFang SC" panose="020B0400000000000000" pitchFamily="34" charset="-122"/>
-                <a:ea typeface="PingFang SC" panose="020B0400000000000000" pitchFamily="34" charset="-122"/>
-              </a:rPr>
-              <a:t>python，</a:t>
-            </a:r>
-            <a:r>
-              <a:rPr lang="zh-CN" altLang="en-US" sz="2800" dirty="0">
-                <a:solidFill>
-                  <a:srgbClr val="333333"/>
-                </a:solidFill>
-                <a:latin typeface="PingFang SC" panose="020B0400000000000000" pitchFamily="34" charset="-122"/>
-                <a:ea typeface="PingFang SC" panose="020B0400000000000000" pitchFamily="34" charset="-122"/>
-              </a:rPr>
-              <a:t>高度集成</a:t>
-            </a:r>
-            <a:r>
-              <a:rPr lang="en-US" sz="2800" dirty="0">
-                <a:solidFill>
-                  <a:srgbClr val="333333"/>
-                </a:solidFill>
-                <a:latin typeface="PingFang SC" panose="020B0400000000000000" pitchFamily="34" charset="-122"/>
-                <a:ea typeface="PingFang SC" panose="020B0400000000000000" pitchFamily="34" charset="-122"/>
-              </a:rPr>
-              <a:t>python</a:t>
-            </a:r>
-            <a:r>
-              <a:rPr lang="zh-CN" altLang="en-US" sz="2800" dirty="0">
-                <a:solidFill>
-                  <a:srgbClr val="333333"/>
-                </a:solidFill>
-                <a:latin typeface="PingFang SC" panose="020B0400000000000000" pitchFamily="34" charset="-122"/>
-                <a:ea typeface="PingFang SC" panose="020B0400000000000000" pitchFamily="34" charset="-122"/>
-              </a:rPr>
-              <a:t>数据科学生态；</a:t>
-            </a:r>
-          </a:p>
-          <a:p>
-            <a:pPr algn="l">
-              <a:buFont typeface="+mj-lt"/>
-              <a:buAutoNum type="arabicPeriod"/>
-            </a:pPr>
-            <a:r>
-              <a:rPr lang="en-US" altLang="zh-CN" sz="2800" dirty="0">
-                <a:solidFill>
-                  <a:srgbClr val="333333"/>
-                </a:solidFill>
-                <a:latin typeface="PingFang SC" panose="020B0400000000000000" pitchFamily="34" charset="-122"/>
-                <a:ea typeface="PingFang SC" panose="020B0400000000000000" pitchFamily="34" charset="-122"/>
-              </a:rPr>
-              <a:t> </a:t>
-            </a:r>
-            <a:r>
-              <a:rPr lang="zh-CN" altLang="en-US" sz="2800" dirty="0">
-                <a:solidFill>
-                  <a:srgbClr val="333333"/>
-                </a:solidFill>
-                <a:latin typeface="PingFang SC" panose="020B0400000000000000" pitchFamily="34" charset="-122"/>
-                <a:ea typeface="PingFang SC" panose="020B0400000000000000" pitchFamily="34" charset="-122"/>
-              </a:rPr>
-              <a:t>拥有强大的包管理工具</a:t>
-            </a:r>
-            <a:r>
-              <a:rPr lang="en-US" altLang="zh-CN" sz="2800" dirty="0">
-                <a:solidFill>
-                  <a:srgbClr val="333333"/>
-                </a:solidFill>
-                <a:latin typeface="PingFang SC" panose="020B0400000000000000" pitchFamily="34" charset="-122"/>
-                <a:ea typeface="PingFang SC" panose="020B0400000000000000" pitchFamily="34" charset="-122"/>
-              </a:rPr>
-              <a:t>C</a:t>
-            </a:r>
-            <a:r>
-              <a:rPr lang="en-US" sz="2800" dirty="0">
-                <a:solidFill>
-                  <a:srgbClr val="333333"/>
-                </a:solidFill>
-                <a:latin typeface="PingFang SC" panose="020B0400000000000000" pitchFamily="34" charset="-122"/>
-                <a:ea typeface="PingFang SC" panose="020B0400000000000000" pitchFamily="34" charset="-122"/>
-              </a:rPr>
-              <a:t>onda</a:t>
-            </a:r>
-            <a:r>
-              <a:rPr lang="zh-CN" altLang="en-US" sz="2800" dirty="0">
-                <a:solidFill>
-                  <a:srgbClr val="333333"/>
-                </a:solidFill>
-                <a:latin typeface="PingFang SC" panose="020B0400000000000000" pitchFamily="34" charset="-122"/>
-                <a:ea typeface="PingFang SC" panose="020B0400000000000000" pitchFamily="34" charset="-122"/>
-              </a:rPr>
-              <a:t>；</a:t>
-            </a:r>
-            <a:endParaRPr lang="en-US" sz="2800" dirty="0">
-              <a:solidFill>
-                <a:srgbClr val="333333"/>
-              </a:solidFill>
-              <a:latin typeface="PingFang SC" panose="020B0400000000000000" pitchFamily="34" charset="-122"/>
-              <a:ea typeface="PingFang SC" panose="020B0400000000000000" pitchFamily="34" charset="-122"/>
-            </a:endParaRPr>
-          </a:p>
-          <a:p>
-            <a:pPr algn="l">
-              <a:buFont typeface="+mj-lt"/>
-              <a:buAutoNum type="arabicPeriod"/>
-            </a:pPr>
-            <a:r>
-              <a:rPr lang="en-US" altLang="zh-CN" sz="2800" dirty="0">
-                <a:solidFill>
-                  <a:srgbClr val="333333"/>
-                </a:solidFill>
-                <a:latin typeface="PingFang SC" panose="020B0400000000000000" pitchFamily="34" charset="-122"/>
-                <a:ea typeface="PingFang SC" panose="020B0400000000000000" pitchFamily="34" charset="-122"/>
-              </a:rPr>
-              <a:t> </a:t>
-            </a:r>
-            <a:r>
-              <a:rPr lang="zh-CN" altLang="en-US" sz="2800" dirty="0">
-                <a:solidFill>
-                  <a:srgbClr val="333333"/>
-                </a:solidFill>
-                <a:latin typeface="PingFang SC" panose="020B0400000000000000" pitchFamily="34" charset="-122"/>
-                <a:ea typeface="PingFang SC" panose="020B0400000000000000" pitchFamily="34" charset="-122"/>
-              </a:rPr>
-              <a:t>可用超过</a:t>
-            </a:r>
-            <a:r>
-              <a:rPr lang="en-US" altLang="zh-CN" sz="2800" dirty="0">
-                <a:solidFill>
-                  <a:srgbClr val="333333"/>
-                </a:solidFill>
-                <a:latin typeface="PingFang SC" panose="020B0400000000000000" pitchFamily="34" charset="-122"/>
-                <a:ea typeface="PingFang SC" panose="020B0400000000000000" pitchFamily="34" charset="-122"/>
-              </a:rPr>
-              <a:t>1400</a:t>
-            </a:r>
-            <a:r>
-              <a:rPr lang="zh-CN" altLang="en-US" sz="2800" dirty="0">
-                <a:solidFill>
-                  <a:srgbClr val="333333"/>
-                </a:solidFill>
-                <a:latin typeface="PingFang SC" panose="020B0400000000000000" pitchFamily="34" charset="-122"/>
-                <a:ea typeface="PingFang SC" panose="020B0400000000000000" pitchFamily="34" charset="-122"/>
-              </a:rPr>
-              <a:t>个</a:t>
-            </a:r>
-            <a:r>
-              <a:rPr lang="en-US" sz="2800" dirty="0">
-                <a:solidFill>
-                  <a:srgbClr val="333333"/>
-                </a:solidFill>
-                <a:latin typeface="PingFang SC" panose="020B0400000000000000" pitchFamily="34" charset="-122"/>
-                <a:ea typeface="PingFang SC" panose="020B0400000000000000" pitchFamily="34" charset="-122"/>
-              </a:rPr>
-              <a:t>python</a:t>
-            </a:r>
-            <a:r>
-              <a:rPr lang="zh-CN" altLang="en-US" sz="2800" dirty="0">
-                <a:solidFill>
-                  <a:srgbClr val="333333"/>
-                </a:solidFill>
-                <a:latin typeface="PingFang SC" panose="020B0400000000000000" pitchFamily="34" charset="-122"/>
-                <a:ea typeface="PingFang SC" panose="020B0400000000000000" pitchFamily="34" charset="-122"/>
-              </a:rPr>
-              <a:t>数据科学库</a:t>
-            </a:r>
-            <a:r>
-              <a:rPr lang="en-US" altLang="zh-CN" sz="2800" dirty="0">
-                <a:solidFill>
-                  <a:srgbClr val="333333"/>
-                </a:solidFill>
-                <a:latin typeface="PingFang SC" panose="020B0400000000000000" pitchFamily="34" charset="-122"/>
-                <a:ea typeface="PingFang SC" panose="020B0400000000000000" pitchFamily="34" charset="-122"/>
-              </a:rPr>
-              <a:t>.</a:t>
-            </a:r>
-            <a:endParaRPr lang="zh-CN" altLang="en-US" sz="2800" dirty="0">
-              <a:solidFill>
-                <a:srgbClr val="333333"/>
-              </a:solidFill>
-              <a:latin typeface="PingFang SC" panose="020B0400000000000000" pitchFamily="34" charset="-122"/>
-              <a:ea typeface="PingFang SC" panose="020B0400000000000000" pitchFamily="34" charset="-122"/>
-            </a:endParaRPr>
-          </a:p>
-        </p:txBody>
-      </p:sp>
-    </p:spTree>
-    <p:extLst>
-      <p:ext uri="{BB962C8B-B14F-4D97-AF65-F5344CB8AC3E}">
-        <p14:creationId xmlns:p14="http://schemas.microsoft.com/office/powerpoint/2010/main" val="2510358707"/>
-      </p:ext>
-    </p:extLst>
-  </p:cSld>
-  <p:clrMapOvr>
-    <a:masterClrMapping/>
-  </p:clrMapOvr>
-  <p:transition>
-    <p:fade/>
-  </p:transition>
-</p:sld>
-</file>
-
 <file path=ppt/slides/slide25.xml><?xml version="1.0" encoding="utf-8"?>
 <p:sld xmlns:a="http://schemas.openxmlformats.org/drawingml/2006/main" xmlns:r="http://schemas.openxmlformats.org/officeDocument/2006/relationships" xmlns:p="http://schemas.openxmlformats.org/presentationml/2006/main">
   <p:cSld>
@@ -20070,6 +20380,533 @@
         </p:nvSpPr>
         <p:spPr>
           <a:xfrm>
+            <a:off x="497633" y="968099"/>
+            <a:ext cx="7344040" cy="662489"/>
+          </a:xfrm>
+          <a:prstGeom prst="rect">
+            <a:avLst/>
+          </a:prstGeom>
+          <a:noFill/>
+        </p:spPr>
+        <p:txBody>
+          <a:bodyPr wrap="square" rtlCol="0">
+            <a:spAutoFit/>
+          </a:bodyPr>
+          <a:lstStyle/>
+          <a:p>
+            <a:pPr algn="just">
+              <a:lnSpc>
+                <a:spcPct val="150000"/>
+              </a:lnSpc>
+            </a:pPr>
+            <a:r>
+              <a:rPr lang="en-US" altLang="zh-CN" sz="2800" b="1" dirty="0">
+                <a:solidFill>
+                  <a:srgbClr val="333333"/>
+                </a:solidFill>
+                <a:latin typeface="+mn-ea"/>
+                <a:ea typeface="+mn-ea"/>
+              </a:rPr>
+              <a:t>2</a:t>
+            </a:r>
+            <a:r>
+              <a:rPr lang="zh-CN" altLang="en-US" sz="2800" b="1" dirty="0">
+                <a:solidFill>
+                  <a:srgbClr val="333333"/>
+                </a:solidFill>
+                <a:latin typeface="+mn-ea"/>
+                <a:ea typeface="+mn-ea"/>
+              </a:rPr>
+              <a:t>、</a:t>
+            </a:r>
+            <a:r>
+              <a:rPr lang="en-US" altLang="zh-CN" sz="2800" b="1" dirty="0">
+                <a:solidFill>
+                  <a:srgbClr val="333333"/>
+                </a:solidFill>
+                <a:latin typeface="+mn-ea"/>
+                <a:ea typeface="+mn-ea"/>
+              </a:rPr>
+              <a:t>Python</a:t>
+            </a:r>
+            <a:r>
+              <a:rPr lang="zh-CN" altLang="en-US" sz="2800" b="1" dirty="0">
+                <a:solidFill>
+                  <a:srgbClr val="333333"/>
+                </a:solidFill>
+                <a:latin typeface="+mn-ea"/>
+                <a:ea typeface="+mn-ea"/>
+              </a:rPr>
+              <a:t>第三方软件包安装</a:t>
+            </a:r>
+            <a:endParaRPr lang="en-US" altLang="zh-CN" sz="2800" b="1" dirty="0">
+              <a:solidFill>
+                <a:srgbClr val="333333"/>
+              </a:solidFill>
+              <a:latin typeface="+mn-ea"/>
+              <a:ea typeface="+mn-ea"/>
+            </a:endParaRPr>
+          </a:p>
+        </p:txBody>
+      </p:sp>
+      <p:sp>
+        <p:nvSpPr>
+          <p:cNvPr id="17" name="TextBox 16">
+            <a:extLst>
+              <a:ext uri="{FF2B5EF4-FFF2-40B4-BE49-F238E27FC236}">
+                <a16:creationId xmlns:a16="http://schemas.microsoft.com/office/drawing/2014/main" id="{9E05FFCA-3371-AF5C-381D-71D984055F5A}"/>
+              </a:ext>
+            </a:extLst>
+          </p:cNvPr>
+          <p:cNvSpPr txBox="1"/>
+          <p:nvPr/>
+        </p:nvSpPr>
+        <p:spPr>
+          <a:xfrm>
+            <a:off x="497633" y="1699889"/>
+            <a:ext cx="11117064" cy="4832092"/>
+          </a:xfrm>
+          <a:prstGeom prst="rect">
+            <a:avLst/>
+          </a:prstGeom>
+          <a:noFill/>
+        </p:spPr>
+        <p:txBody>
+          <a:bodyPr wrap="square">
+            <a:spAutoFit/>
+          </a:bodyPr>
+          <a:lstStyle/>
+          <a:p>
+            <a:pPr algn="just">
+              <a:lnSpc>
+                <a:spcPct val="150000"/>
+              </a:lnSpc>
+            </a:pPr>
+            <a:r>
+              <a:rPr lang="en-US" sz="2800" b="1" dirty="0" err="1">
+                <a:solidFill>
+                  <a:srgbClr val="333333"/>
+                </a:solidFill>
+                <a:latin typeface="Microsoft YaHei" panose="020B0503020204020204" pitchFamily="34" charset="-122"/>
+                <a:ea typeface="Microsoft YaHei" panose="020B0503020204020204" pitchFamily="34" charset="-122"/>
+              </a:rPr>
+              <a:t>Anaconda简介</a:t>
+            </a:r>
+            <a:r>
+              <a:rPr lang="zh-CN" altLang="en-US" sz="2800" b="1" dirty="0">
+                <a:solidFill>
+                  <a:srgbClr val="333333"/>
+                </a:solidFill>
+                <a:latin typeface="Microsoft YaHei" panose="020B0503020204020204" pitchFamily="34" charset="-122"/>
+                <a:ea typeface="Microsoft YaHei" panose="020B0503020204020204" pitchFamily="34" charset="-122"/>
+              </a:rPr>
+              <a:t>：</a:t>
+            </a:r>
+            <a:r>
+              <a:rPr lang="zh-CN" altLang="en-US" sz="2800" dirty="0">
+                <a:solidFill>
+                  <a:srgbClr val="333333"/>
+                </a:solidFill>
+                <a:latin typeface="Microsoft YaHei" panose="020B0503020204020204" pitchFamily="34" charset="-122"/>
+                <a:ea typeface="Microsoft YaHei" panose="020B0503020204020204" pitchFamily="34" charset="-122"/>
+              </a:rPr>
+              <a:t>是一个广泛应用于计算科学（数据科学、机器学习、大数据处理和预测分析）的开源</a:t>
+            </a:r>
+            <a:r>
+              <a:rPr lang="en-US" altLang="zh-CN" sz="2800" dirty="0">
+                <a:solidFill>
+                  <a:srgbClr val="333333"/>
+                </a:solidFill>
+                <a:latin typeface="Microsoft YaHei" panose="020B0503020204020204" pitchFamily="34" charset="-122"/>
+                <a:ea typeface="Microsoft YaHei" panose="020B0503020204020204" pitchFamily="34" charset="-122"/>
+              </a:rPr>
+              <a:t>Python</a:t>
+            </a:r>
+            <a:r>
+              <a:rPr lang="zh-CN" altLang="en-US" sz="2800" dirty="0">
+                <a:solidFill>
+                  <a:srgbClr val="333333"/>
+                </a:solidFill>
+                <a:latin typeface="Microsoft YaHei" panose="020B0503020204020204" pitchFamily="34" charset="-122"/>
+                <a:ea typeface="Microsoft YaHei" panose="020B0503020204020204" pitchFamily="34" charset="-122"/>
+              </a:rPr>
+              <a:t>发行版本。</a:t>
+            </a:r>
+            <a:r>
+              <a:rPr lang="en-US" sz="2800" dirty="0">
+                <a:solidFill>
+                  <a:srgbClr val="333333"/>
+                </a:solidFill>
+                <a:latin typeface="Microsoft YaHei" panose="020B0503020204020204" pitchFamily="34" charset="-122"/>
+                <a:ea typeface="Microsoft YaHei" panose="020B0503020204020204" pitchFamily="34" charset="-122"/>
+              </a:rPr>
+              <a:t>Anaconda</a:t>
+            </a:r>
+            <a:r>
+              <a:rPr lang="zh-CN" altLang="en-US" sz="2800" dirty="0">
+                <a:solidFill>
+                  <a:srgbClr val="333333"/>
+                </a:solidFill>
+                <a:latin typeface="Microsoft YaHei" panose="020B0503020204020204" pitchFamily="34" charset="-122"/>
+                <a:ea typeface="Microsoft YaHei" panose="020B0503020204020204" pitchFamily="34" charset="-122"/>
+              </a:rPr>
+              <a:t>致力于简化软件包管理系统和部署。</a:t>
+            </a:r>
+            <a:endParaRPr lang="en-US" altLang="zh-CN" sz="2800" dirty="0">
+              <a:solidFill>
+                <a:srgbClr val="333333"/>
+              </a:solidFill>
+              <a:latin typeface="Microsoft YaHei" panose="020B0503020204020204" pitchFamily="34" charset="-122"/>
+              <a:ea typeface="Microsoft YaHei" panose="020B0503020204020204" pitchFamily="34" charset="-122"/>
+            </a:endParaRPr>
+          </a:p>
+          <a:p>
+            <a:pPr algn="just">
+              <a:lnSpc>
+                <a:spcPct val="150000"/>
+              </a:lnSpc>
+            </a:pPr>
+            <a:r>
+              <a:rPr lang="en-US" altLang="zh-CN" sz="2800" b="1" dirty="0">
+                <a:solidFill>
+                  <a:srgbClr val="333333"/>
+                </a:solidFill>
+                <a:latin typeface="Microsoft YaHei" panose="020B0503020204020204" pitchFamily="34" charset="-122"/>
+                <a:ea typeface="Microsoft YaHei" panose="020B0503020204020204" pitchFamily="34" charset="-122"/>
+              </a:rPr>
+              <a:t>Anaconda</a:t>
+            </a:r>
+            <a:r>
+              <a:rPr lang="zh-CN" altLang="en-US" sz="2800" b="1" dirty="0">
+                <a:solidFill>
+                  <a:srgbClr val="333333"/>
+                </a:solidFill>
+                <a:latin typeface="Microsoft YaHei" panose="020B0503020204020204" pitchFamily="34" charset="-122"/>
+                <a:ea typeface="Microsoft YaHei" panose="020B0503020204020204" pitchFamily="34" charset="-122"/>
+              </a:rPr>
+              <a:t>特点：</a:t>
+            </a:r>
+            <a:endParaRPr lang="en-US" altLang="zh-CN" sz="2800" b="1" dirty="0">
+              <a:solidFill>
+                <a:srgbClr val="333333"/>
+              </a:solidFill>
+              <a:latin typeface="Microsoft YaHei" panose="020B0503020204020204" pitchFamily="34" charset="-122"/>
+              <a:ea typeface="Microsoft YaHei" panose="020B0503020204020204" pitchFamily="34" charset="-122"/>
+            </a:endParaRPr>
+          </a:p>
+          <a:p>
+            <a:pPr algn="l">
+              <a:buFont typeface="+mj-lt"/>
+              <a:buAutoNum type="arabicPeriod"/>
+            </a:pPr>
+            <a:r>
+              <a:rPr lang="en-US" altLang="zh-CN" sz="2800" dirty="0">
+                <a:solidFill>
+                  <a:srgbClr val="333333"/>
+                </a:solidFill>
+                <a:latin typeface="PingFang SC" panose="020B0400000000000000" pitchFamily="34" charset="-122"/>
+                <a:ea typeface="PingFang SC" panose="020B0400000000000000" pitchFamily="34" charset="-122"/>
+              </a:rPr>
+              <a:t> </a:t>
+            </a:r>
+            <a:r>
+              <a:rPr lang="zh-CN" altLang="en-US" sz="2800" dirty="0">
+                <a:solidFill>
+                  <a:srgbClr val="333333"/>
+                </a:solidFill>
+                <a:latin typeface="PingFang SC" panose="020B0400000000000000" pitchFamily="34" charset="-122"/>
+                <a:ea typeface="PingFang SC" panose="020B0400000000000000" pitchFamily="34" charset="-122"/>
+              </a:rPr>
+              <a:t>内置</a:t>
+            </a:r>
+            <a:r>
+              <a:rPr lang="en-US" sz="2800" dirty="0">
+                <a:solidFill>
+                  <a:srgbClr val="333333"/>
+                </a:solidFill>
+                <a:latin typeface="PingFang SC" panose="020B0400000000000000" pitchFamily="34" charset="-122"/>
+                <a:ea typeface="PingFang SC" panose="020B0400000000000000" pitchFamily="34" charset="-122"/>
+              </a:rPr>
+              <a:t>python，</a:t>
+            </a:r>
+            <a:r>
+              <a:rPr lang="zh-CN" altLang="en-US" sz="2800" dirty="0">
+                <a:solidFill>
+                  <a:srgbClr val="333333"/>
+                </a:solidFill>
+                <a:latin typeface="PingFang SC" panose="020B0400000000000000" pitchFamily="34" charset="-122"/>
+                <a:ea typeface="PingFang SC" panose="020B0400000000000000" pitchFamily="34" charset="-122"/>
+              </a:rPr>
+              <a:t>高度集成</a:t>
+            </a:r>
+            <a:r>
+              <a:rPr lang="en-US" sz="2800" dirty="0">
+                <a:solidFill>
+                  <a:srgbClr val="333333"/>
+                </a:solidFill>
+                <a:latin typeface="PingFang SC" panose="020B0400000000000000" pitchFamily="34" charset="-122"/>
+                <a:ea typeface="PingFang SC" panose="020B0400000000000000" pitchFamily="34" charset="-122"/>
+              </a:rPr>
+              <a:t>python</a:t>
+            </a:r>
+            <a:r>
+              <a:rPr lang="zh-CN" altLang="en-US" sz="2800" dirty="0">
+                <a:solidFill>
+                  <a:srgbClr val="333333"/>
+                </a:solidFill>
+                <a:latin typeface="PingFang SC" panose="020B0400000000000000" pitchFamily="34" charset="-122"/>
+                <a:ea typeface="PingFang SC" panose="020B0400000000000000" pitchFamily="34" charset="-122"/>
+              </a:rPr>
+              <a:t>数据科学生态；</a:t>
+            </a:r>
+          </a:p>
+          <a:p>
+            <a:pPr algn="l">
+              <a:buFont typeface="+mj-lt"/>
+              <a:buAutoNum type="arabicPeriod"/>
+            </a:pPr>
+            <a:r>
+              <a:rPr lang="en-US" altLang="zh-CN" sz="2800" dirty="0">
+                <a:solidFill>
+                  <a:srgbClr val="333333"/>
+                </a:solidFill>
+                <a:latin typeface="PingFang SC" panose="020B0400000000000000" pitchFamily="34" charset="-122"/>
+                <a:ea typeface="PingFang SC" panose="020B0400000000000000" pitchFamily="34" charset="-122"/>
+              </a:rPr>
+              <a:t> </a:t>
+            </a:r>
+            <a:r>
+              <a:rPr lang="zh-CN" altLang="en-US" sz="2800" dirty="0">
+                <a:solidFill>
+                  <a:srgbClr val="333333"/>
+                </a:solidFill>
+                <a:latin typeface="PingFang SC" panose="020B0400000000000000" pitchFamily="34" charset="-122"/>
+                <a:ea typeface="PingFang SC" panose="020B0400000000000000" pitchFamily="34" charset="-122"/>
+              </a:rPr>
+              <a:t>拥有强大的包管理工具</a:t>
+            </a:r>
+            <a:r>
+              <a:rPr lang="en-US" altLang="zh-CN" sz="2800" dirty="0">
+                <a:solidFill>
+                  <a:srgbClr val="333333"/>
+                </a:solidFill>
+                <a:latin typeface="PingFang SC" panose="020B0400000000000000" pitchFamily="34" charset="-122"/>
+                <a:ea typeface="PingFang SC" panose="020B0400000000000000" pitchFamily="34" charset="-122"/>
+              </a:rPr>
+              <a:t>C</a:t>
+            </a:r>
+            <a:r>
+              <a:rPr lang="en-US" sz="2800" dirty="0">
+                <a:solidFill>
+                  <a:srgbClr val="333333"/>
+                </a:solidFill>
+                <a:latin typeface="PingFang SC" panose="020B0400000000000000" pitchFamily="34" charset="-122"/>
+                <a:ea typeface="PingFang SC" panose="020B0400000000000000" pitchFamily="34" charset="-122"/>
+              </a:rPr>
+              <a:t>onda</a:t>
+            </a:r>
+            <a:r>
+              <a:rPr lang="zh-CN" altLang="en-US" sz="2800" dirty="0">
+                <a:solidFill>
+                  <a:srgbClr val="333333"/>
+                </a:solidFill>
+                <a:latin typeface="PingFang SC" panose="020B0400000000000000" pitchFamily="34" charset="-122"/>
+                <a:ea typeface="PingFang SC" panose="020B0400000000000000" pitchFamily="34" charset="-122"/>
+              </a:rPr>
+              <a:t>；</a:t>
+            </a:r>
+            <a:endParaRPr lang="en-US" sz="2800" dirty="0">
+              <a:solidFill>
+                <a:srgbClr val="333333"/>
+              </a:solidFill>
+              <a:latin typeface="PingFang SC" panose="020B0400000000000000" pitchFamily="34" charset="-122"/>
+              <a:ea typeface="PingFang SC" panose="020B0400000000000000" pitchFamily="34" charset="-122"/>
+            </a:endParaRPr>
+          </a:p>
+          <a:p>
+            <a:pPr algn="l">
+              <a:buFont typeface="+mj-lt"/>
+              <a:buAutoNum type="arabicPeriod"/>
+            </a:pPr>
+            <a:r>
+              <a:rPr lang="en-US" altLang="zh-CN" sz="2800" dirty="0">
+                <a:solidFill>
+                  <a:srgbClr val="333333"/>
+                </a:solidFill>
+                <a:latin typeface="PingFang SC" panose="020B0400000000000000" pitchFamily="34" charset="-122"/>
+                <a:ea typeface="PingFang SC" panose="020B0400000000000000" pitchFamily="34" charset="-122"/>
+              </a:rPr>
+              <a:t> </a:t>
+            </a:r>
+            <a:r>
+              <a:rPr lang="zh-CN" altLang="en-US" sz="2800" dirty="0">
+                <a:solidFill>
+                  <a:srgbClr val="333333"/>
+                </a:solidFill>
+                <a:latin typeface="PingFang SC" panose="020B0400000000000000" pitchFamily="34" charset="-122"/>
+                <a:ea typeface="PingFang SC" panose="020B0400000000000000" pitchFamily="34" charset="-122"/>
+              </a:rPr>
+              <a:t>可用超过</a:t>
+            </a:r>
+            <a:r>
+              <a:rPr lang="en-US" altLang="zh-CN" sz="2800" dirty="0">
+                <a:solidFill>
+                  <a:srgbClr val="333333"/>
+                </a:solidFill>
+                <a:latin typeface="PingFang SC" panose="020B0400000000000000" pitchFamily="34" charset="-122"/>
+                <a:ea typeface="PingFang SC" panose="020B0400000000000000" pitchFamily="34" charset="-122"/>
+              </a:rPr>
+              <a:t>1400</a:t>
+            </a:r>
+            <a:r>
+              <a:rPr lang="zh-CN" altLang="en-US" sz="2800" dirty="0">
+                <a:solidFill>
+                  <a:srgbClr val="333333"/>
+                </a:solidFill>
+                <a:latin typeface="PingFang SC" panose="020B0400000000000000" pitchFamily="34" charset="-122"/>
+                <a:ea typeface="PingFang SC" panose="020B0400000000000000" pitchFamily="34" charset="-122"/>
+              </a:rPr>
+              <a:t>个</a:t>
+            </a:r>
+            <a:r>
+              <a:rPr lang="en-US" sz="2800" dirty="0">
+                <a:solidFill>
+                  <a:srgbClr val="333333"/>
+                </a:solidFill>
+                <a:latin typeface="PingFang SC" panose="020B0400000000000000" pitchFamily="34" charset="-122"/>
+                <a:ea typeface="PingFang SC" panose="020B0400000000000000" pitchFamily="34" charset="-122"/>
+              </a:rPr>
+              <a:t>python</a:t>
+            </a:r>
+            <a:r>
+              <a:rPr lang="zh-CN" altLang="en-US" sz="2800" dirty="0">
+                <a:solidFill>
+                  <a:srgbClr val="333333"/>
+                </a:solidFill>
+                <a:latin typeface="PingFang SC" panose="020B0400000000000000" pitchFamily="34" charset="-122"/>
+                <a:ea typeface="PingFang SC" panose="020B0400000000000000" pitchFamily="34" charset="-122"/>
+              </a:rPr>
+              <a:t>数据科学库</a:t>
+            </a:r>
+            <a:r>
+              <a:rPr lang="en-US" altLang="zh-CN" sz="2800" dirty="0">
+                <a:solidFill>
+                  <a:srgbClr val="333333"/>
+                </a:solidFill>
+                <a:latin typeface="PingFang SC" panose="020B0400000000000000" pitchFamily="34" charset="-122"/>
+                <a:ea typeface="PingFang SC" panose="020B0400000000000000" pitchFamily="34" charset="-122"/>
+              </a:rPr>
+              <a:t>.</a:t>
+            </a:r>
+            <a:endParaRPr lang="zh-CN" altLang="en-US" sz="2800" dirty="0">
+              <a:solidFill>
+                <a:srgbClr val="333333"/>
+              </a:solidFill>
+              <a:latin typeface="PingFang SC" panose="020B0400000000000000" pitchFamily="34" charset="-122"/>
+              <a:ea typeface="PingFang SC" panose="020B0400000000000000" pitchFamily="34" charset="-122"/>
+            </a:endParaRPr>
+          </a:p>
+        </p:txBody>
+      </p:sp>
+    </p:spTree>
+    <p:extLst>
+      <p:ext uri="{BB962C8B-B14F-4D97-AF65-F5344CB8AC3E}">
+        <p14:creationId xmlns:p14="http://schemas.microsoft.com/office/powerpoint/2010/main" val="2510358707"/>
+      </p:ext>
+    </p:extLst>
+  </p:cSld>
+  <p:clrMapOvr>
+    <a:masterClrMapping/>
+  </p:clrMapOvr>
+  <p:transition>
+    <p:fade/>
+  </p:transition>
+</p:sld>
+</file>
+
+<file path=ppt/slides/slide26.xml><?xml version="1.0" encoding="utf-8"?>
+<p:sld xmlns:a="http://schemas.openxmlformats.org/drawingml/2006/main" xmlns:r="http://schemas.openxmlformats.org/officeDocument/2006/relationships" xmlns:p="http://schemas.openxmlformats.org/presentationml/2006/main">
+  <p:cSld>
+    <p:spTree>
+      <p:nvGrpSpPr>
+        <p:cNvPr id="1" name=""/>
+        <p:cNvGrpSpPr/>
+        <p:nvPr/>
+      </p:nvGrpSpPr>
+      <p:grpSpPr>
+        <a:xfrm>
+          <a:off x="0" y="0"/>
+          <a:ext cx="0" cy="0"/>
+          <a:chOff x="0" y="0"/>
+          <a:chExt cx="0" cy="0"/>
+        </a:xfrm>
+      </p:grpSpPr>
+      <p:sp>
+        <p:nvSpPr>
+          <p:cNvPr id="3" name="标题 2"/>
+          <p:cNvSpPr>
+            <a:spLocks noGrp="1"/>
+          </p:cNvSpPr>
+          <p:nvPr>
+            <p:ph type="title"/>
+          </p:nvPr>
+        </p:nvSpPr>
+        <p:spPr>
+          <a:xfrm>
+            <a:off x="1" y="8526"/>
+            <a:ext cx="10537374" cy="792162"/>
+          </a:xfrm>
+        </p:spPr>
+        <p:txBody>
+          <a:bodyPr/>
+          <a:lstStyle/>
+          <a:p>
+            <a:pPr fontAlgn="auto">
+              <a:spcBef>
+                <a:spcPts val="0"/>
+              </a:spcBef>
+              <a:spcAft>
+                <a:spcPts val="0"/>
+              </a:spcAft>
+            </a:pPr>
+            <a:r>
+              <a:rPr lang="zh-CN" altLang="en-US" dirty="0">
+                <a:latin typeface="微软雅黑" pitchFamily="34" charset="-122"/>
+                <a:ea typeface="微软雅黑" pitchFamily="34" charset="-122"/>
+              </a:rPr>
+              <a:t>三、基于</a:t>
+            </a:r>
+            <a:r>
+              <a:rPr lang="en-US" altLang="zh-CN" dirty="0">
+                <a:latin typeface="微软雅黑" pitchFamily="34" charset="-122"/>
+                <a:ea typeface="微软雅黑" pitchFamily="34" charset="-122"/>
+              </a:rPr>
+              <a:t>Python</a:t>
+            </a:r>
+            <a:r>
+              <a:rPr lang="zh-CN" altLang="en-US" dirty="0">
+                <a:latin typeface="微软雅黑" pitchFamily="34" charset="-122"/>
+                <a:ea typeface="微软雅黑" pitchFamily="34" charset="-122"/>
+              </a:rPr>
+              <a:t>的开源软件开发环境配置</a:t>
+            </a:r>
+          </a:p>
+        </p:txBody>
+      </p:sp>
+      <p:sp>
+        <p:nvSpPr>
+          <p:cNvPr id="2" name="TextBox 1">
+            <a:extLst>
+              <a:ext uri="{FF2B5EF4-FFF2-40B4-BE49-F238E27FC236}">
+                <a16:creationId xmlns:a16="http://schemas.microsoft.com/office/drawing/2014/main" id="{631AADB6-C88A-D817-4683-FC087E4E240F}"/>
+              </a:ext>
+            </a:extLst>
+          </p:cNvPr>
+          <p:cNvSpPr txBox="1"/>
+          <p:nvPr/>
+        </p:nvSpPr>
+        <p:spPr>
+          <a:xfrm>
             <a:off x="466406" y="902171"/>
             <a:ext cx="9883930" cy="662489"/>
           </a:xfrm>
@@ -20407,7 +21244,7 @@
 </p:sld>
 </file>
 
-<file path=ppt/slides/slide26.xml><?xml version="1.0" encoding="utf-8"?>
+<file path=ppt/slides/slide27.xml><?xml version="1.0" encoding="utf-8"?>
 <p:sld xmlns:a="http://schemas.openxmlformats.org/drawingml/2006/main" xmlns:r="http://schemas.openxmlformats.org/officeDocument/2006/relationships" xmlns:p="http://schemas.openxmlformats.org/presentationml/2006/main">
   <p:cSld>
     <p:spTree>
@@ -20870,7 +21707,7 @@
 </p:sld>
 </file>
 
-<file path=ppt/slides/slide27.xml><?xml version="1.0" encoding="utf-8"?>
+<file path=ppt/slides/slide28.xml><?xml version="1.0" encoding="utf-8"?>
 <p:sld xmlns:a="http://schemas.openxmlformats.org/drawingml/2006/main" xmlns:r="http://schemas.openxmlformats.org/officeDocument/2006/relationships" xmlns:p="http://schemas.openxmlformats.org/presentationml/2006/main">
   <p:cSld>
     <p:spTree>
@@ -21331,7 +22168,7 @@
 </p:sld>
 </file>
 
-<file path=ppt/slides/slide28.xml><?xml version="1.0" encoding="utf-8"?>
+<file path=ppt/slides/slide29.xml><?xml version="1.0" encoding="utf-8"?>
 <p:sld xmlns:a="http://schemas.openxmlformats.org/drawingml/2006/main" xmlns:r="http://schemas.openxmlformats.org/officeDocument/2006/relationships" xmlns:p="http://schemas.openxmlformats.org/presentationml/2006/main">
   <p:cSld>
     <p:spTree>
@@ -21724,443 +22561,6 @@
     <p:extLst>
       <p:ext uri="{BB962C8B-B14F-4D97-AF65-F5344CB8AC3E}">
         <p14:creationId xmlns:p14="http://schemas.microsoft.com/office/powerpoint/2010/main" val="4134524030"/>
-      </p:ext>
-    </p:extLst>
-  </p:cSld>
-  <p:clrMapOvr>
-    <a:masterClrMapping/>
-  </p:clrMapOvr>
-  <p:transition>
-    <p:fade/>
-  </p:transition>
-</p:sld>
-</file>
-
-<file path=ppt/slides/slide29.xml><?xml version="1.0" encoding="utf-8"?>
-<p:sld xmlns:a="http://schemas.openxmlformats.org/drawingml/2006/main" xmlns:r="http://schemas.openxmlformats.org/officeDocument/2006/relationships" xmlns:p="http://schemas.openxmlformats.org/presentationml/2006/main">
-  <p:cSld>
-    <p:spTree>
-      <p:nvGrpSpPr>
-        <p:cNvPr id="1" name="">
-          <a:extLst>
-            <a:ext uri="{FF2B5EF4-FFF2-40B4-BE49-F238E27FC236}">
-              <a16:creationId xmlns:a16="http://schemas.microsoft.com/office/drawing/2014/main" id="{3A64E576-6150-D63D-1438-267A98D7DFD8}"/>
-            </a:ext>
-          </a:extLst>
-        </p:cNvPr>
-        <p:cNvGrpSpPr/>
-        <p:nvPr/>
-      </p:nvGrpSpPr>
-      <p:grpSpPr>
-        <a:xfrm>
-          <a:off x="0" y="0"/>
-          <a:ext cx="0" cy="0"/>
-          <a:chOff x="0" y="0"/>
-          <a:chExt cx="0" cy="0"/>
-        </a:xfrm>
-      </p:grpSpPr>
-      <p:sp>
-        <p:nvSpPr>
-          <p:cNvPr id="3" name="标题 2">
-            <a:extLst>
-              <a:ext uri="{FF2B5EF4-FFF2-40B4-BE49-F238E27FC236}">
-                <a16:creationId xmlns:a16="http://schemas.microsoft.com/office/drawing/2014/main" id="{5487E1F5-CC63-C111-A69B-FE25A5AC1176}"/>
-              </a:ext>
-            </a:extLst>
-          </p:cNvPr>
-          <p:cNvSpPr>
-            <a:spLocks noGrp="1"/>
-          </p:cNvSpPr>
-          <p:nvPr>
-            <p:ph type="title"/>
-          </p:nvPr>
-        </p:nvSpPr>
-        <p:spPr>
-          <a:xfrm>
-            <a:off x="1" y="8526"/>
-            <a:ext cx="10537374" cy="792162"/>
-          </a:xfrm>
-        </p:spPr>
-        <p:txBody>
-          <a:bodyPr/>
-          <a:lstStyle/>
-          <a:p>
-            <a:pPr fontAlgn="auto">
-              <a:spcBef>
-                <a:spcPts val="0"/>
-              </a:spcBef>
-              <a:spcAft>
-                <a:spcPts val="0"/>
-              </a:spcAft>
-            </a:pPr>
-            <a:r>
-              <a:rPr lang="zh-CN" altLang="en-US" dirty="0">
-                <a:latin typeface="微软雅黑" pitchFamily="34" charset="-122"/>
-                <a:ea typeface="微软雅黑" pitchFamily="34" charset="-122"/>
-              </a:rPr>
-              <a:t>三、基于</a:t>
-            </a:r>
-            <a:r>
-              <a:rPr lang="en-US" altLang="zh-CN" dirty="0">
-                <a:latin typeface="微软雅黑" pitchFamily="34" charset="-122"/>
-                <a:ea typeface="微软雅黑" pitchFamily="34" charset="-122"/>
-              </a:rPr>
-              <a:t>Python</a:t>
-            </a:r>
-            <a:r>
-              <a:rPr lang="zh-CN" altLang="en-US" dirty="0">
-                <a:latin typeface="微软雅黑" pitchFamily="34" charset="-122"/>
-                <a:ea typeface="微软雅黑" pitchFamily="34" charset="-122"/>
-              </a:rPr>
-              <a:t>的开源软件开发环境配置</a:t>
-            </a:r>
-          </a:p>
-        </p:txBody>
-      </p:sp>
-      <p:sp>
-        <p:nvSpPr>
-          <p:cNvPr id="17" name="TextBox 16">
-            <a:extLst>
-              <a:ext uri="{FF2B5EF4-FFF2-40B4-BE49-F238E27FC236}">
-                <a16:creationId xmlns:a16="http://schemas.microsoft.com/office/drawing/2014/main" id="{788AD22F-FE5A-7B63-FAC8-25713C607E8E}"/>
-              </a:ext>
-            </a:extLst>
-          </p:cNvPr>
-          <p:cNvSpPr txBox="1"/>
-          <p:nvPr/>
-        </p:nvSpPr>
-        <p:spPr>
-          <a:xfrm>
-            <a:off x="765194" y="1675141"/>
-            <a:ext cx="10686285" cy="1319720"/>
-          </a:xfrm>
-          <a:prstGeom prst="rect">
-            <a:avLst/>
-          </a:prstGeom>
-          <a:noFill/>
-        </p:spPr>
-        <p:txBody>
-          <a:bodyPr wrap="square">
-            <a:spAutoFit/>
-          </a:bodyPr>
-          <a:lstStyle/>
-          <a:p>
-            <a:pPr algn="l">
-              <a:lnSpc>
-                <a:spcPct val="150000"/>
-              </a:lnSpc>
-            </a:pPr>
-            <a:r>
-              <a:rPr lang="en-US" altLang="zh-CN" dirty="0" err="1">
-                <a:solidFill>
-                  <a:srgbClr val="333333"/>
-                </a:solidFill>
-                <a:latin typeface="Microsoft YaHei" panose="020B0503020204020204" pitchFamily="34" charset="-122"/>
-                <a:ea typeface="Microsoft YaHei" panose="020B0503020204020204" pitchFamily="34" charset="-122"/>
-              </a:rPr>
-              <a:t>conda</a:t>
-            </a:r>
-            <a:r>
-              <a:rPr lang="zh-CN" altLang="en-US" dirty="0">
-                <a:solidFill>
-                  <a:srgbClr val="333333"/>
-                </a:solidFill>
-                <a:latin typeface="Microsoft YaHei" panose="020B0503020204020204" pitchFamily="34" charset="-122"/>
-                <a:ea typeface="Microsoft YaHei" panose="020B0503020204020204" pitchFamily="34" charset="-122"/>
-              </a:rPr>
-              <a:t>安装命令（以安装</a:t>
-            </a:r>
-            <a:r>
-              <a:rPr lang="en-US" altLang="zh-CN" dirty="0" err="1">
-                <a:solidFill>
-                  <a:srgbClr val="333333"/>
-                </a:solidFill>
-                <a:latin typeface="Microsoft YaHei" panose="020B0503020204020204" pitchFamily="34" charset="-122"/>
-                <a:ea typeface="Microsoft YaHei" panose="020B0503020204020204" pitchFamily="34" charset="-122"/>
-              </a:rPr>
-              <a:t>numpy</a:t>
-            </a:r>
-            <a:r>
-              <a:rPr lang="zh-CN" altLang="en-US" dirty="0">
-                <a:solidFill>
-                  <a:srgbClr val="333333"/>
-                </a:solidFill>
-                <a:latin typeface="Microsoft YaHei" panose="020B0503020204020204" pitchFamily="34" charset="-122"/>
-                <a:ea typeface="Microsoft YaHei" panose="020B0503020204020204" pitchFamily="34" charset="-122"/>
-              </a:rPr>
-              <a:t>为例）：</a:t>
-            </a:r>
-            <a:r>
-              <a:rPr lang="en-US" altLang="zh-CN" dirty="0" err="1">
-                <a:solidFill>
-                  <a:srgbClr val="333333"/>
-                </a:solidFill>
-                <a:latin typeface="Microsoft YaHei" panose="020B0503020204020204" pitchFamily="34" charset="-122"/>
-                <a:ea typeface="Microsoft YaHei" panose="020B0503020204020204" pitchFamily="34" charset="-122"/>
-              </a:rPr>
-              <a:t>conda</a:t>
-            </a:r>
-            <a:r>
-              <a:rPr lang="en-US" altLang="zh-CN" dirty="0">
-                <a:solidFill>
-                  <a:srgbClr val="333333"/>
-                </a:solidFill>
-                <a:latin typeface="Microsoft YaHei" panose="020B0503020204020204" pitchFamily="34" charset="-122"/>
-                <a:ea typeface="Microsoft YaHei" panose="020B0503020204020204" pitchFamily="34" charset="-122"/>
-              </a:rPr>
-              <a:t> install </a:t>
-            </a:r>
-            <a:r>
-              <a:rPr lang="en-US" altLang="zh-CN" dirty="0" err="1">
-                <a:solidFill>
-                  <a:srgbClr val="333333"/>
-                </a:solidFill>
-                <a:latin typeface="Microsoft YaHei" panose="020B0503020204020204" pitchFamily="34" charset="-122"/>
-                <a:ea typeface="Microsoft YaHei" panose="020B0503020204020204" pitchFamily="34" charset="-122"/>
-              </a:rPr>
-              <a:t>numpy</a:t>
-            </a:r>
-            <a:endParaRPr lang="en-US" altLang="zh-CN" dirty="0">
-              <a:solidFill>
-                <a:srgbClr val="333333"/>
-              </a:solidFill>
-              <a:latin typeface="Microsoft YaHei" panose="020B0503020204020204" pitchFamily="34" charset="-122"/>
-              <a:ea typeface="Microsoft YaHei" panose="020B0503020204020204" pitchFamily="34" charset="-122"/>
-            </a:endParaRPr>
-          </a:p>
-          <a:p>
-            <a:pPr algn="l">
-              <a:lnSpc>
-                <a:spcPct val="150000"/>
-              </a:lnSpc>
-            </a:pPr>
-            <a:r>
-              <a:rPr lang="en-US" altLang="zh-CN" dirty="0" err="1">
-                <a:solidFill>
-                  <a:srgbClr val="333333"/>
-                </a:solidFill>
-                <a:latin typeface="Microsoft YaHei" panose="020B0503020204020204" pitchFamily="34" charset="-122"/>
-                <a:ea typeface="Microsoft YaHei" panose="020B0503020204020204" pitchFamily="34" charset="-122"/>
-              </a:rPr>
-              <a:t>conda</a:t>
-            </a:r>
-            <a:r>
-              <a:rPr lang="zh-CN" altLang="en-US" dirty="0">
-                <a:solidFill>
-                  <a:srgbClr val="333333"/>
-                </a:solidFill>
-                <a:latin typeface="Microsoft YaHei" panose="020B0503020204020204" pitchFamily="34" charset="-122"/>
-                <a:ea typeface="Microsoft YaHei" panose="020B0503020204020204" pitchFamily="34" charset="-122"/>
-              </a:rPr>
-              <a:t>卸载命令（以卸载</a:t>
-            </a:r>
-            <a:r>
-              <a:rPr lang="en-US" altLang="zh-CN" dirty="0" err="1">
-                <a:solidFill>
-                  <a:srgbClr val="333333"/>
-                </a:solidFill>
-                <a:latin typeface="Microsoft YaHei" panose="020B0503020204020204" pitchFamily="34" charset="-122"/>
-                <a:ea typeface="Microsoft YaHei" panose="020B0503020204020204" pitchFamily="34" charset="-122"/>
-              </a:rPr>
-              <a:t>numpy</a:t>
-            </a:r>
-            <a:r>
-              <a:rPr lang="zh-CN" altLang="en-US" dirty="0">
-                <a:solidFill>
-                  <a:srgbClr val="333333"/>
-                </a:solidFill>
-                <a:latin typeface="Microsoft YaHei" panose="020B0503020204020204" pitchFamily="34" charset="-122"/>
-                <a:ea typeface="Microsoft YaHei" panose="020B0503020204020204" pitchFamily="34" charset="-122"/>
-              </a:rPr>
-              <a:t>为例）：</a:t>
-            </a:r>
-            <a:r>
-              <a:rPr lang="en-US" altLang="zh-CN" dirty="0" err="1">
-                <a:solidFill>
-                  <a:srgbClr val="333333"/>
-                </a:solidFill>
-                <a:latin typeface="Microsoft YaHei" panose="020B0503020204020204" pitchFamily="34" charset="-122"/>
-                <a:ea typeface="Microsoft YaHei" panose="020B0503020204020204" pitchFamily="34" charset="-122"/>
-              </a:rPr>
-              <a:t>conda</a:t>
-            </a:r>
-            <a:r>
-              <a:rPr lang="en-US" altLang="zh-CN" dirty="0">
-                <a:solidFill>
-                  <a:srgbClr val="333333"/>
-                </a:solidFill>
-                <a:latin typeface="Microsoft YaHei" panose="020B0503020204020204" pitchFamily="34" charset="-122"/>
-                <a:ea typeface="Microsoft YaHei" panose="020B0503020204020204" pitchFamily="34" charset="-122"/>
-              </a:rPr>
-              <a:t> uninstall </a:t>
-            </a:r>
-            <a:r>
-              <a:rPr lang="en-US" altLang="zh-CN" dirty="0" err="1">
-                <a:solidFill>
-                  <a:srgbClr val="333333"/>
-                </a:solidFill>
-                <a:latin typeface="Microsoft YaHei" panose="020B0503020204020204" pitchFamily="34" charset="-122"/>
-                <a:ea typeface="Microsoft YaHei" panose="020B0503020204020204" pitchFamily="34" charset="-122"/>
-              </a:rPr>
-              <a:t>numpy</a:t>
-            </a:r>
-            <a:endParaRPr lang="en-US" altLang="zh-CN" dirty="0">
-              <a:solidFill>
-                <a:srgbClr val="333333"/>
-              </a:solidFill>
-              <a:latin typeface="Microsoft YaHei" panose="020B0503020204020204" pitchFamily="34" charset="-122"/>
-              <a:ea typeface="Microsoft YaHei" panose="020B0503020204020204" pitchFamily="34" charset="-122"/>
-            </a:endParaRPr>
-          </a:p>
-        </p:txBody>
-      </p:sp>
-      <p:pic>
-        <p:nvPicPr>
-          <p:cNvPr id="11" name="Picture 10" descr="Text&#10;&#10;Description automatically generated">
-            <a:extLst>
-              <a:ext uri="{FF2B5EF4-FFF2-40B4-BE49-F238E27FC236}">
-                <a16:creationId xmlns:a16="http://schemas.microsoft.com/office/drawing/2014/main" id="{13C22059-3A8E-FE75-0C1A-54D0A0B44A23}"/>
-              </a:ext>
-            </a:extLst>
-          </p:cNvPr>
-          <p:cNvPicPr>
-            <a:picLocks noChangeAspect="1"/>
-          </p:cNvPicPr>
-          <p:nvPr/>
-        </p:nvPicPr>
-        <p:blipFill>
-          <a:blip r:embed="rId3"/>
-          <a:stretch>
-            <a:fillRect/>
-          </a:stretch>
-        </p:blipFill>
-        <p:spPr>
-          <a:xfrm>
-            <a:off x="956313" y="3187706"/>
-            <a:ext cx="4935814" cy="3203622"/>
-          </a:xfrm>
-          <a:prstGeom prst="rect">
-            <a:avLst/>
-          </a:prstGeom>
-        </p:spPr>
-      </p:pic>
-      <p:pic>
-        <p:nvPicPr>
-          <p:cNvPr id="13" name="Picture 12" descr="Text&#10;&#10;Description automatically generated">
-            <a:extLst>
-              <a:ext uri="{FF2B5EF4-FFF2-40B4-BE49-F238E27FC236}">
-                <a16:creationId xmlns:a16="http://schemas.microsoft.com/office/drawing/2014/main" id="{D306FBE8-19A2-0AE5-DBCA-1012BCA7C970}"/>
-              </a:ext>
-            </a:extLst>
-          </p:cNvPr>
-          <p:cNvPicPr>
-            <a:picLocks noChangeAspect="1"/>
-          </p:cNvPicPr>
-          <p:nvPr/>
-        </p:nvPicPr>
-        <p:blipFill>
-          <a:blip r:embed="rId4"/>
-          <a:stretch>
-            <a:fillRect/>
-          </a:stretch>
-        </p:blipFill>
-        <p:spPr>
-          <a:xfrm>
-            <a:off x="6165277" y="3187706"/>
-            <a:ext cx="4935813" cy="3203622"/>
-          </a:xfrm>
-          <a:prstGeom prst="rect">
-            <a:avLst/>
-          </a:prstGeom>
-        </p:spPr>
-      </p:pic>
-      <p:sp>
-        <p:nvSpPr>
-          <p:cNvPr id="2" name="TextBox 1">
-            <a:extLst>
-              <a:ext uri="{FF2B5EF4-FFF2-40B4-BE49-F238E27FC236}">
-                <a16:creationId xmlns:a16="http://schemas.microsoft.com/office/drawing/2014/main" id="{148479E1-3DC0-E410-B012-C62CDA07C109}"/>
-              </a:ext>
-            </a:extLst>
-          </p:cNvPr>
-          <p:cNvSpPr txBox="1"/>
-          <p:nvPr/>
-        </p:nvSpPr>
-        <p:spPr>
-          <a:xfrm>
-            <a:off x="466406" y="902171"/>
-            <a:ext cx="9883930" cy="662489"/>
-          </a:xfrm>
-          <a:prstGeom prst="rect">
-            <a:avLst/>
-          </a:prstGeom>
-          <a:noFill/>
-        </p:spPr>
-        <p:txBody>
-          <a:bodyPr wrap="square" rtlCol="0">
-            <a:spAutoFit/>
-          </a:bodyPr>
-          <a:lstStyle/>
-          <a:p>
-            <a:pPr algn="just">
-              <a:lnSpc>
-                <a:spcPct val="150000"/>
-              </a:lnSpc>
-            </a:pPr>
-            <a:r>
-              <a:rPr lang="en-US" altLang="zh-CN" sz="2800" b="1" dirty="0">
-                <a:solidFill>
-                  <a:srgbClr val="333333"/>
-                </a:solidFill>
-                <a:latin typeface="+mn-ea"/>
-                <a:ea typeface="+mn-ea"/>
-              </a:rPr>
-              <a:t>2</a:t>
-            </a:r>
-            <a:r>
-              <a:rPr lang="zh-CN" altLang="en-US" sz="2800" b="1" dirty="0">
-                <a:solidFill>
-                  <a:srgbClr val="333333"/>
-                </a:solidFill>
-                <a:latin typeface="+mn-ea"/>
-                <a:ea typeface="+mn-ea"/>
-              </a:rPr>
-              <a:t>、</a:t>
-            </a:r>
-            <a:r>
-              <a:rPr lang="en-US" altLang="zh-CN" sz="2800" b="1" dirty="0">
-                <a:solidFill>
-                  <a:srgbClr val="333333"/>
-                </a:solidFill>
-                <a:latin typeface="+mn-ea"/>
-                <a:ea typeface="+mn-ea"/>
-              </a:rPr>
-              <a:t>Python</a:t>
-            </a:r>
-            <a:r>
-              <a:rPr lang="zh-CN" altLang="en-US" sz="2800" b="1" dirty="0">
-                <a:solidFill>
-                  <a:srgbClr val="333333"/>
-                </a:solidFill>
-                <a:latin typeface="+mn-ea"/>
-                <a:ea typeface="+mn-ea"/>
-              </a:rPr>
-              <a:t>第三方软件包安装</a:t>
-            </a:r>
-            <a:endParaRPr lang="en-US" altLang="zh-CN" sz="2800" b="1" dirty="0">
-              <a:solidFill>
-                <a:srgbClr val="333333"/>
-              </a:solidFill>
-              <a:latin typeface="+mn-ea"/>
-              <a:ea typeface="+mn-ea"/>
-            </a:endParaRPr>
-          </a:p>
-        </p:txBody>
-      </p:sp>
-    </p:spTree>
-    <p:extLst>
-      <p:ext uri="{BB962C8B-B14F-4D97-AF65-F5344CB8AC3E}">
-        <p14:creationId xmlns:p14="http://schemas.microsoft.com/office/powerpoint/2010/main" val="1242415689"/>
       </p:ext>
     </p:extLst>
   </p:cSld>
@@ -22900,6 +23300,443 @@
   <p:cSld>
     <p:spTree>
       <p:nvGrpSpPr>
+        <p:cNvPr id="1" name="">
+          <a:extLst>
+            <a:ext uri="{FF2B5EF4-FFF2-40B4-BE49-F238E27FC236}">
+              <a16:creationId xmlns:a16="http://schemas.microsoft.com/office/drawing/2014/main" id="{3A64E576-6150-D63D-1438-267A98D7DFD8}"/>
+            </a:ext>
+          </a:extLst>
+        </p:cNvPr>
+        <p:cNvGrpSpPr/>
+        <p:nvPr/>
+      </p:nvGrpSpPr>
+      <p:grpSpPr>
+        <a:xfrm>
+          <a:off x="0" y="0"/>
+          <a:ext cx="0" cy="0"/>
+          <a:chOff x="0" y="0"/>
+          <a:chExt cx="0" cy="0"/>
+        </a:xfrm>
+      </p:grpSpPr>
+      <p:sp>
+        <p:nvSpPr>
+          <p:cNvPr id="3" name="标题 2">
+            <a:extLst>
+              <a:ext uri="{FF2B5EF4-FFF2-40B4-BE49-F238E27FC236}">
+                <a16:creationId xmlns:a16="http://schemas.microsoft.com/office/drawing/2014/main" id="{5487E1F5-CC63-C111-A69B-FE25A5AC1176}"/>
+              </a:ext>
+            </a:extLst>
+          </p:cNvPr>
+          <p:cNvSpPr>
+            <a:spLocks noGrp="1"/>
+          </p:cNvSpPr>
+          <p:nvPr>
+            <p:ph type="title"/>
+          </p:nvPr>
+        </p:nvSpPr>
+        <p:spPr>
+          <a:xfrm>
+            <a:off x="1" y="8526"/>
+            <a:ext cx="10537374" cy="792162"/>
+          </a:xfrm>
+        </p:spPr>
+        <p:txBody>
+          <a:bodyPr/>
+          <a:lstStyle/>
+          <a:p>
+            <a:pPr fontAlgn="auto">
+              <a:spcBef>
+                <a:spcPts val="0"/>
+              </a:spcBef>
+              <a:spcAft>
+                <a:spcPts val="0"/>
+              </a:spcAft>
+            </a:pPr>
+            <a:r>
+              <a:rPr lang="zh-CN" altLang="en-US" dirty="0">
+                <a:latin typeface="微软雅黑" pitchFamily="34" charset="-122"/>
+                <a:ea typeface="微软雅黑" pitchFamily="34" charset="-122"/>
+              </a:rPr>
+              <a:t>三、基于</a:t>
+            </a:r>
+            <a:r>
+              <a:rPr lang="en-US" altLang="zh-CN" dirty="0">
+                <a:latin typeface="微软雅黑" pitchFamily="34" charset="-122"/>
+                <a:ea typeface="微软雅黑" pitchFamily="34" charset="-122"/>
+              </a:rPr>
+              <a:t>Python</a:t>
+            </a:r>
+            <a:r>
+              <a:rPr lang="zh-CN" altLang="en-US" dirty="0">
+                <a:latin typeface="微软雅黑" pitchFamily="34" charset="-122"/>
+                <a:ea typeface="微软雅黑" pitchFamily="34" charset="-122"/>
+              </a:rPr>
+              <a:t>的开源软件开发环境配置</a:t>
+            </a:r>
+          </a:p>
+        </p:txBody>
+      </p:sp>
+      <p:sp>
+        <p:nvSpPr>
+          <p:cNvPr id="17" name="TextBox 16">
+            <a:extLst>
+              <a:ext uri="{FF2B5EF4-FFF2-40B4-BE49-F238E27FC236}">
+                <a16:creationId xmlns:a16="http://schemas.microsoft.com/office/drawing/2014/main" id="{788AD22F-FE5A-7B63-FAC8-25713C607E8E}"/>
+              </a:ext>
+            </a:extLst>
+          </p:cNvPr>
+          <p:cNvSpPr txBox="1"/>
+          <p:nvPr/>
+        </p:nvSpPr>
+        <p:spPr>
+          <a:xfrm>
+            <a:off x="765194" y="1675141"/>
+            <a:ext cx="10686285" cy="1319720"/>
+          </a:xfrm>
+          <a:prstGeom prst="rect">
+            <a:avLst/>
+          </a:prstGeom>
+          <a:noFill/>
+        </p:spPr>
+        <p:txBody>
+          <a:bodyPr wrap="square">
+            <a:spAutoFit/>
+          </a:bodyPr>
+          <a:lstStyle/>
+          <a:p>
+            <a:pPr algn="l">
+              <a:lnSpc>
+                <a:spcPct val="150000"/>
+              </a:lnSpc>
+            </a:pPr>
+            <a:r>
+              <a:rPr lang="en-US" altLang="zh-CN" dirty="0" err="1">
+                <a:solidFill>
+                  <a:srgbClr val="333333"/>
+                </a:solidFill>
+                <a:latin typeface="Microsoft YaHei" panose="020B0503020204020204" pitchFamily="34" charset="-122"/>
+                <a:ea typeface="Microsoft YaHei" panose="020B0503020204020204" pitchFamily="34" charset="-122"/>
+              </a:rPr>
+              <a:t>conda</a:t>
+            </a:r>
+            <a:r>
+              <a:rPr lang="zh-CN" altLang="en-US" dirty="0">
+                <a:solidFill>
+                  <a:srgbClr val="333333"/>
+                </a:solidFill>
+                <a:latin typeface="Microsoft YaHei" panose="020B0503020204020204" pitchFamily="34" charset="-122"/>
+                <a:ea typeface="Microsoft YaHei" panose="020B0503020204020204" pitchFamily="34" charset="-122"/>
+              </a:rPr>
+              <a:t>安装命令（以安装</a:t>
+            </a:r>
+            <a:r>
+              <a:rPr lang="en-US" altLang="zh-CN" dirty="0" err="1">
+                <a:solidFill>
+                  <a:srgbClr val="333333"/>
+                </a:solidFill>
+                <a:latin typeface="Microsoft YaHei" panose="020B0503020204020204" pitchFamily="34" charset="-122"/>
+                <a:ea typeface="Microsoft YaHei" panose="020B0503020204020204" pitchFamily="34" charset="-122"/>
+              </a:rPr>
+              <a:t>numpy</a:t>
+            </a:r>
+            <a:r>
+              <a:rPr lang="zh-CN" altLang="en-US" dirty="0">
+                <a:solidFill>
+                  <a:srgbClr val="333333"/>
+                </a:solidFill>
+                <a:latin typeface="Microsoft YaHei" panose="020B0503020204020204" pitchFamily="34" charset="-122"/>
+                <a:ea typeface="Microsoft YaHei" panose="020B0503020204020204" pitchFamily="34" charset="-122"/>
+              </a:rPr>
+              <a:t>为例）：</a:t>
+            </a:r>
+            <a:r>
+              <a:rPr lang="en-US" altLang="zh-CN" dirty="0" err="1">
+                <a:solidFill>
+                  <a:srgbClr val="333333"/>
+                </a:solidFill>
+                <a:latin typeface="Microsoft YaHei" panose="020B0503020204020204" pitchFamily="34" charset="-122"/>
+                <a:ea typeface="Microsoft YaHei" panose="020B0503020204020204" pitchFamily="34" charset="-122"/>
+              </a:rPr>
+              <a:t>conda</a:t>
+            </a:r>
+            <a:r>
+              <a:rPr lang="en-US" altLang="zh-CN" dirty="0">
+                <a:solidFill>
+                  <a:srgbClr val="333333"/>
+                </a:solidFill>
+                <a:latin typeface="Microsoft YaHei" panose="020B0503020204020204" pitchFamily="34" charset="-122"/>
+                <a:ea typeface="Microsoft YaHei" panose="020B0503020204020204" pitchFamily="34" charset="-122"/>
+              </a:rPr>
+              <a:t> install </a:t>
+            </a:r>
+            <a:r>
+              <a:rPr lang="en-US" altLang="zh-CN" dirty="0" err="1">
+                <a:solidFill>
+                  <a:srgbClr val="333333"/>
+                </a:solidFill>
+                <a:latin typeface="Microsoft YaHei" panose="020B0503020204020204" pitchFamily="34" charset="-122"/>
+                <a:ea typeface="Microsoft YaHei" panose="020B0503020204020204" pitchFamily="34" charset="-122"/>
+              </a:rPr>
+              <a:t>numpy</a:t>
+            </a:r>
+            <a:endParaRPr lang="en-US" altLang="zh-CN" dirty="0">
+              <a:solidFill>
+                <a:srgbClr val="333333"/>
+              </a:solidFill>
+              <a:latin typeface="Microsoft YaHei" panose="020B0503020204020204" pitchFamily="34" charset="-122"/>
+              <a:ea typeface="Microsoft YaHei" panose="020B0503020204020204" pitchFamily="34" charset="-122"/>
+            </a:endParaRPr>
+          </a:p>
+          <a:p>
+            <a:pPr algn="l">
+              <a:lnSpc>
+                <a:spcPct val="150000"/>
+              </a:lnSpc>
+            </a:pPr>
+            <a:r>
+              <a:rPr lang="en-US" altLang="zh-CN" dirty="0" err="1">
+                <a:solidFill>
+                  <a:srgbClr val="333333"/>
+                </a:solidFill>
+                <a:latin typeface="Microsoft YaHei" panose="020B0503020204020204" pitchFamily="34" charset="-122"/>
+                <a:ea typeface="Microsoft YaHei" panose="020B0503020204020204" pitchFamily="34" charset="-122"/>
+              </a:rPr>
+              <a:t>conda</a:t>
+            </a:r>
+            <a:r>
+              <a:rPr lang="zh-CN" altLang="en-US" dirty="0">
+                <a:solidFill>
+                  <a:srgbClr val="333333"/>
+                </a:solidFill>
+                <a:latin typeface="Microsoft YaHei" panose="020B0503020204020204" pitchFamily="34" charset="-122"/>
+                <a:ea typeface="Microsoft YaHei" panose="020B0503020204020204" pitchFamily="34" charset="-122"/>
+              </a:rPr>
+              <a:t>卸载命令（以卸载</a:t>
+            </a:r>
+            <a:r>
+              <a:rPr lang="en-US" altLang="zh-CN" dirty="0" err="1">
+                <a:solidFill>
+                  <a:srgbClr val="333333"/>
+                </a:solidFill>
+                <a:latin typeface="Microsoft YaHei" panose="020B0503020204020204" pitchFamily="34" charset="-122"/>
+                <a:ea typeface="Microsoft YaHei" panose="020B0503020204020204" pitchFamily="34" charset="-122"/>
+              </a:rPr>
+              <a:t>numpy</a:t>
+            </a:r>
+            <a:r>
+              <a:rPr lang="zh-CN" altLang="en-US" dirty="0">
+                <a:solidFill>
+                  <a:srgbClr val="333333"/>
+                </a:solidFill>
+                <a:latin typeface="Microsoft YaHei" panose="020B0503020204020204" pitchFamily="34" charset="-122"/>
+                <a:ea typeface="Microsoft YaHei" panose="020B0503020204020204" pitchFamily="34" charset="-122"/>
+              </a:rPr>
+              <a:t>为例）：</a:t>
+            </a:r>
+            <a:r>
+              <a:rPr lang="en-US" altLang="zh-CN" dirty="0" err="1">
+                <a:solidFill>
+                  <a:srgbClr val="333333"/>
+                </a:solidFill>
+                <a:latin typeface="Microsoft YaHei" panose="020B0503020204020204" pitchFamily="34" charset="-122"/>
+                <a:ea typeface="Microsoft YaHei" panose="020B0503020204020204" pitchFamily="34" charset="-122"/>
+              </a:rPr>
+              <a:t>conda</a:t>
+            </a:r>
+            <a:r>
+              <a:rPr lang="en-US" altLang="zh-CN" dirty="0">
+                <a:solidFill>
+                  <a:srgbClr val="333333"/>
+                </a:solidFill>
+                <a:latin typeface="Microsoft YaHei" panose="020B0503020204020204" pitchFamily="34" charset="-122"/>
+                <a:ea typeface="Microsoft YaHei" panose="020B0503020204020204" pitchFamily="34" charset="-122"/>
+              </a:rPr>
+              <a:t> uninstall </a:t>
+            </a:r>
+            <a:r>
+              <a:rPr lang="en-US" altLang="zh-CN" dirty="0" err="1">
+                <a:solidFill>
+                  <a:srgbClr val="333333"/>
+                </a:solidFill>
+                <a:latin typeface="Microsoft YaHei" panose="020B0503020204020204" pitchFamily="34" charset="-122"/>
+                <a:ea typeface="Microsoft YaHei" panose="020B0503020204020204" pitchFamily="34" charset="-122"/>
+              </a:rPr>
+              <a:t>numpy</a:t>
+            </a:r>
+            <a:endParaRPr lang="en-US" altLang="zh-CN" dirty="0">
+              <a:solidFill>
+                <a:srgbClr val="333333"/>
+              </a:solidFill>
+              <a:latin typeface="Microsoft YaHei" panose="020B0503020204020204" pitchFamily="34" charset="-122"/>
+              <a:ea typeface="Microsoft YaHei" panose="020B0503020204020204" pitchFamily="34" charset="-122"/>
+            </a:endParaRPr>
+          </a:p>
+        </p:txBody>
+      </p:sp>
+      <p:pic>
+        <p:nvPicPr>
+          <p:cNvPr id="11" name="Picture 10" descr="Text&#10;&#10;Description automatically generated">
+            <a:extLst>
+              <a:ext uri="{FF2B5EF4-FFF2-40B4-BE49-F238E27FC236}">
+                <a16:creationId xmlns:a16="http://schemas.microsoft.com/office/drawing/2014/main" id="{13C22059-3A8E-FE75-0C1A-54D0A0B44A23}"/>
+              </a:ext>
+            </a:extLst>
+          </p:cNvPr>
+          <p:cNvPicPr>
+            <a:picLocks noChangeAspect="1"/>
+          </p:cNvPicPr>
+          <p:nvPr/>
+        </p:nvPicPr>
+        <p:blipFill>
+          <a:blip r:embed="rId3"/>
+          <a:stretch>
+            <a:fillRect/>
+          </a:stretch>
+        </p:blipFill>
+        <p:spPr>
+          <a:xfrm>
+            <a:off x="956313" y="3187706"/>
+            <a:ext cx="4935814" cy="3203622"/>
+          </a:xfrm>
+          <a:prstGeom prst="rect">
+            <a:avLst/>
+          </a:prstGeom>
+        </p:spPr>
+      </p:pic>
+      <p:pic>
+        <p:nvPicPr>
+          <p:cNvPr id="13" name="Picture 12" descr="Text&#10;&#10;Description automatically generated">
+            <a:extLst>
+              <a:ext uri="{FF2B5EF4-FFF2-40B4-BE49-F238E27FC236}">
+                <a16:creationId xmlns:a16="http://schemas.microsoft.com/office/drawing/2014/main" id="{D306FBE8-19A2-0AE5-DBCA-1012BCA7C970}"/>
+              </a:ext>
+            </a:extLst>
+          </p:cNvPr>
+          <p:cNvPicPr>
+            <a:picLocks noChangeAspect="1"/>
+          </p:cNvPicPr>
+          <p:nvPr/>
+        </p:nvPicPr>
+        <p:blipFill>
+          <a:blip r:embed="rId4"/>
+          <a:stretch>
+            <a:fillRect/>
+          </a:stretch>
+        </p:blipFill>
+        <p:spPr>
+          <a:xfrm>
+            <a:off x="6165277" y="3187706"/>
+            <a:ext cx="4935813" cy="3203622"/>
+          </a:xfrm>
+          <a:prstGeom prst="rect">
+            <a:avLst/>
+          </a:prstGeom>
+        </p:spPr>
+      </p:pic>
+      <p:sp>
+        <p:nvSpPr>
+          <p:cNvPr id="2" name="TextBox 1">
+            <a:extLst>
+              <a:ext uri="{FF2B5EF4-FFF2-40B4-BE49-F238E27FC236}">
+                <a16:creationId xmlns:a16="http://schemas.microsoft.com/office/drawing/2014/main" id="{148479E1-3DC0-E410-B012-C62CDA07C109}"/>
+              </a:ext>
+            </a:extLst>
+          </p:cNvPr>
+          <p:cNvSpPr txBox="1"/>
+          <p:nvPr/>
+        </p:nvSpPr>
+        <p:spPr>
+          <a:xfrm>
+            <a:off x="466406" y="902171"/>
+            <a:ext cx="9883930" cy="662489"/>
+          </a:xfrm>
+          <a:prstGeom prst="rect">
+            <a:avLst/>
+          </a:prstGeom>
+          <a:noFill/>
+        </p:spPr>
+        <p:txBody>
+          <a:bodyPr wrap="square" rtlCol="0">
+            <a:spAutoFit/>
+          </a:bodyPr>
+          <a:lstStyle/>
+          <a:p>
+            <a:pPr algn="just">
+              <a:lnSpc>
+                <a:spcPct val="150000"/>
+              </a:lnSpc>
+            </a:pPr>
+            <a:r>
+              <a:rPr lang="en-US" altLang="zh-CN" sz="2800" b="1" dirty="0">
+                <a:solidFill>
+                  <a:srgbClr val="333333"/>
+                </a:solidFill>
+                <a:latin typeface="+mn-ea"/>
+                <a:ea typeface="+mn-ea"/>
+              </a:rPr>
+              <a:t>2</a:t>
+            </a:r>
+            <a:r>
+              <a:rPr lang="zh-CN" altLang="en-US" sz="2800" b="1" dirty="0">
+                <a:solidFill>
+                  <a:srgbClr val="333333"/>
+                </a:solidFill>
+                <a:latin typeface="+mn-ea"/>
+                <a:ea typeface="+mn-ea"/>
+              </a:rPr>
+              <a:t>、</a:t>
+            </a:r>
+            <a:r>
+              <a:rPr lang="en-US" altLang="zh-CN" sz="2800" b="1" dirty="0">
+                <a:solidFill>
+                  <a:srgbClr val="333333"/>
+                </a:solidFill>
+                <a:latin typeface="+mn-ea"/>
+                <a:ea typeface="+mn-ea"/>
+              </a:rPr>
+              <a:t>Python</a:t>
+            </a:r>
+            <a:r>
+              <a:rPr lang="zh-CN" altLang="en-US" sz="2800" b="1" dirty="0">
+                <a:solidFill>
+                  <a:srgbClr val="333333"/>
+                </a:solidFill>
+                <a:latin typeface="+mn-ea"/>
+                <a:ea typeface="+mn-ea"/>
+              </a:rPr>
+              <a:t>第三方软件包安装</a:t>
+            </a:r>
+            <a:endParaRPr lang="en-US" altLang="zh-CN" sz="2800" b="1" dirty="0">
+              <a:solidFill>
+                <a:srgbClr val="333333"/>
+              </a:solidFill>
+              <a:latin typeface="+mn-ea"/>
+              <a:ea typeface="+mn-ea"/>
+            </a:endParaRPr>
+          </a:p>
+        </p:txBody>
+      </p:sp>
+    </p:spTree>
+    <p:extLst>
+      <p:ext uri="{BB962C8B-B14F-4D97-AF65-F5344CB8AC3E}">
+        <p14:creationId xmlns:p14="http://schemas.microsoft.com/office/powerpoint/2010/main" val="1242415689"/>
+      </p:ext>
+    </p:extLst>
+  </p:cSld>
+  <p:clrMapOvr>
+    <a:masterClrMapping/>
+  </p:clrMapOvr>
+  <p:transition>
+    <p:fade/>
+  </p:transition>
+</p:sld>
+</file>
+
+<file path=ppt/slides/slide31.xml><?xml version="1.0" encoding="utf-8"?>
+<p:sld xmlns:a="http://schemas.openxmlformats.org/drawingml/2006/main" xmlns:r="http://schemas.openxmlformats.org/officeDocument/2006/relationships" xmlns:p="http://schemas.openxmlformats.org/presentationml/2006/main">
+  <p:cSld>
+    <p:spTree>
+      <p:nvGrpSpPr>
         <p:cNvPr id="1" name=""/>
         <p:cNvGrpSpPr/>
         <p:nvPr/>
@@ -23194,7 +24031,7 @@
 </p:sld>
 </file>
 
-<file path=ppt/slides/slide31.xml><?xml version="1.0" encoding="utf-8"?>
+<file path=ppt/slides/slide32.xml><?xml version="1.0" encoding="utf-8"?>
 <p:sld xmlns:a="http://schemas.openxmlformats.org/drawingml/2006/main" xmlns:r="http://schemas.openxmlformats.org/officeDocument/2006/relationships" xmlns:p="http://schemas.openxmlformats.org/presentationml/2006/main">
   <p:cSld>
     <p:spTree>
@@ -23743,7 +24580,7 @@
 </p:sld>
 </file>
 
-<file path=ppt/slides/slide32.xml><?xml version="1.0" encoding="utf-8"?>
+<file path=ppt/slides/slide33.xml><?xml version="1.0" encoding="utf-8"?>
 <p:sld xmlns:a="http://schemas.openxmlformats.org/drawingml/2006/main" xmlns:r="http://schemas.openxmlformats.org/officeDocument/2006/relationships" xmlns:p="http://schemas.openxmlformats.org/presentationml/2006/main">
   <p:cSld>
     <p:spTree>
@@ -24278,7 +25115,7 @@
 </p:sld>
 </file>
 
-<file path=ppt/slides/slide33.xml><?xml version="1.0" encoding="utf-8"?>
+<file path=ppt/slides/slide34.xml><?xml version="1.0" encoding="utf-8"?>
 <p:sld xmlns:a="http://schemas.openxmlformats.org/drawingml/2006/main" xmlns:r="http://schemas.openxmlformats.org/officeDocument/2006/relationships" xmlns:p="http://schemas.openxmlformats.org/presentationml/2006/main">
   <p:cSld>
     <p:spTree>
@@ -24675,7 +25512,7 @@
 </p:sld>
 </file>
 
-<file path=ppt/slides/slide34.xml><?xml version="1.0" encoding="utf-8"?>
+<file path=ppt/slides/slide35.xml><?xml version="1.0" encoding="utf-8"?>
 <p:sld xmlns:a="http://schemas.openxmlformats.org/drawingml/2006/main" xmlns:r="http://schemas.openxmlformats.org/officeDocument/2006/relationships" xmlns:p="http://schemas.openxmlformats.org/presentationml/2006/main">
   <p:cSld>
     <p:spTree>
@@ -24732,7 +25569,7 @@
                 </a:solidFill>
               </a:rPr>
               <a:pPr/>
-              <a:t>34</a:t>
+              <a:t>35</a:t>
             </a:fld>
             <a:endParaRPr lang="zh-CN" altLang="en-US">
               <a:solidFill>
@@ -25180,7 +26017,7 @@
 </p:sld>
 </file>
 
-<file path=ppt/slides/slide35.xml><?xml version="1.0" encoding="utf-8"?>
+<file path=ppt/slides/slide36.xml><?xml version="1.0" encoding="utf-8"?>
 <p:sld xmlns:a="http://schemas.openxmlformats.org/drawingml/2006/main" xmlns:r="http://schemas.openxmlformats.org/officeDocument/2006/relationships" xmlns:p="http://schemas.openxmlformats.org/presentationml/2006/main">
   <p:cSld>
     <p:spTree>
@@ -25309,8 +26146,8 @@
         </p:nvSpPr>
         <p:spPr>
           <a:xfrm>
-            <a:off x="583007" y="1964040"/>
-            <a:ext cx="11273508" cy="4351319"/>
+            <a:off x="398899" y="2178835"/>
+            <a:ext cx="11457616" cy="4351319"/>
           </a:xfrm>
           <a:prstGeom prst="rect">
             <a:avLst/>
@@ -25665,7 +26502,7 @@
         <p:spPr>
           <a:xfrm>
             <a:off x="939282" y="1502333"/>
-            <a:ext cx="9444700" cy="523220"/>
+            <a:ext cx="9444700" cy="646331"/>
           </a:xfrm>
           <a:prstGeom prst="rect">
             <a:avLst/>
@@ -25679,7 +26516,7 @@
           <a:lstStyle/>
           <a:p>
             <a:r>
-              <a:rPr lang="zh-CN" altLang="en-US" sz="2800" b="1" u="sng" dirty="0">
+              <a:rPr lang="zh-CN" altLang="en-US" sz="3600" b="1" u="sng" dirty="0">
                 <a:solidFill>
                   <a:srgbClr val="FF0000"/>
                 </a:solidFill>
@@ -25689,7 +26526,7 @@
               <a:t>题目：</a:t>
             </a:r>
             <a:r>
-              <a:rPr lang="zh-CN" altLang="en-CN" sz="2800" b="1" u="sng" dirty="0">
+              <a:rPr lang="zh-CN" altLang="en-CN" sz="3600" b="1" u="sng" dirty="0">
                 <a:solidFill>
                   <a:srgbClr val="FF0000"/>
                 </a:solidFill>
@@ -25699,7 +26536,7 @@
               <a:t>遥感</a:t>
             </a:r>
             <a:r>
-              <a:rPr lang="zh-CN" altLang="en-US" sz="2800" b="1" u="sng" dirty="0">
+              <a:rPr lang="zh-CN" altLang="en-US" sz="3600" b="1" u="sng" dirty="0">
                 <a:solidFill>
                   <a:srgbClr val="FF0000"/>
                 </a:solidFill>
@@ -25708,7 +26545,7 @@
               </a:rPr>
               <a:t>数据处理编程环境配置</a:t>
             </a:r>
-            <a:endParaRPr lang="en-US" altLang="zh-CN" sz="2800" b="1" u="sng" dirty="0">
+            <a:endParaRPr lang="en-US" altLang="zh-CN" sz="3600" b="1" u="sng" dirty="0">
               <a:solidFill>
                 <a:srgbClr val="FF0000"/>
               </a:solidFill>
@@ -25915,7 +26752,7 @@
           <p:nvPr>
             <p:extLst>
               <p:ext uri="{D42A27DB-BD31-4B8C-83A1-F6EECF244321}">
-                <p14:modId xmlns:p14="http://schemas.microsoft.com/office/powerpoint/2010/main" val="3627353589"/>
+                <p14:modId xmlns:p14="http://schemas.microsoft.com/office/powerpoint/2010/main" val="2529379039"/>
               </p:ext>
             </p:extLst>
           </p:nvPr>
@@ -26171,7 +27008,7 @@
                           <a:ea typeface="+mn-ea"/>
                           <a:cs typeface="+mn-cs"/>
                         </a:rPr>
-                        <a:t> 计算机原理与程序设计概述，</a:t>
+                        <a:t> 计算机原理与程序设计概述；</a:t>
                       </a:r>
                       <a:r>
                         <a:rPr lang="en-US" altLang="zh-CN" sz="1800" b="1" kern="100" dirty="0">
@@ -26370,7 +27207,7 @@
                           <a:ea typeface="+mn-ea"/>
                           <a:cs typeface="+mn-cs"/>
                         </a:rPr>
-                        <a:t>3. </a:t>
+                        <a:t>1. </a:t>
                       </a:r>
                       <a:r>
                         <a:rPr lang="zh-CN" altLang="en-US" sz="1800" b="1" kern="100" dirty="0">
@@ -26382,7 +27219,7 @@
                           <a:ea typeface="+mn-ea"/>
                           <a:cs typeface="+mn-cs"/>
                         </a:rPr>
-                        <a:t>变量命名与赋值，</a:t>
+                        <a:t>函数、模块与包概念；</a:t>
                       </a:r>
                       <a:r>
                         <a:rPr lang="en-US" altLang="zh-CN" sz="1800" b="1" kern="100" dirty="0">
@@ -26394,7 +27231,7 @@
                           <a:ea typeface="+mn-ea"/>
                           <a:cs typeface="+mn-cs"/>
                         </a:rPr>
-                        <a:t>4. </a:t>
+                        <a:t>2. python</a:t>
                       </a:r>
                       <a:r>
                         <a:rPr lang="zh-CN" altLang="en-US" sz="1800" b="1" kern="100" dirty="0">
@@ -26406,10 +27243,10 @@
                           <a:ea typeface="+mn-ea"/>
                           <a:cs typeface="+mn-cs"/>
                         </a:rPr>
-                        <a:t>数据类型</a:t>
+                        <a:t>内置函数与标准库；</a:t>
                       </a:r>
                       <a:r>
-                        <a:rPr lang="en-CN" sz="1800" b="1" kern="100" dirty="0">
+                        <a:rPr lang="en-US" altLang="zh-CN" sz="1800" b="1" kern="100" dirty="0">
                           <a:solidFill>
                             <a:schemeClr val="bg2"/>
                           </a:solidFill>
@@ -26418,7 +27255,7 @@
                           <a:ea typeface="+mn-ea"/>
                           <a:cs typeface="+mn-cs"/>
                         </a:rPr>
-                        <a:t> </a:t>
+                        <a:t>3. python</a:t>
                       </a:r>
                       <a:r>
                         <a:rPr lang="zh-CN" altLang="en-US" sz="1800" b="1" kern="100" dirty="0">
@@ -26430,34 +27267,10 @@
                           <a:ea typeface="+mn-ea"/>
                           <a:cs typeface="+mn-cs"/>
                         </a:rPr>
-                        <a:t>，</a:t>
+                        <a:t>第三方库</a:t>
                       </a:r>
                       <a:r>
-                        <a:rPr lang="en-US" altLang="zh-CN" sz="1800" b="1" kern="100" dirty="0">
-                          <a:solidFill>
-                            <a:schemeClr val="bg2"/>
-                          </a:solidFill>
-                          <a:effectLst/>
-                          <a:latin typeface="+mn-lt"/>
-                          <a:ea typeface="+mn-ea"/>
-                          <a:cs typeface="+mn-cs"/>
-                        </a:rPr>
-                        <a:t>5. </a:t>
-                      </a:r>
-                      <a:r>
-                        <a:rPr lang="zh-CN" altLang="en-US" sz="1800" b="1" kern="100" dirty="0">
-                          <a:solidFill>
-                            <a:schemeClr val="bg2"/>
-                          </a:solidFill>
-                          <a:effectLst/>
-                          <a:latin typeface="+mn-lt"/>
-                          <a:ea typeface="+mn-ea"/>
-                          <a:cs typeface="+mn-cs"/>
-                        </a:rPr>
-                        <a:t>数据类型转换</a:t>
-                      </a:r>
-                      <a:r>
-                        <a:rPr lang="en-CN" sz="1800" b="1" kern="100" dirty="0">
+                        <a:rPr lang="en-CN" altLang="zh-CN" sz="1800" b="1" kern="100" dirty="0">
                           <a:solidFill>
                             <a:schemeClr val="bg2"/>
                           </a:solidFill>
@@ -26569,95 +27382,104 @@
                     <a:bodyPr/>
                     <a:lstStyle/>
                     <a:p>
-                      <a:pPr algn="just">
+                      <a:pPr marL="0" marR="0" lvl="0" indent="0" algn="just" defTabSz="914400" rtl="0" eaLnBrk="1" fontAlgn="auto" latinLnBrk="0" hangingPunct="1">
                         <a:lnSpc>
                           <a:spcPct val="100000"/>
                         </a:lnSpc>
+                        <a:spcBef>
+                          <a:spcPts val="0"/>
+                        </a:spcBef>
+                        <a:spcAft>
+                          <a:spcPts val="0"/>
+                        </a:spcAft>
+                        <a:buClrTx/>
+                        <a:buSzTx/>
+                        <a:buFontTx/>
+                        <a:buNone/>
+                        <a:tabLst/>
+                        <a:defRPr/>
                       </a:pPr>
                       <a:r>
                         <a:rPr lang="en-US" altLang="zh-CN" sz="1800" b="1" kern="100" dirty="0">
                           <a:solidFill>
-                            <a:schemeClr val="bg2"/>
+                            <a:schemeClr val="accent2"/>
                           </a:solidFill>
                           <a:effectLst/>
                           <a:latin typeface="+mn-lt"/>
                           <a:ea typeface="+mn-ea"/>
                           <a:cs typeface="+mn-cs"/>
                         </a:rPr>
-                        <a:t>6. </a:t>
+                        <a:t>1. </a:t>
                       </a:r>
                       <a:r>
                         <a:rPr lang="zh-CN" altLang="en-US" sz="1800" b="1" kern="100" dirty="0">
                           <a:solidFill>
-                            <a:schemeClr val="bg2"/>
+                            <a:schemeClr val="accent2"/>
                           </a:solidFill>
                           <a:effectLst/>
                           <a:latin typeface="+mn-lt"/>
                           <a:ea typeface="+mn-ea"/>
                           <a:cs typeface="+mn-cs"/>
                         </a:rPr>
-                        <a:t>条件与循环概念，</a:t>
+                        <a:t>面向对象编程概念；</a:t>
                       </a:r>
                       <a:r>
                         <a:rPr lang="en-US" altLang="zh-CN" sz="1800" b="1" kern="100" dirty="0">
                           <a:solidFill>
-                            <a:schemeClr val="bg2"/>
+                            <a:schemeClr val="accent2"/>
                           </a:solidFill>
                           <a:effectLst/>
                           <a:latin typeface="+mn-lt"/>
                           <a:ea typeface="+mn-ea"/>
                           <a:cs typeface="+mn-cs"/>
                         </a:rPr>
-                        <a:t>7. </a:t>
+                        <a:t>2. </a:t>
                       </a:r>
                       <a:r>
                         <a:rPr lang="zh-CN" altLang="en-US" sz="1800" b="1" kern="100" dirty="0">
                           <a:solidFill>
-                            <a:schemeClr val="bg2"/>
+                            <a:schemeClr val="accent2"/>
                           </a:solidFill>
                           <a:effectLst/>
                           <a:latin typeface="+mn-lt"/>
                           <a:ea typeface="+mn-ea"/>
                           <a:cs typeface="+mn-cs"/>
                         </a:rPr>
-                        <a:t>条件语句，</a:t>
+                        <a:t>类与对象；</a:t>
                       </a:r>
                       <a:r>
                         <a:rPr lang="en-US" altLang="zh-CN" sz="1800" b="1" kern="100" dirty="0">
                           <a:solidFill>
-                            <a:schemeClr val="bg2"/>
+                            <a:schemeClr val="accent2"/>
                           </a:solidFill>
                           <a:effectLst/>
                           <a:latin typeface="+mn-lt"/>
                           <a:ea typeface="+mn-ea"/>
                           <a:cs typeface="+mn-cs"/>
                         </a:rPr>
-                        <a:t>8. </a:t>
+                        <a:t>3. </a:t>
                       </a:r>
                       <a:r>
                         <a:rPr lang="zh-CN" altLang="en-US" sz="1800" b="1" kern="100" dirty="0">
                           <a:solidFill>
-                            <a:schemeClr val="bg2"/>
+                            <a:schemeClr val="accent2"/>
                           </a:solidFill>
                           <a:effectLst/>
                           <a:latin typeface="+mn-lt"/>
                           <a:ea typeface="+mn-ea"/>
                           <a:cs typeface="+mn-cs"/>
                         </a:rPr>
-                        <a:t>循环结构与控制</a:t>
+                        <a:t>类继承</a:t>
                       </a:r>
-                      <a:r>
-                        <a:rPr lang="en-CN" sz="1800" b="1" kern="100" dirty="0">
-                          <a:solidFill>
-                            <a:schemeClr val="bg2"/>
-                          </a:solidFill>
-                          <a:effectLst/>
-                          <a:latin typeface="+mn-lt"/>
-                          <a:ea typeface="+mn-ea"/>
-                          <a:cs typeface="+mn-cs"/>
-                        </a:rPr>
-                        <a:t> </a:t>
-                      </a:r>
+                      <a:endParaRPr lang="en-CN" altLang="zh-CN" sz="1800" b="1" kern="100" dirty="0">
+                        <a:solidFill>
+                          <a:schemeClr val="accent2"/>
+                        </a:solidFill>
+                        <a:effectLst/>
+                        <a:latin typeface="+mn-lt"/>
+                        <a:ea typeface="+mn-ea"/>
+                        <a:cs typeface="+mn-cs"/>
+                      </a:endParaRPr>
                     </a:p>
                   </a:txBody>
                   <a:tcPr marL="61879" marR="61879" marT="0" marB="0" anchor="ctr"/>
@@ -26762,6 +27584,18 @@
                         </a:lnSpc>
                       </a:pPr>
                       <a:r>
+                        <a:rPr lang="en-US" sz="1800" b="1" kern="100" dirty="0">
+                          <a:solidFill>
+                            <a:schemeClr val="bg2"/>
+                          </a:solidFill>
+                          <a:effectLst/>
+                          <a:latin typeface="+mn-lt"/>
+                          <a:ea typeface="+mn-ea"/>
+                          <a:cs typeface="+mn-cs"/>
+                        </a:rPr>
+                        <a:t>1. </a:t>
+                      </a:r>
+                      <a:r>
                         <a:rPr lang="en-US" altLang="zh-CN" sz="1800" b="1" kern="100" dirty="0">
                           <a:solidFill>
                             <a:schemeClr val="bg2"/>
@@ -26771,7 +27605,7 @@
                           <a:ea typeface="+mn-ea"/>
                           <a:cs typeface="+mn-cs"/>
                         </a:rPr>
-                        <a:t>9. </a:t>
+                        <a:t>GEE</a:t>
                       </a:r>
                       <a:r>
                         <a:rPr lang="zh-CN" altLang="en-US" sz="1800" b="1" kern="100" dirty="0">
@@ -26783,7 +27617,7 @@
                           <a:ea typeface="+mn-ea"/>
                           <a:cs typeface="+mn-cs"/>
                         </a:rPr>
-                        <a:t>函数、模块与包概念，</a:t>
+                        <a:t>介绍；</a:t>
                       </a:r>
                       <a:r>
                         <a:rPr lang="en-US" altLang="zh-CN" sz="1800" b="1" kern="100" dirty="0">
@@ -26795,19 +27629,7 @@
                           <a:ea typeface="+mn-ea"/>
                           <a:cs typeface="+mn-cs"/>
                         </a:rPr>
-                        <a:t>10. </a:t>
-                      </a:r>
-                      <a:r>
-                        <a:rPr lang="en-US" sz="1800" b="1" kern="100" dirty="0">
-                          <a:solidFill>
-                            <a:schemeClr val="bg2"/>
-                          </a:solidFill>
-                          <a:effectLst/>
-                          <a:latin typeface="+mn-lt"/>
-                          <a:ea typeface="+mn-ea"/>
-                          <a:cs typeface="+mn-cs"/>
-                        </a:rPr>
-                        <a:t>python</a:t>
+                        <a:t>2. </a:t>
                       </a:r>
                       <a:r>
                         <a:rPr lang="zh-CN" altLang="en-US" sz="1800" b="1" kern="100" dirty="0">
@@ -26819,7 +27641,7 @@
                           <a:ea typeface="+mn-ea"/>
                           <a:cs typeface="+mn-cs"/>
                         </a:rPr>
-                        <a:t>内置函数与标准库，</a:t>
+                        <a:t>遥感影像检索；</a:t>
                       </a:r>
                       <a:r>
                         <a:rPr lang="en-US" altLang="zh-CN" sz="1800" b="1" kern="100" dirty="0">
@@ -26831,7 +27653,7 @@
                           <a:ea typeface="+mn-ea"/>
                           <a:cs typeface="+mn-cs"/>
                         </a:rPr>
-                        <a:t>11. python</a:t>
+                        <a:t>3. </a:t>
                       </a:r>
                       <a:r>
                         <a:rPr lang="zh-CN" altLang="en-US" sz="1800" b="1" kern="100" dirty="0">
@@ -26843,20 +27665,17 @@
                           <a:ea typeface="+mn-ea"/>
                           <a:cs typeface="+mn-cs"/>
                         </a:rPr>
-                        <a:t>第三方库</a:t>
+                        <a:t>遥感影像获取</a:t>
                       </a:r>
-                      <a:r>
-                        <a:rPr lang="en-CN" sz="1800" b="1" kern="100" dirty="0">
-                          <a:solidFill>
-                            <a:schemeClr val="bg2"/>
-                          </a:solidFill>
-                          <a:effectLst/>
-                          <a:latin typeface="+mn-lt"/>
-                          <a:ea typeface="+mn-ea"/>
-                          <a:cs typeface="+mn-cs"/>
-                        </a:rPr>
-                        <a:t> </a:t>
-                      </a:r>
+                      <a:endParaRPr lang="en-CN" sz="1800" b="1" kern="100" dirty="0">
+                        <a:solidFill>
+                          <a:schemeClr val="bg2"/>
+                        </a:solidFill>
+                        <a:effectLst/>
+                        <a:latin typeface="+mn-lt"/>
+                        <a:ea typeface="+mn-ea"/>
+                        <a:cs typeface="+mn-cs"/>
+                      </a:endParaRPr>
                     </a:p>
                   </a:txBody>
                   <a:tcPr marL="61879" marR="61879" marT="0" marB="0" anchor="ctr"/>
@@ -26970,7 +27789,7 @@
                           <a:ea typeface="+mn-ea"/>
                           <a:cs typeface="+mn-cs"/>
                         </a:rPr>
-                        <a:t>12. </a:t>
+                        <a:t>1. </a:t>
                       </a:r>
                       <a:r>
                         <a:rPr lang="zh-CN" altLang="en-US" sz="1800" b="1" kern="100" dirty="0">
@@ -26982,7 +27801,7 @@
                           <a:ea typeface="+mn-ea"/>
                           <a:cs typeface="+mn-cs"/>
                         </a:rPr>
-                        <a:t>文件操作，</a:t>
+                        <a:t>遥感影像数据读写；</a:t>
                       </a:r>
                       <a:r>
                         <a:rPr lang="en-US" altLang="zh-CN" sz="1800" b="1" kern="100" dirty="0">
@@ -26994,7 +27813,7 @@
                           <a:ea typeface="+mn-ea"/>
                           <a:cs typeface="+mn-cs"/>
                         </a:rPr>
-                        <a:t>13. </a:t>
+                        <a:t>2. </a:t>
                       </a:r>
                       <a:r>
                         <a:rPr lang="zh-CN" altLang="en-US" sz="1800" b="1" kern="100" dirty="0">
@@ -27006,7 +27825,7 @@
                           <a:ea typeface="+mn-ea"/>
                           <a:cs typeface="+mn-cs"/>
                         </a:rPr>
-                        <a:t>数据读写，</a:t>
+                        <a:t>遥感影像与矢量数据转换；</a:t>
                       </a:r>
                       <a:r>
                         <a:rPr lang="en-US" altLang="zh-CN" sz="1800" b="1" kern="100" dirty="0">
@@ -27018,7 +27837,7 @@
                           <a:ea typeface="+mn-ea"/>
                           <a:cs typeface="+mn-cs"/>
                         </a:rPr>
-                        <a:t>14. </a:t>
+                        <a:t>3. </a:t>
                       </a:r>
                       <a:r>
                         <a:rPr lang="zh-CN" altLang="en-US" sz="1800" b="1" kern="100" dirty="0">
@@ -27030,20 +27849,17 @@
                           <a:ea typeface="+mn-ea"/>
                           <a:cs typeface="+mn-cs"/>
                         </a:rPr>
-                        <a:t>异常处理</a:t>
+                        <a:t>遥感影像基本处理与信息提取</a:t>
                       </a:r>
-                      <a:r>
-                        <a:rPr lang="en-CN" sz="1800" b="1" kern="100" dirty="0">
-                          <a:solidFill>
-                            <a:schemeClr val="accent2"/>
-                          </a:solidFill>
-                          <a:effectLst/>
-                          <a:latin typeface="+mn-lt"/>
-                          <a:ea typeface="+mn-ea"/>
-                          <a:cs typeface="+mn-cs"/>
-                        </a:rPr>
-                        <a:t> </a:t>
-                      </a:r>
+                      <a:endParaRPr lang="en-US" altLang="zh-CN" sz="1800" b="1" kern="100" dirty="0">
+                        <a:solidFill>
+                          <a:schemeClr val="accent2"/>
+                        </a:solidFill>
+                        <a:effectLst/>
+                        <a:latin typeface="+mn-lt"/>
+                        <a:ea typeface="+mn-ea"/>
+                        <a:cs typeface="+mn-cs"/>
+                      </a:endParaRPr>
                     </a:p>
                   </a:txBody>
                   <a:tcPr marL="61879" marR="61879" marT="0" marB="0" anchor="ctr"/>
@@ -27157,7 +27973,7 @@
                           <a:ea typeface="+mn-ea"/>
                           <a:cs typeface="+mn-cs"/>
                         </a:rPr>
-                        <a:t>15. </a:t>
+                        <a:t>1. </a:t>
                       </a:r>
                       <a:r>
                         <a:rPr lang="zh-CN" altLang="en-US" sz="1800" b="1" kern="100" dirty="0">
@@ -27169,7 +27985,7 @@
                           <a:ea typeface="+mn-ea"/>
                           <a:cs typeface="+mn-cs"/>
                         </a:rPr>
-                        <a:t>面向对象编程概念，</a:t>
+                        <a:t>雷达测高数据介绍；</a:t>
                       </a:r>
                       <a:r>
                         <a:rPr lang="en-US" altLang="zh-CN" sz="1800" b="1" kern="100" dirty="0">
@@ -27181,7 +27997,7 @@
                           <a:ea typeface="+mn-ea"/>
                           <a:cs typeface="+mn-cs"/>
                         </a:rPr>
-                        <a:t>16. </a:t>
+                        <a:t>2. </a:t>
                       </a:r>
                       <a:r>
                         <a:rPr lang="zh-CN" altLang="en-US" sz="1800" b="1" kern="100" dirty="0">
@@ -27193,7 +28009,7 @@
                           <a:ea typeface="+mn-ea"/>
                           <a:cs typeface="+mn-cs"/>
                         </a:rPr>
-                        <a:t>类与对象，</a:t>
+                        <a:t>雷达卫星测高数据获取；</a:t>
                       </a:r>
                       <a:r>
                         <a:rPr lang="en-US" altLang="zh-CN" sz="1800" b="1" kern="100" dirty="0">
@@ -27205,7 +28021,7 @@
                           <a:ea typeface="+mn-ea"/>
                           <a:cs typeface="+mn-cs"/>
                         </a:rPr>
-                        <a:t>17. </a:t>
+                        <a:t>3. </a:t>
                       </a:r>
                       <a:r>
                         <a:rPr lang="zh-CN" altLang="en-US" sz="1800" b="1" kern="100" dirty="0">
@@ -27217,7 +28033,7 @@
                           <a:ea typeface="+mn-ea"/>
                           <a:cs typeface="+mn-cs"/>
                         </a:rPr>
-                        <a:t>类继承</a:t>
+                        <a:t>雷达测高数据基本处理</a:t>
                       </a:r>
                       <a:endParaRPr lang="en-CN" sz="1800" b="1" kern="100" dirty="0">
                         <a:solidFill>
@@ -27341,7 +28157,7 @@
                           <a:ea typeface="+mn-ea"/>
                           <a:cs typeface="+mn-cs"/>
                         </a:rPr>
-                        <a:t>18. </a:t>
+                        <a:t>1.</a:t>
                       </a:r>
                       <a:r>
                         <a:rPr lang="zh-CN" altLang="en-US" sz="1800" b="1" kern="100" dirty="0">
@@ -27353,10 +28169,10 @@
                           <a:ea typeface="+mn-ea"/>
                           <a:cs typeface="+mn-cs"/>
                         </a:rPr>
-                        <a:t>并发、并行、</a:t>
+                        <a:t> 激光测高数据介绍；</a:t>
                       </a:r>
                       <a:r>
-                        <a:rPr lang="en-US" sz="1800" b="1" kern="100" dirty="0">
+                        <a:rPr lang="en-US" altLang="zh-CN" sz="1800" b="1" kern="100" dirty="0">
                           <a:solidFill>
                             <a:schemeClr val="accent2"/>
                           </a:solidFill>
@@ -27365,7 +28181,7 @@
                           <a:ea typeface="+mn-ea"/>
                           <a:cs typeface="+mn-cs"/>
                         </a:rPr>
-                        <a:t>GIL</a:t>
+                        <a:t>2. </a:t>
                       </a:r>
                       <a:r>
                         <a:rPr lang="zh-CN" altLang="en-US" sz="1800" b="1" kern="100" dirty="0">
@@ -27377,55 +28193,7 @@
                           <a:ea typeface="+mn-ea"/>
                           <a:cs typeface="+mn-cs"/>
                         </a:rPr>
-                        <a:t>（全局解释器锁）概念，</a:t>
-                      </a:r>
-                      <a:r>
-                        <a:rPr lang="en-US" altLang="zh-CN" sz="1800" b="1" kern="100" dirty="0">
-                          <a:solidFill>
-                            <a:schemeClr val="accent2"/>
-                          </a:solidFill>
-                          <a:effectLst/>
-                          <a:latin typeface="+mn-lt"/>
-                          <a:ea typeface="+mn-ea"/>
-                          <a:cs typeface="+mn-cs"/>
-                        </a:rPr>
-                        <a:t>19. </a:t>
-                      </a:r>
-                      <a:r>
-                        <a:rPr lang="zh-CN" altLang="en-US" sz="1800" b="1" kern="100" dirty="0">
-                          <a:solidFill>
-                            <a:schemeClr val="accent2"/>
-                          </a:solidFill>
-                          <a:effectLst/>
-                          <a:latin typeface="+mn-lt"/>
-                          <a:ea typeface="+mn-ea"/>
-                          <a:cs typeface="+mn-cs"/>
-                        </a:rPr>
-                        <a:t>多线程编程，</a:t>
-                      </a:r>
-                      <a:r>
-                        <a:rPr lang="en-US" altLang="zh-CN" sz="1800" b="1" kern="100" dirty="0">
-                          <a:solidFill>
-                            <a:schemeClr val="accent2"/>
-                          </a:solidFill>
-                          <a:effectLst/>
-                          <a:latin typeface="+mn-lt"/>
-                          <a:ea typeface="+mn-ea"/>
-                          <a:cs typeface="+mn-cs"/>
-                        </a:rPr>
-                        <a:t>20. </a:t>
-                      </a:r>
-                      <a:r>
-                        <a:rPr lang="zh-CN" altLang="en-US" sz="1800" b="1" kern="100" dirty="0">
-                          <a:solidFill>
-                            <a:schemeClr val="accent2"/>
-                          </a:solidFill>
-                          <a:effectLst/>
-                          <a:latin typeface="+mn-lt"/>
-                          <a:ea typeface="+mn-ea"/>
-                          <a:cs typeface="+mn-cs"/>
-                        </a:rPr>
-                        <a:t>多进程编程</a:t>
+                        <a:t>激光测高数据获取及基本处理</a:t>
                       </a:r>
                       <a:endParaRPr lang="en-CN" sz="1800" b="1" kern="100" dirty="0">
                         <a:solidFill>
@@ -27695,12 +28463,345 @@
           </a:p>
         </p:txBody>
       </p:sp>
+      <p:sp>
+        <p:nvSpPr>
+          <p:cNvPr id="6" name="TextBox 5">
+            <a:extLst>
+              <a:ext uri="{FF2B5EF4-FFF2-40B4-BE49-F238E27FC236}">
+                <a16:creationId xmlns:a16="http://schemas.microsoft.com/office/drawing/2014/main" id="{C327131E-B49C-7E40-81DE-8E289A5DC36B}"/>
+              </a:ext>
+            </a:extLst>
+          </p:cNvPr>
+          <p:cNvSpPr txBox="1"/>
+          <p:nvPr/>
+        </p:nvSpPr>
+        <p:spPr>
+          <a:xfrm>
+            <a:off x="502556" y="918293"/>
+            <a:ext cx="11334749" cy="1323439"/>
+          </a:xfrm>
+          <a:prstGeom prst="rect">
+            <a:avLst/>
+          </a:prstGeom>
+          <a:noFill/>
+        </p:spPr>
+        <p:txBody>
+          <a:bodyPr wrap="square" rtlCol="0">
+            <a:spAutoFit/>
+          </a:bodyPr>
+          <a:lstStyle/>
+          <a:p>
+            <a:pPr algn="just">
+              <a:defRPr/>
+            </a:pPr>
+            <a:r>
+              <a:rPr lang="en-US" altLang="zh-CN" sz="3200" b="1" dirty="0">
+                <a:solidFill>
+                  <a:srgbClr val="333333"/>
+                </a:solidFill>
+                <a:latin typeface="微软雅黑"/>
+                <a:ea typeface="微软雅黑"/>
+              </a:rPr>
+              <a:t>4.</a:t>
+            </a:r>
+            <a:r>
+              <a:rPr lang="zh-CN" altLang="en-US" sz="3200" b="1" dirty="0">
+                <a:solidFill>
+                  <a:srgbClr val="333333"/>
+                </a:solidFill>
+                <a:latin typeface="微软雅黑"/>
+                <a:ea typeface="微软雅黑"/>
+              </a:rPr>
+              <a:t> 教学方式</a:t>
+            </a:r>
+            <a:endParaRPr lang="en-US" altLang="zh-CN" sz="3200" b="1" dirty="0">
+              <a:solidFill>
+                <a:srgbClr val="333333"/>
+              </a:solidFill>
+              <a:latin typeface="微软雅黑"/>
+              <a:ea typeface="微软雅黑"/>
+            </a:endParaRPr>
+          </a:p>
+          <a:p>
+            <a:pPr marL="0" marR="0" lvl="0" indent="0" algn="l" defTabSz="914400" rtl="0" eaLnBrk="1" fontAlgn="base" latinLnBrk="0" hangingPunct="1">
+              <a:spcBef>
+                <a:spcPct val="50000"/>
+              </a:spcBef>
+              <a:spcAft>
+                <a:spcPct val="0"/>
+              </a:spcAft>
+              <a:buClrTx/>
+              <a:buSzTx/>
+              <a:buFontTx/>
+              <a:buNone/>
+              <a:tabLst/>
+              <a:defRPr/>
+            </a:pPr>
+            <a:r>
+              <a:rPr kumimoji="0" lang="zh-CN" altLang="en-US" sz="3200" b="1" i="0" u="none" strike="noStrike" kern="1200" cap="none" spc="0" normalizeH="0" baseline="0" noProof="0" dirty="0">
+                <a:ln>
+                  <a:noFill/>
+                </a:ln>
+                <a:solidFill>
+                  <a:srgbClr val="C00000"/>
+                </a:solidFill>
+                <a:effectLst/>
+                <a:uLnTx/>
+                <a:uFillTx/>
+                <a:latin typeface="微软雅黑"/>
+                <a:ea typeface="微软雅黑"/>
+              </a:rPr>
+              <a:t>理论课</a:t>
+            </a:r>
+            <a:r>
+              <a:rPr kumimoji="0" lang="zh-CN" altLang="en-US" sz="3200" b="0" i="0" u="none" strike="noStrike" kern="1200" cap="none" spc="0" normalizeH="0" baseline="0" noProof="0" dirty="0">
+                <a:ln>
+                  <a:noFill/>
+                </a:ln>
+                <a:solidFill>
+                  <a:srgbClr val="333333"/>
+                </a:solidFill>
+                <a:effectLst/>
+                <a:uLnTx/>
+                <a:uFillTx/>
+                <a:latin typeface="微软雅黑"/>
+                <a:ea typeface="微软雅黑"/>
+              </a:rPr>
+              <a:t>（</a:t>
+            </a:r>
+            <a:r>
+              <a:rPr kumimoji="0" lang="en-US" altLang="zh-CN" sz="3200" b="0" i="0" u="none" strike="noStrike" kern="1200" cap="none" spc="0" normalizeH="0" baseline="0" noProof="0" dirty="0">
+                <a:ln>
+                  <a:noFill/>
+                </a:ln>
+                <a:solidFill>
+                  <a:srgbClr val="333333"/>
+                </a:solidFill>
+                <a:effectLst/>
+                <a:uLnTx/>
+                <a:uFillTx/>
+                <a:latin typeface="微软雅黑"/>
+                <a:ea typeface="微软雅黑"/>
+              </a:rPr>
+              <a:t>36</a:t>
+            </a:r>
+            <a:r>
+              <a:rPr kumimoji="0" lang="zh-CN" altLang="en-US" sz="3200" b="0" i="0" u="none" strike="noStrike" kern="1200" cap="none" spc="0" normalizeH="0" baseline="0" noProof="0" dirty="0">
+                <a:ln>
+                  <a:noFill/>
+                </a:ln>
+                <a:solidFill>
+                  <a:srgbClr val="333333"/>
+                </a:solidFill>
+                <a:effectLst/>
+                <a:uLnTx/>
+                <a:uFillTx/>
+                <a:latin typeface="微软雅黑"/>
+                <a:ea typeface="微软雅黑"/>
+              </a:rPr>
+              <a:t>学时），</a:t>
+            </a:r>
+            <a:r>
+              <a:rPr kumimoji="0" lang="zh-CN" altLang="en-US" sz="3200" b="0" i="0" u="sng" strike="noStrike" kern="1200" cap="none" spc="0" normalizeH="0" baseline="0" noProof="0" dirty="0">
+                <a:ln>
+                  <a:noFill/>
+                </a:ln>
+                <a:solidFill>
+                  <a:srgbClr val="333333"/>
+                </a:solidFill>
+                <a:effectLst/>
+                <a:uLnTx/>
+                <a:uFillTx/>
+                <a:latin typeface="微软雅黑"/>
+                <a:ea typeface="微软雅黑"/>
+              </a:rPr>
+              <a:t>课堂学习需携带电脑</a:t>
+            </a:r>
+            <a:endParaRPr kumimoji="0" lang="en-US" altLang="zh-CN" sz="3200" b="0" i="0" u="sng" strike="noStrike" kern="1200" cap="none" spc="0" normalizeH="0" baseline="0" noProof="0" dirty="0">
+              <a:ln>
+                <a:noFill/>
+              </a:ln>
+              <a:solidFill>
+                <a:srgbClr val="333333"/>
+              </a:solidFill>
+              <a:effectLst/>
+              <a:uLnTx/>
+              <a:uFillTx/>
+              <a:latin typeface="微软雅黑"/>
+              <a:ea typeface="微软雅黑"/>
+            </a:endParaRPr>
+          </a:p>
+        </p:txBody>
+      </p:sp>
+      <p:pic>
+        <p:nvPicPr>
+          <p:cNvPr id="7" name="图片 6">
+            <a:extLst>
+              <a:ext uri="{FF2B5EF4-FFF2-40B4-BE49-F238E27FC236}">
+                <a16:creationId xmlns:a16="http://schemas.microsoft.com/office/drawing/2014/main" id="{EF385B78-0BB0-6502-43EC-3EF078061B89}"/>
+              </a:ext>
+            </a:extLst>
+          </p:cNvPr>
+          <p:cNvPicPr>
+            <a:picLocks noChangeAspect="1"/>
+          </p:cNvPicPr>
+          <p:nvPr/>
+        </p:nvPicPr>
+        <p:blipFill>
+          <a:blip r:embed="rId3"/>
+          <a:stretch>
+            <a:fillRect/>
+          </a:stretch>
+        </p:blipFill>
+        <p:spPr>
+          <a:xfrm>
+            <a:off x="2027860" y="2345517"/>
+            <a:ext cx="7542099" cy="3905424"/>
+          </a:xfrm>
+          <a:prstGeom prst="rect">
+            <a:avLst/>
+          </a:prstGeom>
+        </p:spPr>
+      </p:pic>
+      <p:sp>
+        <p:nvSpPr>
+          <p:cNvPr id="8" name="文本框 7">
+            <a:extLst>
+              <a:ext uri="{FF2B5EF4-FFF2-40B4-BE49-F238E27FC236}">
+                <a16:creationId xmlns:a16="http://schemas.microsoft.com/office/drawing/2014/main" id="{ED095123-832A-2B7E-22BD-07C1E7B40336}"/>
+              </a:ext>
+            </a:extLst>
+          </p:cNvPr>
+          <p:cNvSpPr txBox="1"/>
+          <p:nvPr/>
+        </p:nvSpPr>
+        <p:spPr>
+          <a:xfrm>
+            <a:off x="334736" y="6318441"/>
+            <a:ext cx="11334749" cy="461665"/>
+          </a:xfrm>
+          <a:prstGeom prst="rect">
+            <a:avLst/>
+          </a:prstGeom>
+          <a:noFill/>
+        </p:spPr>
+        <p:txBody>
+          <a:bodyPr wrap="square" rtlCol="0">
+            <a:spAutoFit/>
+          </a:bodyPr>
+          <a:lstStyle/>
+          <a:p>
+            <a:r>
+              <a:rPr lang="zh-CN" altLang="en-US" b="1" dirty="0">
+                <a:solidFill>
+                  <a:schemeClr val="bg2"/>
+                </a:solidFill>
+                <a:latin typeface="+mn-ea"/>
+                <a:ea typeface="+mn-ea"/>
+              </a:rPr>
+              <a:t>课程资料：</a:t>
+            </a:r>
+            <a:r>
+              <a:rPr lang="en-US" altLang="zh-CN" b="1" dirty="0">
+                <a:solidFill>
+                  <a:schemeClr val="bg2"/>
+                </a:solidFill>
+                <a:latin typeface="+mn-ea"/>
+                <a:ea typeface="+mn-ea"/>
+              </a:rPr>
+              <a:t> https://github.com/xinluo2018/rs-data-processing</a:t>
+            </a:r>
+            <a:endParaRPr lang="zh-CN" altLang="en-US" b="1" dirty="0">
+              <a:solidFill>
+                <a:schemeClr val="bg2"/>
+              </a:solidFill>
+              <a:latin typeface="+mn-ea"/>
+              <a:ea typeface="+mn-ea"/>
+            </a:endParaRPr>
+          </a:p>
+        </p:txBody>
+      </p:sp>
+    </p:spTree>
+    <p:extLst>
+      <p:ext uri="{BB962C8B-B14F-4D97-AF65-F5344CB8AC3E}">
+        <p14:creationId xmlns:p14="http://schemas.microsoft.com/office/powerpoint/2010/main" val="1602808061"/>
+      </p:ext>
+    </p:extLst>
+  </p:cSld>
+  <p:clrMapOvr>
+    <a:masterClrMapping/>
+  </p:clrMapOvr>
+  <p:transition>
+    <p:fade/>
+  </p:transition>
+</p:sld>
+</file>
+
+<file path=ppt/slides/slide6.xml><?xml version="1.0" encoding="utf-8"?>
+<p:sld xmlns:a="http://schemas.openxmlformats.org/drawingml/2006/main" xmlns:r="http://schemas.openxmlformats.org/officeDocument/2006/relationships" xmlns:p="http://schemas.openxmlformats.org/presentationml/2006/main">
+  <p:cSld>
+    <p:spTree>
+      <p:nvGrpSpPr>
+        <p:cNvPr id="1" name="">
+          <a:extLst>
+            <a:ext uri="{FF2B5EF4-FFF2-40B4-BE49-F238E27FC236}">
+              <a16:creationId xmlns:a16="http://schemas.microsoft.com/office/drawing/2014/main" id="{66896948-34C1-5972-890C-2D36CFC1AB9C}"/>
+            </a:ext>
+          </a:extLst>
+        </p:cNvPr>
+        <p:cNvGrpSpPr/>
+        <p:nvPr/>
+      </p:nvGrpSpPr>
+      <p:grpSpPr>
+        <a:xfrm>
+          <a:off x="0" y="0"/>
+          <a:ext cx="0" cy="0"/>
+          <a:chOff x="0" y="0"/>
+          <a:chExt cx="0" cy="0"/>
+        </a:xfrm>
+      </p:grpSpPr>
+      <p:sp>
+        <p:nvSpPr>
+          <p:cNvPr id="3" name="标题 2">
+            <a:extLst>
+              <a:ext uri="{FF2B5EF4-FFF2-40B4-BE49-F238E27FC236}">
+                <a16:creationId xmlns:a16="http://schemas.microsoft.com/office/drawing/2014/main" id="{3DC6895B-2205-D643-762B-923CF3C2E1BC}"/>
+              </a:ext>
+            </a:extLst>
+          </p:cNvPr>
+          <p:cNvSpPr>
+            <a:spLocks noGrp="1"/>
+          </p:cNvSpPr>
+          <p:nvPr>
+            <p:ph type="title"/>
+          </p:nvPr>
+        </p:nvSpPr>
+        <p:spPr>
+          <a:xfrm>
+            <a:off x="87087" y="8526"/>
+            <a:ext cx="10450288" cy="792162"/>
+          </a:xfrm>
+        </p:spPr>
+        <p:txBody>
+          <a:bodyPr/>
+          <a:lstStyle/>
+          <a:p>
+            <a:r>
+              <a:rPr lang="zh-CN" altLang="en-US" dirty="0">
+                <a:latin typeface="+mn-ea"/>
+              </a:rPr>
+              <a:t>课程简介及考核</a:t>
+            </a:r>
+            <a:endParaRPr lang="zh-CN" altLang="en-US" dirty="0"/>
+          </a:p>
+        </p:txBody>
+      </p:sp>
       <p:graphicFrame>
         <p:nvGraphicFramePr>
           <p:cNvPr id="4" name="Table 3">
             <a:extLst>
               <a:ext uri="{FF2B5EF4-FFF2-40B4-BE49-F238E27FC236}">
-                <a16:creationId xmlns:a16="http://schemas.microsoft.com/office/drawing/2014/main" id="{CD59FCAC-1DA4-74BE-FCAF-D57ABF2F5B57}"/>
+                <a16:creationId xmlns:a16="http://schemas.microsoft.com/office/drawing/2014/main" id="{24F19010-4504-BBA2-53D4-783264F8FF5D}"/>
               </a:ext>
             </a:extLst>
           </p:cNvPr>
@@ -27710,14 +28811,14 @@
           <p:nvPr>
             <p:extLst>
               <p:ext uri="{D42A27DB-BD31-4B8C-83A1-F6EECF244321}">
-                <p14:modId xmlns:p14="http://schemas.microsoft.com/office/powerpoint/2010/main" val="410685603"/>
+                <p14:modId xmlns:p14="http://schemas.microsoft.com/office/powerpoint/2010/main" val="2597336993"/>
               </p:ext>
             </p:extLst>
           </p:nvPr>
         </p:nvGraphicFramePr>
         <p:xfrm>
-          <a:off x="495301" y="1513833"/>
-          <a:ext cx="11334748" cy="4639106"/>
+          <a:off x="495301" y="1513832"/>
+          <a:ext cx="11334747" cy="5129856"/>
         </p:xfrm>
         <a:graphic>
           <a:graphicData uri="http://schemas.openxmlformats.org/drawingml/2006/table">
@@ -27747,7 +28848,7 @@
                     </a:ext>
                   </a:extLst>
                 </a:gridCol>
-                <a:gridCol w="7099847">
+                <a:gridCol w="7099846">
                   <a:extLst>
                     <a:ext uri="{9D8B030D-6E8A-4147-A177-3AD203B41FA5}">
                       <a16:colId xmlns:a16="http://schemas.microsoft.com/office/drawing/2014/main" val="307882658"/>
@@ -27755,7 +28856,7 @@
                   </a:extLst>
                 </a:gridCol>
               </a:tblGrid>
-              <a:tr h="435863">
+              <a:tr h="534987">
                 <a:tc gridSpan="2">
                   <a:txBody>
                     <a:bodyPr/>
@@ -27988,7 +29089,7 @@
                   </a:ext>
                 </a:extLst>
               </a:tr>
-              <a:tr h="897687">
+              <a:tr h="1141665">
                 <a:tc rowSpan="3">
                   <a:txBody>
                     <a:bodyPr/>
@@ -28303,7 +29404,7 @@
                   </a:ext>
                 </a:extLst>
               </a:tr>
-              <a:tr h="810690">
+              <a:tr h="896449">
                 <a:tc vMerge="1">
                   <a:txBody>
                     <a:bodyPr/>
@@ -28653,7 +29754,7 @@
                   </a:ext>
                 </a:extLst>
               </a:tr>
-              <a:tr h="1374328">
+              <a:tr h="1747851">
                 <a:tc vMerge="1">
                   <a:txBody>
                     <a:bodyPr/>
@@ -28970,7 +30071,7 @@
                   </a:ext>
                 </a:extLst>
               </a:tr>
-              <a:tr h="652303">
+              <a:tr h="808904">
                 <a:tc>
                   <a:txBody>
                     <a:bodyPr/>
@@ -29214,7 +30315,7 @@
           <p:cNvPr id="6" name="TextBox 5">
             <a:extLst>
               <a:ext uri="{FF2B5EF4-FFF2-40B4-BE49-F238E27FC236}">
-                <a16:creationId xmlns:a16="http://schemas.microsoft.com/office/drawing/2014/main" id="{C327131E-B49C-7E40-81DE-8E289A5DC36B}"/>
+                <a16:creationId xmlns:a16="http://schemas.microsoft.com/office/drawing/2014/main" id="{3B21EC2E-2FC7-09C0-BB71-F60E63C18709}"/>
               </a:ext>
             </a:extLst>
           </p:cNvPr>
@@ -29248,7 +30349,7 @@
                 <a:latin typeface="微软雅黑"/>
                 <a:ea typeface="微软雅黑"/>
               </a:rPr>
-              <a:t>4.</a:t>
+              <a:t>5.</a:t>
             </a:r>
             <a:r>
               <a:rPr lang="zh-CN" altLang="en-US" sz="3200" b="1" dirty="0">
@@ -29270,101 +30371,10 @@
           </a:p>
         </p:txBody>
       </p:sp>
-      <p:sp>
-        <p:nvSpPr>
-          <p:cNvPr id="2" name="TextBox 1">
-            <a:extLst>
-              <a:ext uri="{FF2B5EF4-FFF2-40B4-BE49-F238E27FC236}">
-                <a16:creationId xmlns:a16="http://schemas.microsoft.com/office/drawing/2014/main" id="{42628F35-993A-5511-DFF0-EC16AD2DD56F}"/>
-              </a:ext>
-            </a:extLst>
-          </p:cNvPr>
-          <p:cNvSpPr txBox="1"/>
-          <p:nvPr/>
-        </p:nvSpPr>
-        <p:spPr>
-          <a:xfrm>
-            <a:off x="1153363" y="6227109"/>
-            <a:ext cx="9819437" cy="523220"/>
-          </a:xfrm>
-          <a:prstGeom prst="rect">
-            <a:avLst/>
-          </a:prstGeom>
-          <a:noFill/>
-        </p:spPr>
-        <p:txBody>
-          <a:bodyPr wrap="square" rtlCol="0">
-            <a:spAutoFit/>
-          </a:bodyPr>
-          <a:lstStyle/>
-          <a:p>
-            <a:pPr>
-              <a:defRPr/>
-            </a:pPr>
-            <a:r>
-              <a:rPr lang="zh-CN" altLang="en-US" sz="2800" b="1" dirty="0">
-                <a:solidFill>
-                  <a:srgbClr val="C00000"/>
-                </a:solidFill>
-                <a:latin typeface="+mn-ea"/>
-                <a:ea typeface="+mn-ea"/>
-              </a:rPr>
-              <a:t>教学方式：理论课</a:t>
-            </a:r>
-            <a:r>
-              <a:rPr lang="zh-CN" altLang="en-US" sz="2800" dirty="0">
-                <a:solidFill>
-                  <a:srgbClr val="333333"/>
-                </a:solidFill>
-                <a:latin typeface="+mn-ea"/>
-                <a:ea typeface="+mn-ea"/>
-              </a:rPr>
-              <a:t>（</a:t>
-            </a:r>
-            <a:r>
-              <a:rPr lang="en-US" altLang="zh-CN" sz="2800" dirty="0">
-                <a:solidFill>
-                  <a:srgbClr val="333333"/>
-                </a:solidFill>
-                <a:latin typeface="+mn-ea"/>
-                <a:ea typeface="+mn-ea"/>
-              </a:rPr>
-              <a:t>36</a:t>
-            </a:r>
-            <a:r>
-              <a:rPr lang="zh-CN" altLang="en-US" sz="2800" dirty="0">
-                <a:solidFill>
-                  <a:srgbClr val="333333"/>
-                </a:solidFill>
-                <a:latin typeface="+mn-ea"/>
-                <a:ea typeface="+mn-ea"/>
-              </a:rPr>
-              <a:t>学时），</a:t>
-            </a:r>
-            <a:r>
-              <a:rPr lang="zh-CN" altLang="en-US" sz="2800" u="sng" dirty="0">
-                <a:solidFill>
-                  <a:srgbClr val="333333"/>
-                </a:solidFill>
-                <a:latin typeface="+mn-ea"/>
-                <a:ea typeface="+mn-ea"/>
-              </a:rPr>
-              <a:t>课堂学习需携带电脑</a:t>
-            </a:r>
-            <a:endParaRPr lang="en-US" altLang="zh-CN" sz="2800" u="sng" dirty="0">
-              <a:solidFill>
-                <a:srgbClr val="333333"/>
-              </a:solidFill>
-              <a:latin typeface="+mn-ea"/>
-              <a:ea typeface="+mn-ea"/>
-            </a:endParaRPr>
-          </a:p>
-        </p:txBody>
-      </p:sp>
     </p:spTree>
     <p:extLst>
       <p:ext uri="{BB962C8B-B14F-4D97-AF65-F5344CB8AC3E}">
-        <p14:creationId xmlns:p14="http://schemas.microsoft.com/office/powerpoint/2010/main" val="1602808061"/>
+        <p14:creationId xmlns:p14="http://schemas.microsoft.com/office/powerpoint/2010/main" val="1166558127"/>
       </p:ext>
     </p:extLst>
   </p:cSld>
@@ -29377,7 +30387,7 @@
 </p:sld>
 </file>
 
-<file path=ppt/slides/slide6.xml><?xml version="1.0" encoding="utf-8"?>
+<file path=ppt/slides/slide7.xml><?xml version="1.0" encoding="utf-8"?>
 <p:sld xmlns:a="http://schemas.openxmlformats.org/drawingml/2006/main" xmlns:r="http://schemas.openxmlformats.org/officeDocument/2006/relationships" xmlns:p="http://schemas.openxmlformats.org/presentationml/2006/main" showMasterSp="0">
   <p:cSld>
     <p:bg>
@@ -30010,7 +31020,7 @@
 </p:sld>
 </file>
 
-<file path=ppt/slides/slide7.xml><?xml version="1.0" encoding="utf-8"?>
+<file path=ppt/slides/slide8.xml><?xml version="1.0" encoding="utf-8"?>
 <p:sld xmlns:a="http://schemas.openxmlformats.org/drawingml/2006/main" xmlns:r="http://schemas.openxmlformats.org/officeDocument/2006/relationships" xmlns:p="http://schemas.openxmlformats.org/presentationml/2006/main" showMasterSp="0">
   <p:cSld>
     <p:spTree>
@@ -30595,7 +31605,7 @@
 </p:sld>
 </file>
 
-<file path=ppt/slides/slide8.xml><?xml version="1.0" encoding="utf-8"?>
+<file path=ppt/slides/slide9.xml><?xml version="1.0" encoding="utf-8"?>
 <p:sld xmlns:a="http://schemas.openxmlformats.org/drawingml/2006/main" xmlns:r="http://schemas.openxmlformats.org/officeDocument/2006/relationships" xmlns:p="http://schemas.openxmlformats.org/presentationml/2006/main">
   <p:cSld>
     <p:spTree>
@@ -30731,755 +31741,6 @@
     <p:extLst>
       <p:ext uri="{BB962C8B-B14F-4D97-AF65-F5344CB8AC3E}">
         <p14:creationId xmlns:p14="http://schemas.microsoft.com/office/powerpoint/2010/main" val="2415901206"/>
-      </p:ext>
-    </p:extLst>
-  </p:cSld>
-  <p:clrMapOvr>
-    <a:masterClrMapping/>
-  </p:clrMapOvr>
-  <p:transition>
-    <p:fade/>
-  </p:transition>
-</p:sld>
-</file>
-
-<file path=ppt/slides/slide9.xml><?xml version="1.0" encoding="utf-8"?>
-<p:sld xmlns:a="http://schemas.openxmlformats.org/drawingml/2006/main" xmlns:r="http://schemas.openxmlformats.org/officeDocument/2006/relationships" xmlns:p="http://schemas.openxmlformats.org/presentationml/2006/main">
-  <p:cSld>
-    <p:spTree>
-      <p:nvGrpSpPr>
-        <p:cNvPr id="1" name="">
-          <a:extLst>
-            <a:ext uri="{FF2B5EF4-FFF2-40B4-BE49-F238E27FC236}">
-              <a16:creationId xmlns:a16="http://schemas.microsoft.com/office/drawing/2014/main" id="{44FF129A-FF63-24A6-A57D-00161683056E}"/>
-            </a:ext>
-          </a:extLst>
-        </p:cNvPr>
-        <p:cNvGrpSpPr/>
-        <p:nvPr/>
-      </p:nvGrpSpPr>
-      <p:grpSpPr>
-        <a:xfrm>
-          <a:off x="0" y="0"/>
-          <a:ext cx="0" cy="0"/>
-          <a:chOff x="0" y="0"/>
-          <a:chExt cx="0" cy="0"/>
-        </a:xfrm>
-      </p:grpSpPr>
-      <p:pic>
-        <p:nvPicPr>
-          <p:cNvPr id="9" name="图片 8">
-            <a:extLst>
-              <a:ext uri="{FF2B5EF4-FFF2-40B4-BE49-F238E27FC236}">
-                <a16:creationId xmlns:a16="http://schemas.microsoft.com/office/drawing/2014/main" id="{D994883C-DAA1-878F-1EEC-D7703207ECA1}"/>
-              </a:ext>
-            </a:extLst>
-          </p:cNvPr>
-          <p:cNvPicPr>
-            <a:picLocks noChangeAspect="1"/>
-          </p:cNvPicPr>
-          <p:nvPr/>
-        </p:nvPicPr>
-        <p:blipFill>
-          <a:blip r:embed="rId3"/>
-          <a:stretch>
-            <a:fillRect/>
-          </a:stretch>
-        </p:blipFill>
-        <p:spPr>
-          <a:xfrm>
-            <a:off x="6096000" y="1636800"/>
-            <a:ext cx="5861538" cy="3782483"/>
-          </a:xfrm>
-          <a:prstGeom prst="rect">
-            <a:avLst/>
-          </a:prstGeom>
-        </p:spPr>
-      </p:pic>
-      <p:sp>
-        <p:nvSpPr>
-          <p:cNvPr id="3" name="标题 2">
-            <a:extLst>
-              <a:ext uri="{FF2B5EF4-FFF2-40B4-BE49-F238E27FC236}">
-                <a16:creationId xmlns:a16="http://schemas.microsoft.com/office/drawing/2014/main" id="{99B66C00-EDCE-04F7-7400-295D59EC35A0}"/>
-              </a:ext>
-            </a:extLst>
-          </p:cNvPr>
-          <p:cNvSpPr>
-            <a:spLocks noGrp="1"/>
-          </p:cNvSpPr>
-          <p:nvPr>
-            <p:ph type="title"/>
-          </p:nvPr>
-        </p:nvSpPr>
-        <p:spPr>
-          <a:xfrm>
-            <a:off x="1" y="8526"/>
-            <a:ext cx="10537374" cy="792162"/>
-          </a:xfrm>
-        </p:spPr>
-        <p:txBody>
-          <a:bodyPr/>
-          <a:lstStyle/>
-          <a:p>
-            <a:r>
-              <a:rPr lang="zh-CN" altLang="en-US" dirty="0">
-                <a:latin typeface="微软雅黑" pitchFamily="34" charset="-122"/>
-                <a:ea typeface="微软雅黑" pitchFamily="34" charset="-122"/>
-              </a:rPr>
-              <a:t>一、计算机原理与程序设计概述</a:t>
-            </a:r>
-          </a:p>
-        </p:txBody>
-      </p:sp>
-      <p:sp>
-        <p:nvSpPr>
-          <p:cNvPr id="2" name="TextBox 1">
-            <a:extLst>
-              <a:ext uri="{FF2B5EF4-FFF2-40B4-BE49-F238E27FC236}">
-                <a16:creationId xmlns:a16="http://schemas.microsoft.com/office/drawing/2014/main" id="{71639ACD-DB86-70B8-79B8-0619E0D2588B}"/>
-              </a:ext>
-            </a:extLst>
-          </p:cNvPr>
-          <p:cNvSpPr txBox="1"/>
-          <p:nvPr/>
-        </p:nvSpPr>
-        <p:spPr>
-          <a:xfrm>
-            <a:off x="4966636" y="846751"/>
-            <a:ext cx="5383699" cy="743986"/>
-          </a:xfrm>
-          <a:prstGeom prst="rect">
-            <a:avLst/>
-          </a:prstGeom>
-          <a:noFill/>
-        </p:spPr>
-        <p:txBody>
-          <a:bodyPr wrap="square" rtlCol="0">
-            <a:spAutoFit/>
-          </a:bodyPr>
-          <a:lstStyle/>
-          <a:p>
-            <a:pPr algn="just">
-              <a:lnSpc>
-                <a:spcPct val="150000"/>
-              </a:lnSpc>
-            </a:pPr>
-            <a:r>
-              <a:rPr lang="zh-CN" altLang="en-US" sz="3200" b="1" dirty="0">
-                <a:solidFill>
-                  <a:srgbClr val="333333"/>
-                </a:solidFill>
-                <a:latin typeface="+mn-ea"/>
-                <a:ea typeface="+mn-ea"/>
-              </a:rPr>
-              <a:t>计算机核心组成</a:t>
-            </a:r>
-            <a:endParaRPr lang="en-US" altLang="zh-CN" sz="3200" b="1" dirty="0">
-              <a:solidFill>
-                <a:srgbClr val="333333"/>
-              </a:solidFill>
-              <a:latin typeface="+mn-ea"/>
-              <a:ea typeface="+mn-ea"/>
-            </a:endParaRPr>
-          </a:p>
-        </p:txBody>
-      </p:sp>
-      <p:sp>
-        <p:nvSpPr>
-          <p:cNvPr id="6" name="TextBox 5">
-            <a:extLst>
-              <a:ext uri="{FF2B5EF4-FFF2-40B4-BE49-F238E27FC236}">
-                <a16:creationId xmlns:a16="http://schemas.microsoft.com/office/drawing/2014/main" id="{7CFDB476-000D-1357-72EF-2B78C59AC79D}"/>
-              </a:ext>
-            </a:extLst>
-          </p:cNvPr>
-          <p:cNvSpPr txBox="1"/>
-          <p:nvPr/>
-        </p:nvSpPr>
-        <p:spPr>
-          <a:xfrm>
-            <a:off x="234462" y="1021247"/>
-            <a:ext cx="7127344" cy="4401205"/>
-          </a:xfrm>
-          <a:prstGeom prst="rect">
-            <a:avLst/>
-          </a:prstGeom>
-          <a:noFill/>
-        </p:spPr>
-        <p:txBody>
-          <a:bodyPr wrap="square">
-            <a:spAutoFit/>
-          </a:bodyPr>
-          <a:lstStyle/>
-          <a:p>
-            <a:pPr algn="just"/>
-            <a:r>
-              <a:rPr lang="zh-CN" altLang="en-US" sz="2800" b="1" dirty="0">
-                <a:solidFill>
-                  <a:schemeClr val="bg2"/>
-                </a:solidFill>
-                <a:highlight>
-                  <a:srgbClr val="FFFFFF"/>
-                </a:highlight>
-                <a:latin typeface="Microsoft YaHei" panose="020B0503020204020204" pitchFamily="34" charset="-122"/>
-                <a:ea typeface="Microsoft YaHei" panose="020B0503020204020204" pitchFamily="34" charset="-122"/>
-              </a:rPr>
-              <a:t>硬件层</a:t>
-            </a:r>
-            <a:r>
-              <a:rPr lang="zh-CN" altLang="en-US" dirty="0">
-                <a:solidFill>
-                  <a:schemeClr val="bg2"/>
-                </a:solidFill>
-                <a:highlight>
-                  <a:srgbClr val="FFFFFF"/>
-                </a:highlight>
-                <a:latin typeface="Microsoft YaHei" panose="020B0503020204020204" pitchFamily="34" charset="-122"/>
-                <a:ea typeface="Microsoft YaHei" panose="020B0503020204020204" pitchFamily="34" charset="-122"/>
-              </a:rPr>
-              <a:t>：</a:t>
-            </a:r>
-            <a:endParaRPr lang="en-US" altLang="zh-CN" dirty="0">
-              <a:solidFill>
-                <a:schemeClr val="bg2"/>
-              </a:solidFill>
-              <a:highlight>
-                <a:srgbClr val="FFFFFF"/>
-              </a:highlight>
-              <a:latin typeface="Microsoft YaHei" panose="020B0503020204020204" pitchFamily="34" charset="-122"/>
-              <a:ea typeface="Microsoft YaHei" panose="020B0503020204020204" pitchFamily="34" charset="-122"/>
-            </a:endParaRPr>
-          </a:p>
-          <a:p>
-            <a:pPr algn="just"/>
-            <a:r>
-              <a:rPr lang="en-US" altLang="zh-CN" b="1" dirty="0">
-                <a:solidFill>
-                  <a:schemeClr val="accent2"/>
-                </a:solidFill>
-                <a:highlight>
-                  <a:srgbClr val="FFFFFF"/>
-                </a:highlight>
-                <a:latin typeface="Microsoft YaHei" panose="020B0503020204020204" pitchFamily="34" charset="-122"/>
-                <a:ea typeface="Microsoft YaHei" panose="020B0503020204020204" pitchFamily="34" charset="-122"/>
-              </a:rPr>
-              <a:t>CPU</a:t>
-            </a:r>
-            <a:r>
-              <a:rPr lang="zh-CN" altLang="en-US" dirty="0">
-                <a:solidFill>
-                  <a:schemeClr val="bg2"/>
-                </a:solidFill>
-                <a:highlight>
-                  <a:srgbClr val="FFFFFF"/>
-                </a:highlight>
-                <a:latin typeface="Microsoft YaHei" panose="020B0503020204020204" pitchFamily="34" charset="-122"/>
-                <a:ea typeface="Microsoft YaHei" panose="020B0503020204020204" pitchFamily="34" charset="-122"/>
-              </a:rPr>
-              <a:t>：运算器、控制器、寄存器</a:t>
-            </a:r>
-            <a:endParaRPr lang="en-US" altLang="zh-CN" dirty="0">
-              <a:solidFill>
-                <a:schemeClr val="bg2"/>
-              </a:solidFill>
-              <a:highlight>
-                <a:srgbClr val="FFFFFF"/>
-              </a:highlight>
-              <a:latin typeface="Microsoft YaHei" panose="020B0503020204020204" pitchFamily="34" charset="-122"/>
-              <a:ea typeface="Microsoft YaHei" panose="020B0503020204020204" pitchFamily="34" charset="-122"/>
-            </a:endParaRPr>
-          </a:p>
-          <a:p>
-            <a:pPr algn="just"/>
-            <a:r>
-              <a:rPr lang="zh-CN" altLang="en-US" b="1" dirty="0">
-                <a:solidFill>
-                  <a:schemeClr val="accent2"/>
-                </a:solidFill>
-                <a:highlight>
-                  <a:srgbClr val="FFFFFF"/>
-                </a:highlight>
-                <a:latin typeface="Microsoft YaHei" panose="020B0503020204020204" pitchFamily="34" charset="-122"/>
-                <a:ea typeface="Microsoft YaHei" panose="020B0503020204020204" pitchFamily="34" charset="-122"/>
-              </a:rPr>
-              <a:t>内存（</a:t>
-            </a:r>
-            <a:r>
-              <a:rPr lang="en-US" altLang="zh-CN" b="1" dirty="0">
-                <a:solidFill>
-                  <a:schemeClr val="accent2"/>
-                </a:solidFill>
-                <a:highlight>
-                  <a:srgbClr val="FFFFFF"/>
-                </a:highlight>
-                <a:latin typeface="Microsoft YaHei" panose="020B0503020204020204" pitchFamily="34" charset="-122"/>
-                <a:ea typeface="Microsoft YaHei" panose="020B0503020204020204" pitchFamily="34" charset="-122"/>
-              </a:rPr>
-              <a:t>RAM</a:t>
-            </a:r>
-            <a:r>
-              <a:rPr lang="zh-CN" altLang="en-US" b="1" dirty="0">
-                <a:solidFill>
-                  <a:schemeClr val="accent2"/>
-                </a:solidFill>
-                <a:highlight>
-                  <a:srgbClr val="FFFFFF"/>
-                </a:highlight>
-                <a:latin typeface="Microsoft YaHei" panose="020B0503020204020204" pitchFamily="34" charset="-122"/>
-                <a:ea typeface="Microsoft YaHei" panose="020B0503020204020204" pitchFamily="34" charset="-122"/>
-              </a:rPr>
-              <a:t>）</a:t>
-            </a:r>
-            <a:r>
-              <a:rPr lang="zh-CN" altLang="en-US" dirty="0">
-                <a:solidFill>
-                  <a:schemeClr val="bg2"/>
-                </a:solidFill>
-                <a:highlight>
-                  <a:srgbClr val="FFFFFF"/>
-                </a:highlight>
-                <a:latin typeface="Microsoft YaHei" panose="020B0503020204020204" pitchFamily="34" charset="-122"/>
-                <a:ea typeface="Microsoft YaHei" panose="020B0503020204020204" pitchFamily="34" charset="-122"/>
-              </a:rPr>
-              <a:t>：临时存储程序与数据</a:t>
-            </a:r>
-            <a:endParaRPr lang="en-US" altLang="zh-CN" dirty="0">
-              <a:solidFill>
-                <a:schemeClr val="bg2"/>
-              </a:solidFill>
-              <a:highlight>
-                <a:srgbClr val="FFFFFF"/>
-              </a:highlight>
-              <a:latin typeface="Microsoft YaHei" panose="020B0503020204020204" pitchFamily="34" charset="-122"/>
-              <a:ea typeface="Microsoft YaHei" panose="020B0503020204020204" pitchFamily="34" charset="-122"/>
-            </a:endParaRPr>
-          </a:p>
-          <a:p>
-            <a:pPr algn="just"/>
-            <a:r>
-              <a:rPr lang="zh-CN" altLang="en-US" b="1" dirty="0">
-                <a:solidFill>
-                  <a:schemeClr val="accent2"/>
-                </a:solidFill>
-                <a:highlight>
-                  <a:srgbClr val="FFFFFF"/>
-                </a:highlight>
-                <a:latin typeface="Microsoft YaHei" panose="020B0503020204020204" pitchFamily="34" charset="-122"/>
-                <a:ea typeface="Microsoft YaHei" panose="020B0503020204020204" pitchFamily="34" charset="-122"/>
-              </a:rPr>
-              <a:t>硬盘</a:t>
-            </a:r>
-            <a:r>
-              <a:rPr lang="zh-CN" altLang="en-US" dirty="0">
-                <a:solidFill>
-                  <a:schemeClr val="bg2"/>
-                </a:solidFill>
-                <a:highlight>
-                  <a:srgbClr val="FFFFFF"/>
-                </a:highlight>
-                <a:latin typeface="Microsoft YaHei" panose="020B0503020204020204" pitchFamily="34" charset="-122"/>
-                <a:ea typeface="Microsoft YaHei" panose="020B0503020204020204" pitchFamily="34" charset="-122"/>
-              </a:rPr>
-              <a:t>：永久存储数据。</a:t>
-            </a:r>
-            <a:endParaRPr lang="en-US" altLang="zh-CN" dirty="0">
-              <a:solidFill>
-                <a:schemeClr val="bg2"/>
-              </a:solidFill>
-              <a:highlight>
-                <a:srgbClr val="FFFFFF"/>
-              </a:highlight>
-              <a:latin typeface="Microsoft YaHei" panose="020B0503020204020204" pitchFamily="34" charset="-122"/>
-              <a:ea typeface="Microsoft YaHei" panose="020B0503020204020204" pitchFamily="34" charset="-122"/>
-            </a:endParaRPr>
-          </a:p>
-          <a:p>
-            <a:pPr algn="just"/>
-            <a:r>
-              <a:rPr lang="zh-CN" altLang="en-US" b="1" dirty="0">
-                <a:solidFill>
-                  <a:schemeClr val="accent2"/>
-                </a:solidFill>
-                <a:highlight>
-                  <a:srgbClr val="FFFFFF"/>
-                </a:highlight>
-                <a:latin typeface="Microsoft YaHei" panose="020B0503020204020204" pitchFamily="34" charset="-122"/>
-                <a:ea typeface="Microsoft YaHei" panose="020B0503020204020204" pitchFamily="34" charset="-122"/>
-              </a:rPr>
-              <a:t>电源</a:t>
-            </a:r>
-            <a:r>
-              <a:rPr lang="zh-CN" altLang="en-US" dirty="0">
-                <a:solidFill>
-                  <a:schemeClr val="bg2"/>
-                </a:solidFill>
-                <a:highlight>
-                  <a:srgbClr val="FFFFFF"/>
-                </a:highlight>
-                <a:latin typeface="Microsoft YaHei" panose="020B0503020204020204" pitchFamily="34" charset="-122"/>
-                <a:ea typeface="Microsoft YaHei" panose="020B0503020204020204" pitchFamily="34" charset="-122"/>
-              </a:rPr>
-              <a:t>：为主板、</a:t>
-            </a:r>
-            <a:r>
-              <a:rPr lang="en-US" altLang="zh-CN" dirty="0">
-                <a:solidFill>
-                  <a:schemeClr val="bg2"/>
-                </a:solidFill>
-                <a:highlight>
-                  <a:srgbClr val="FFFFFF"/>
-                </a:highlight>
-                <a:latin typeface="Microsoft YaHei" panose="020B0503020204020204" pitchFamily="34" charset="-122"/>
-                <a:ea typeface="Microsoft YaHei" panose="020B0503020204020204" pitchFamily="34" charset="-122"/>
-              </a:rPr>
-              <a:t>CPU</a:t>
-            </a:r>
-            <a:r>
-              <a:rPr lang="zh-CN" altLang="en-US" dirty="0">
-                <a:solidFill>
-                  <a:schemeClr val="bg2"/>
-                </a:solidFill>
-                <a:highlight>
-                  <a:srgbClr val="FFFFFF"/>
-                </a:highlight>
-                <a:latin typeface="Microsoft YaHei" panose="020B0503020204020204" pitchFamily="34" charset="-122"/>
-                <a:ea typeface="Microsoft YaHei" panose="020B0503020204020204" pitchFamily="34" charset="-122"/>
-              </a:rPr>
-              <a:t>、硬盘等供电。</a:t>
-            </a:r>
-            <a:endParaRPr lang="en-US" altLang="zh-CN" dirty="0">
-              <a:solidFill>
-                <a:schemeClr val="bg2"/>
-              </a:solidFill>
-              <a:highlight>
-                <a:srgbClr val="FFFFFF"/>
-              </a:highlight>
-              <a:latin typeface="Microsoft YaHei" panose="020B0503020204020204" pitchFamily="34" charset="-122"/>
-              <a:ea typeface="Microsoft YaHei" panose="020B0503020204020204" pitchFamily="34" charset="-122"/>
-            </a:endParaRPr>
-          </a:p>
-          <a:p>
-            <a:pPr algn="just"/>
-            <a:r>
-              <a:rPr lang="zh-CN" altLang="en-US" b="1" dirty="0">
-                <a:solidFill>
-                  <a:schemeClr val="accent2"/>
-                </a:solidFill>
-                <a:highlight>
-                  <a:srgbClr val="FFFFFF"/>
-                </a:highlight>
-                <a:latin typeface="Microsoft YaHei" panose="020B0503020204020204" pitchFamily="34" charset="-122"/>
-                <a:ea typeface="Microsoft YaHei" panose="020B0503020204020204" pitchFamily="34" charset="-122"/>
-              </a:rPr>
-              <a:t>主板</a:t>
-            </a:r>
-            <a:r>
-              <a:rPr lang="zh-CN" altLang="en-US" dirty="0">
-                <a:solidFill>
-                  <a:schemeClr val="bg2"/>
-                </a:solidFill>
-                <a:highlight>
-                  <a:srgbClr val="FFFFFF"/>
-                </a:highlight>
-                <a:latin typeface="Microsoft YaHei" panose="020B0503020204020204" pitchFamily="34" charset="-122"/>
-                <a:ea typeface="Microsoft YaHei" panose="020B0503020204020204" pitchFamily="34" charset="-122"/>
-              </a:rPr>
-              <a:t>：连接并协调</a:t>
-            </a:r>
-            <a:r>
-              <a:rPr lang="en-US" altLang="zh-CN" dirty="0">
-                <a:solidFill>
-                  <a:schemeClr val="bg2"/>
-                </a:solidFill>
-                <a:highlight>
-                  <a:srgbClr val="FFFFFF"/>
-                </a:highlight>
-                <a:latin typeface="Microsoft YaHei" panose="020B0503020204020204" pitchFamily="34" charset="-122"/>
-                <a:ea typeface="Microsoft YaHei" panose="020B0503020204020204" pitchFamily="34" charset="-122"/>
-              </a:rPr>
-              <a:t>CPU</a:t>
-            </a:r>
-            <a:r>
-              <a:rPr lang="zh-CN" altLang="en-US" dirty="0">
-                <a:solidFill>
-                  <a:schemeClr val="bg2"/>
-                </a:solidFill>
-                <a:highlight>
-                  <a:srgbClr val="FFFFFF"/>
-                </a:highlight>
-                <a:latin typeface="Microsoft YaHei" panose="020B0503020204020204" pitchFamily="34" charset="-122"/>
-                <a:ea typeface="Microsoft YaHei" panose="020B0503020204020204" pitchFamily="34" charset="-122"/>
-              </a:rPr>
-              <a:t>、内存等设备；</a:t>
-            </a:r>
-            <a:endParaRPr lang="en-US" altLang="zh-CN" dirty="0">
-              <a:solidFill>
-                <a:schemeClr val="bg2"/>
-              </a:solidFill>
-              <a:highlight>
-                <a:srgbClr val="FFFFFF"/>
-              </a:highlight>
-              <a:latin typeface="Microsoft YaHei" panose="020B0503020204020204" pitchFamily="34" charset="-122"/>
-              <a:ea typeface="Microsoft YaHei" panose="020B0503020204020204" pitchFamily="34" charset="-122"/>
-            </a:endParaRPr>
-          </a:p>
-          <a:p>
-            <a:pPr algn="just"/>
-            <a:r>
-              <a:rPr lang="zh-CN" altLang="en-US" b="1" dirty="0">
-                <a:solidFill>
-                  <a:schemeClr val="accent2"/>
-                </a:solidFill>
-                <a:highlight>
-                  <a:srgbClr val="FFFFFF"/>
-                </a:highlight>
-                <a:latin typeface="Microsoft YaHei" panose="020B0503020204020204" pitchFamily="34" charset="-122"/>
-                <a:ea typeface="Microsoft YaHei" panose="020B0503020204020204" pitchFamily="34" charset="-122"/>
-              </a:rPr>
-              <a:t>显卡</a:t>
-            </a:r>
-            <a:r>
-              <a:rPr lang="zh-CN" altLang="en-US" dirty="0">
-                <a:solidFill>
-                  <a:schemeClr val="bg2"/>
-                </a:solidFill>
-                <a:highlight>
-                  <a:srgbClr val="FFFFFF"/>
-                </a:highlight>
-                <a:latin typeface="Microsoft YaHei" panose="020B0503020204020204" pitchFamily="34" charset="-122"/>
-                <a:ea typeface="Microsoft YaHei" panose="020B0503020204020204" pitchFamily="34" charset="-122"/>
-              </a:rPr>
-              <a:t>：处理图形图像并输出显示内容；</a:t>
-            </a:r>
-            <a:endParaRPr lang="en-US" altLang="zh-CN" dirty="0">
-              <a:solidFill>
-                <a:schemeClr val="bg2"/>
-              </a:solidFill>
-              <a:highlight>
-                <a:srgbClr val="FFFFFF"/>
-              </a:highlight>
-              <a:latin typeface="Microsoft YaHei" panose="020B0503020204020204" pitchFamily="34" charset="-122"/>
-              <a:ea typeface="Microsoft YaHei" panose="020B0503020204020204" pitchFamily="34" charset="-122"/>
-            </a:endParaRPr>
-          </a:p>
-          <a:p>
-            <a:pPr algn="just"/>
-            <a:r>
-              <a:rPr lang="en-US" altLang="zh-CN" b="1" dirty="0">
-                <a:solidFill>
-                  <a:schemeClr val="accent2"/>
-                </a:solidFill>
-                <a:highlight>
-                  <a:srgbClr val="FFFFFF"/>
-                </a:highlight>
-                <a:latin typeface="Microsoft YaHei" panose="020B0503020204020204" pitchFamily="34" charset="-122"/>
-                <a:ea typeface="Microsoft YaHei" panose="020B0503020204020204" pitchFamily="34" charset="-122"/>
-              </a:rPr>
-              <a:t>I/O</a:t>
-            </a:r>
-            <a:r>
-              <a:rPr lang="zh-CN" altLang="en-US" b="1" dirty="0">
-                <a:solidFill>
-                  <a:schemeClr val="accent2"/>
-                </a:solidFill>
-                <a:highlight>
-                  <a:srgbClr val="FFFFFF"/>
-                </a:highlight>
-                <a:latin typeface="Microsoft YaHei" panose="020B0503020204020204" pitchFamily="34" charset="-122"/>
-                <a:ea typeface="Microsoft YaHei" panose="020B0503020204020204" pitchFamily="34" charset="-122"/>
-              </a:rPr>
-              <a:t>设备 </a:t>
-            </a:r>
-            <a:r>
-              <a:rPr lang="zh-CN" altLang="en-US" dirty="0">
-                <a:solidFill>
-                  <a:schemeClr val="bg2"/>
-                </a:solidFill>
-                <a:highlight>
-                  <a:srgbClr val="FFFFFF"/>
-                </a:highlight>
-                <a:latin typeface="Microsoft YaHei" panose="020B0503020204020204" pitchFamily="34" charset="-122"/>
-                <a:ea typeface="Microsoft YaHei" panose="020B0503020204020204" pitchFamily="34" charset="-122"/>
-              </a:rPr>
-              <a:t>：键盘、鼠标、网络接口、显示器。</a:t>
-            </a:r>
-            <a:endParaRPr lang="en-US" dirty="0">
-              <a:solidFill>
-                <a:schemeClr val="bg2"/>
-              </a:solidFill>
-              <a:highlight>
-                <a:srgbClr val="FFFFFF"/>
-              </a:highlight>
-              <a:latin typeface="Microsoft YaHei" panose="020B0503020204020204" pitchFamily="34" charset="-122"/>
-              <a:ea typeface="Microsoft YaHei" panose="020B0503020204020204" pitchFamily="34" charset="-122"/>
-            </a:endParaRPr>
-          </a:p>
-        </p:txBody>
-      </p:sp>
-      <p:sp>
-        <p:nvSpPr>
-          <p:cNvPr id="5" name="TextBox 4">
-            <a:extLst>
-              <a:ext uri="{FF2B5EF4-FFF2-40B4-BE49-F238E27FC236}">
-                <a16:creationId xmlns:a16="http://schemas.microsoft.com/office/drawing/2014/main" id="{7AC6B5E3-0388-9AA6-FF0C-4997994FECC5}"/>
-              </a:ext>
-            </a:extLst>
-          </p:cNvPr>
-          <p:cNvSpPr txBox="1"/>
-          <p:nvPr/>
-        </p:nvSpPr>
-        <p:spPr>
-          <a:xfrm>
-            <a:off x="234462" y="5578515"/>
-            <a:ext cx="10807928" cy="1077218"/>
-          </a:xfrm>
-          <a:prstGeom prst="rect">
-            <a:avLst/>
-          </a:prstGeom>
-          <a:noFill/>
-        </p:spPr>
-        <p:txBody>
-          <a:bodyPr wrap="square">
-            <a:spAutoFit/>
-          </a:bodyPr>
-          <a:lstStyle/>
-          <a:p>
-            <a:pPr algn="just"/>
-            <a:r>
-              <a:rPr lang="en-US" sz="2800" b="1" dirty="0" err="1">
-                <a:solidFill>
-                  <a:schemeClr val="bg2"/>
-                </a:solidFill>
-                <a:highlight>
-                  <a:srgbClr val="FFFFFF"/>
-                </a:highlight>
-                <a:latin typeface="Microsoft YaHei" panose="020B0503020204020204" pitchFamily="34" charset="-122"/>
-                <a:ea typeface="Microsoft YaHei" panose="020B0503020204020204" pitchFamily="34" charset="-122"/>
-              </a:rPr>
-              <a:t>软件层</a:t>
-            </a:r>
-            <a:r>
-              <a:rPr lang="zh-CN" altLang="en-US" dirty="0">
-                <a:solidFill>
-                  <a:schemeClr val="bg2"/>
-                </a:solidFill>
-                <a:highlight>
-                  <a:srgbClr val="FFFFFF"/>
-                </a:highlight>
-                <a:latin typeface="Microsoft YaHei" panose="020B0503020204020204" pitchFamily="34" charset="-122"/>
-                <a:ea typeface="Microsoft YaHei" panose="020B0503020204020204" pitchFamily="34" charset="-122"/>
-              </a:rPr>
-              <a:t>：</a:t>
-            </a:r>
-            <a:endParaRPr lang="en-US" dirty="0">
-              <a:solidFill>
-                <a:schemeClr val="bg2"/>
-              </a:solidFill>
-              <a:highlight>
-                <a:srgbClr val="FFFFFF"/>
-              </a:highlight>
-              <a:latin typeface="Microsoft YaHei" panose="020B0503020204020204" pitchFamily="34" charset="-122"/>
-              <a:ea typeface="Microsoft YaHei" panose="020B0503020204020204" pitchFamily="34" charset="-122"/>
-            </a:endParaRPr>
-          </a:p>
-          <a:p>
-            <a:pPr algn="just"/>
-            <a:r>
-              <a:rPr lang="en-US" b="1" dirty="0" err="1">
-                <a:solidFill>
-                  <a:schemeClr val="accent2"/>
-                </a:solidFill>
-                <a:highlight>
-                  <a:srgbClr val="FFFFFF"/>
-                </a:highlight>
-                <a:latin typeface="Microsoft YaHei" panose="020B0503020204020204" pitchFamily="34" charset="-122"/>
-                <a:ea typeface="Microsoft YaHei" panose="020B0503020204020204" pitchFamily="34" charset="-122"/>
-              </a:rPr>
-              <a:t>操作系统</a:t>
-            </a:r>
-            <a:r>
-              <a:rPr lang="zh-CN" altLang="en-US" dirty="0">
-                <a:solidFill>
-                  <a:schemeClr val="bg2"/>
-                </a:solidFill>
-                <a:highlight>
-                  <a:srgbClr val="FFFFFF"/>
-                </a:highlight>
-                <a:latin typeface="Microsoft YaHei" panose="020B0503020204020204" pitchFamily="34" charset="-122"/>
-                <a:ea typeface="Microsoft YaHei" panose="020B0503020204020204" pitchFamily="34" charset="-122"/>
-              </a:rPr>
-              <a:t>：资源管理、进程调度。</a:t>
-            </a:r>
-            <a:r>
-              <a:rPr lang="zh-CN" altLang="en-US" b="1" dirty="0">
-                <a:solidFill>
-                  <a:schemeClr val="accent2"/>
-                </a:solidFill>
-                <a:highlight>
-                  <a:srgbClr val="FFFFFF"/>
-                </a:highlight>
-                <a:latin typeface="Microsoft YaHei" panose="020B0503020204020204" pitchFamily="34" charset="-122"/>
-                <a:ea typeface="Microsoft YaHei" panose="020B0503020204020204" pitchFamily="34" charset="-122"/>
-              </a:rPr>
-              <a:t>应用程序</a:t>
-            </a:r>
-            <a:r>
-              <a:rPr lang="zh-CN" altLang="en-US" dirty="0">
-                <a:solidFill>
-                  <a:schemeClr val="bg2"/>
-                </a:solidFill>
-                <a:highlight>
-                  <a:srgbClr val="FFFFFF"/>
-                </a:highlight>
-                <a:latin typeface="Microsoft YaHei" panose="020B0503020204020204" pitchFamily="34" charset="-122"/>
-                <a:ea typeface="Microsoft YaHei" panose="020B0503020204020204" pitchFamily="34" charset="-122"/>
-              </a:rPr>
-              <a:t>：如微信、</a:t>
-            </a:r>
-            <a:r>
-              <a:rPr lang="en-US" altLang="zh-CN" dirty="0">
-                <a:solidFill>
-                  <a:schemeClr val="bg2"/>
-                </a:solidFill>
-                <a:highlight>
-                  <a:srgbClr val="FFFFFF"/>
-                </a:highlight>
-                <a:latin typeface="Microsoft YaHei" panose="020B0503020204020204" pitchFamily="34" charset="-122"/>
-                <a:ea typeface="Microsoft YaHei" panose="020B0503020204020204" pitchFamily="34" charset="-122"/>
-              </a:rPr>
-              <a:t>office</a:t>
-            </a:r>
-            <a:r>
-              <a:rPr lang="zh-CN" altLang="en-US" dirty="0">
-                <a:solidFill>
-                  <a:schemeClr val="bg2"/>
-                </a:solidFill>
-                <a:highlight>
-                  <a:srgbClr val="FFFFFF"/>
-                </a:highlight>
-                <a:latin typeface="Microsoft YaHei" panose="020B0503020204020204" pitchFamily="34" charset="-122"/>
-                <a:ea typeface="Microsoft YaHei" panose="020B0503020204020204" pitchFamily="34" charset="-122"/>
-              </a:rPr>
-              <a:t>办公软件等。</a:t>
-            </a:r>
-            <a:endParaRPr lang="en-US" altLang="zh-CN" dirty="0">
-              <a:solidFill>
-                <a:schemeClr val="bg2"/>
-              </a:solidFill>
-              <a:highlight>
-                <a:srgbClr val="FFFFFF"/>
-              </a:highlight>
-              <a:latin typeface="Microsoft YaHei" panose="020B0503020204020204" pitchFamily="34" charset="-122"/>
-              <a:ea typeface="Microsoft YaHei" panose="020B0503020204020204" pitchFamily="34" charset="-122"/>
-            </a:endParaRPr>
-          </a:p>
-        </p:txBody>
-      </p:sp>
-    </p:spTree>
-    <p:extLst>
-      <p:ext uri="{BB962C8B-B14F-4D97-AF65-F5344CB8AC3E}">
-        <p14:creationId xmlns:p14="http://schemas.microsoft.com/office/powerpoint/2010/main" val="3058806288"/>
       </p:ext>
     </p:extLst>
   </p:cSld>

--- a/第1章-计算机编程与开发环境/第1章-计算机编程与开发环境.pptx
+++ b/第1章-计算机编程与开发环境/第1章-计算机编程与开发环境.pptx
@@ -1269,7 +1269,7 @@
               </a14:hiddenFill>
             </a:ext>
             <a:ext uri="{FAA26D3D-D897-4be2-8F04-BA451C77F1D7}">
-              <ma14:placeholderFlag xmlns="" xmlns:ma14="http://schemas.microsoft.com/office/mac/drawingml/2011/main" val="1"/>
+              <ma14:placeholderFlag xmlns:ma14="http://schemas.microsoft.com/office/mac/drawingml/2011/main" xmlns="" val="1"/>
             </a:ext>
           </a:extLst>
         </p:spPr>
@@ -1657,7 +1657,7 @@
               </a14:hiddenLine>
             </a:ext>
             <a:ext uri="{FAA26D3D-D897-4be2-8F04-BA451C77F1D7}">
-              <ma14:placeholderFlag xmlns:ma14="http://schemas.microsoft.com/office/mac/drawingml/2011/main" xmlns="" val="1"/>
+              <ma14:placeholderFlag xmlns="" xmlns:ma14="http://schemas.microsoft.com/office/mac/drawingml/2011/main" val="1"/>
             </a:ext>
           </a:extLst>
         </p:spPr>
@@ -4084,7 +4084,7 @@
               </a14:hiddenLine>
             </a:ext>
             <a:ext uri="{FAA26D3D-D897-4be2-8F04-BA451C77F1D7}">
-              <ma14:placeholderFlag xmlns="" xmlns:ma14="http://schemas.microsoft.com/office/mac/drawingml/2011/main" val="1"/>
+              <ma14:placeholderFlag xmlns:ma14="http://schemas.microsoft.com/office/mac/drawingml/2011/main" xmlns="" val="1"/>
             </a:ext>
           </a:extLst>
         </p:spPr>
@@ -6112,7 +6112,7 @@
               </a14:hiddenLine>
             </a:ext>
             <a:ext uri="{FAA26D3D-D897-4be2-8F04-BA451C77F1D7}">
-              <ma14:placeholderFlag xmlns="" xmlns:ma14="http://schemas.microsoft.com/office/mac/drawingml/2011/main" val="1"/>
+              <ma14:placeholderFlag xmlns:ma14="http://schemas.microsoft.com/office/mac/drawingml/2011/main" xmlns="" val="1"/>
             </a:ext>
           </a:extLst>
         </p:spPr>
@@ -9808,7 +9808,7 @@
               </a14:hiddenLine>
             </a:ext>
             <a:ext uri="{FAA26D3D-D897-4be2-8F04-BA451C77F1D7}">
-              <ma14:placeholderFlag xmlns="" xmlns:ma14="http://schemas.microsoft.com/office/mac/drawingml/2011/main" val="1"/>
+              <ma14:placeholderFlag xmlns:ma14="http://schemas.microsoft.com/office/mac/drawingml/2011/main" xmlns="" val="1"/>
             </a:ext>
           </a:extLst>
         </p:spPr>
@@ -26392,6 +26392,9 @@
                 <a:solidFill>
                   <a:srgbClr val="333333"/>
                 </a:solidFill>
+                <a:highlight>
+                  <a:srgbClr val="FFFF00"/>
+                </a:highlight>
                 <a:latin typeface="+mn-ea"/>
                 <a:ea typeface="+mn-ea"/>
               </a:rPr>
@@ -26402,6 +26405,9 @@
                 <a:solidFill>
                   <a:srgbClr val="333333"/>
                 </a:solidFill>
+                <a:highlight>
+                  <a:srgbClr val="FFFF00"/>
+                </a:highlight>
                 <a:latin typeface="+mn-ea"/>
                 <a:ea typeface="+mn-ea"/>
               </a:rPr>
@@ -26412,6 +26418,9 @@
                 <a:solidFill>
                   <a:srgbClr val="333333"/>
                 </a:solidFill>
+                <a:highlight>
+                  <a:srgbClr val="FFFF00"/>
+                </a:highlight>
                 <a:latin typeface="+mn-ea"/>
                 <a:ea typeface="+mn-ea"/>
               </a:rPr>
@@ -26422,6 +26431,9 @@
                 <a:solidFill>
                   <a:srgbClr val="333333"/>
                 </a:solidFill>
+                <a:highlight>
+                  <a:srgbClr val="FFFF00"/>
+                </a:highlight>
                 <a:latin typeface="+mn-ea"/>
                 <a:ea typeface="+mn-ea"/>
               </a:rPr>
@@ -26432,6 +26444,9 @@
                 <a:solidFill>
                   <a:srgbClr val="333333"/>
                 </a:solidFill>
+                <a:highlight>
+                  <a:srgbClr val="FFFF00"/>
+                </a:highlight>
                 <a:latin typeface="+mn-ea"/>
                 <a:ea typeface="+mn-ea"/>
               </a:rPr>
@@ -26442,6 +26457,9 @@
                 <a:solidFill>
                   <a:srgbClr val="333333"/>
                 </a:solidFill>
+                <a:highlight>
+                  <a:srgbClr val="FFFF00"/>
+                </a:highlight>
                 <a:latin typeface="+mn-ea"/>
                 <a:ea typeface="+mn-ea"/>
               </a:rPr>
@@ -26452,6 +26470,9 @@
                 <a:solidFill>
                   <a:srgbClr val="333333"/>
                 </a:solidFill>
+                <a:highlight>
+                  <a:srgbClr val="FFFF00"/>
+                </a:highlight>
                 <a:latin typeface="+mn-ea"/>
                 <a:ea typeface="+mn-ea"/>
               </a:rPr>
@@ -26462,6 +26483,9 @@
                 <a:solidFill>
                   <a:srgbClr val="333333"/>
                 </a:solidFill>
+                <a:highlight>
+                  <a:srgbClr val="FFFF00"/>
+                </a:highlight>
                 <a:latin typeface="+mn-ea"/>
                 <a:ea typeface="+mn-ea"/>
               </a:rPr>

--- a/第1章-计算机编程与开发环境/第1章-计算机编程与开发环境.pptx
+++ b/第1章-计算机编程与开发环境/第1章-计算机编程与开发环境.pptx
@@ -50,7 +50,7 @@
     <p:sldId id="2742" r:id="rId38"/>
   </p:sldIdLst>
   <p:sldSz cx="12192000" cy="6858000"/>
-  <p:notesSz cx="7099300" cy="10234613"/>
+  <p:notesSz cx="6888163" cy="10021888"/>
   <p:custDataLst>
     <p:tags r:id="rId41"/>
   </p:custDataLst>
@@ -441,12 +441,12 @@
     </p:ext>
     <p:ext uri="{2D200454-40CA-4A62-9FC3-DE9A4176ACB9}">
       <p15:notesGuideLst xmlns:p15="http://schemas.microsoft.com/office/powerpoint/2012/main">
-        <p15:guide id="1" orient="horz" pos="3224">
+        <p15:guide id="1" orient="horz" pos="3157" userDrawn="1">
           <p15:clr>
             <a:srgbClr val="A4A3A4"/>
           </p15:clr>
         </p15:guide>
-        <p15:guide id="2" pos="2237">
+        <p15:guide id="2" pos="2170" userDrawn="1">
           <p15:clr>
             <a:srgbClr val="A4A3A4"/>
           </p15:clr>
@@ -899,8 +899,8 @@
         </p:nvSpPr>
         <p:spPr bwMode="auto">
           <a:xfrm>
-            <a:off x="0" y="0"/>
-            <a:ext cx="3074988" cy="511175"/>
+            <a:off x="0" y="1"/>
+            <a:ext cx="2983536" cy="500550"/>
           </a:xfrm>
           <a:prstGeom prst="rect">
             <a:avLst/>
@@ -915,13 +915,13 @@
           <a:effectLst/>
         </p:spPr>
         <p:txBody>
-          <a:bodyPr vert="horz" wrap="square" lIns="94566" tIns="47283" rIns="94566" bIns="47283" numCol="1" anchor="t" anchorCtr="0" compatLnSpc="1">
+          <a:bodyPr vert="horz" wrap="square" lIns="92249" tIns="46125" rIns="92249" bIns="46125" numCol="1" anchor="t" anchorCtr="0" compatLnSpc="1">
             <a:prstTxWarp prst="textNoShape">
               <a:avLst/>
             </a:prstTxWarp>
           </a:bodyPr>
           <a:lstStyle>
-            <a:lvl1pPr algn="l" defTabSz="944563">
+            <a:lvl1pPr algn="l" defTabSz="921421">
               <a:defRPr sz="1100">
                 <a:latin typeface="Times New Roman" pitchFamily="18" charset="0"/>
                 <a:ea typeface="宋体" pitchFamily="2" charset="-122"/>
@@ -949,8 +949,8 @@
         </p:nvSpPr>
         <p:spPr bwMode="auto">
           <a:xfrm>
-            <a:off x="4024313" y="0"/>
-            <a:ext cx="3074987" cy="511175"/>
+            <a:off x="3904628" y="1"/>
+            <a:ext cx="2983535" cy="500550"/>
           </a:xfrm>
           <a:prstGeom prst="rect">
             <a:avLst/>
@@ -965,13 +965,13 @@
           <a:effectLst/>
         </p:spPr>
         <p:txBody>
-          <a:bodyPr vert="horz" wrap="square" lIns="94566" tIns="47283" rIns="94566" bIns="47283" numCol="1" anchor="t" anchorCtr="0" compatLnSpc="1">
+          <a:bodyPr vert="horz" wrap="square" lIns="92249" tIns="46125" rIns="92249" bIns="46125" numCol="1" anchor="t" anchorCtr="0" compatLnSpc="1">
             <a:prstTxWarp prst="textNoShape">
               <a:avLst/>
             </a:prstTxWarp>
           </a:bodyPr>
           <a:lstStyle>
-            <a:lvl1pPr algn="r" defTabSz="944563">
+            <a:lvl1pPr algn="r" defTabSz="921421">
               <a:defRPr sz="1100">
                 <a:latin typeface="Times New Roman" pitchFamily="18" charset="0"/>
                 <a:ea typeface="宋体" pitchFamily="2" charset="-122"/>
@@ -999,8 +999,8 @@
         </p:nvSpPr>
         <p:spPr bwMode="auto">
           <a:xfrm>
-            <a:off x="0" y="9723438"/>
-            <a:ext cx="3074988" cy="511175"/>
+            <a:off x="0" y="9521338"/>
+            <a:ext cx="2983536" cy="500550"/>
           </a:xfrm>
           <a:prstGeom prst="rect">
             <a:avLst/>
@@ -1015,13 +1015,13 @@
           <a:effectLst/>
         </p:spPr>
         <p:txBody>
-          <a:bodyPr vert="horz" wrap="square" lIns="94566" tIns="47283" rIns="94566" bIns="47283" numCol="1" anchor="b" anchorCtr="0" compatLnSpc="1">
+          <a:bodyPr vert="horz" wrap="square" lIns="92249" tIns="46125" rIns="92249" bIns="46125" numCol="1" anchor="b" anchorCtr="0" compatLnSpc="1">
             <a:prstTxWarp prst="textNoShape">
               <a:avLst/>
             </a:prstTxWarp>
           </a:bodyPr>
           <a:lstStyle>
-            <a:lvl1pPr algn="l" defTabSz="944563">
+            <a:lvl1pPr algn="l" defTabSz="921421">
               <a:defRPr sz="1100">
                 <a:latin typeface="Times New Roman" pitchFamily="18" charset="0"/>
                 <a:ea typeface="宋体" pitchFamily="2" charset="-122"/>
@@ -1049,8 +1049,8 @@
         </p:nvSpPr>
         <p:spPr bwMode="auto">
           <a:xfrm>
-            <a:off x="4024313" y="9723438"/>
-            <a:ext cx="3074987" cy="511175"/>
+            <a:off x="3904628" y="9521338"/>
+            <a:ext cx="2983535" cy="500550"/>
           </a:xfrm>
           <a:prstGeom prst="rect">
             <a:avLst/>
@@ -1065,13 +1065,13 @@
           <a:effectLst/>
         </p:spPr>
         <p:txBody>
-          <a:bodyPr vert="horz" wrap="square" lIns="94566" tIns="47283" rIns="94566" bIns="47283" numCol="1" anchor="b" anchorCtr="0" compatLnSpc="1">
+          <a:bodyPr vert="horz" wrap="square" lIns="92249" tIns="46125" rIns="92249" bIns="46125" numCol="1" anchor="b" anchorCtr="0" compatLnSpc="1">
             <a:prstTxWarp prst="textNoShape">
               <a:avLst/>
             </a:prstTxWarp>
           </a:bodyPr>
           <a:lstStyle>
-            <a:lvl1pPr algn="r" defTabSz="944563">
+            <a:lvl1pPr algn="r" defTabSz="921421">
               <a:defRPr sz="1100"/>
             </a:lvl1pPr>
           </a:lstStyle>
@@ -1139,8 +1139,8 @@
         </p:nvSpPr>
         <p:spPr bwMode="auto">
           <a:xfrm>
-            <a:off x="0" y="0"/>
-            <a:ext cx="3074988" cy="511175"/>
+            <a:off x="0" y="1"/>
+            <a:ext cx="2983536" cy="500550"/>
           </a:xfrm>
           <a:prstGeom prst="rect">
             <a:avLst/>
@@ -1155,13 +1155,13 @@
           <a:effectLst/>
         </p:spPr>
         <p:txBody>
-          <a:bodyPr vert="horz" wrap="square" lIns="94566" tIns="47283" rIns="94566" bIns="47283" numCol="1" anchor="t" anchorCtr="0" compatLnSpc="1">
+          <a:bodyPr vert="horz" wrap="square" lIns="92249" tIns="46125" rIns="92249" bIns="46125" numCol="1" anchor="t" anchorCtr="0" compatLnSpc="1">
             <a:prstTxWarp prst="textNoShape">
               <a:avLst/>
             </a:prstTxWarp>
           </a:bodyPr>
           <a:lstStyle>
-            <a:lvl1pPr algn="l" defTabSz="944563">
+            <a:lvl1pPr algn="l" defTabSz="921421">
               <a:spcBef>
                 <a:spcPct val="0"/>
               </a:spcBef>
@@ -1192,8 +1192,8 @@
         </p:nvSpPr>
         <p:spPr bwMode="auto">
           <a:xfrm>
-            <a:off x="4022725" y="0"/>
-            <a:ext cx="3074988" cy="511175"/>
+            <a:off x="3903087" y="1"/>
+            <a:ext cx="2983536" cy="500550"/>
           </a:xfrm>
           <a:prstGeom prst="rect">
             <a:avLst/>
@@ -1208,13 +1208,13 @@
           <a:effectLst/>
         </p:spPr>
         <p:txBody>
-          <a:bodyPr vert="horz" wrap="square" lIns="94566" tIns="47283" rIns="94566" bIns="47283" numCol="1" anchor="t" anchorCtr="0" compatLnSpc="1">
+          <a:bodyPr vert="horz" wrap="square" lIns="92249" tIns="46125" rIns="92249" bIns="46125" numCol="1" anchor="t" anchorCtr="0" compatLnSpc="1">
             <a:prstTxWarp prst="textNoShape">
               <a:avLst/>
             </a:prstTxWarp>
           </a:bodyPr>
           <a:lstStyle>
-            <a:lvl1pPr algn="r" defTabSz="944563">
+            <a:lvl1pPr algn="r" defTabSz="921421">
               <a:spcBef>
                 <a:spcPct val="0"/>
               </a:spcBef>
@@ -1245,8 +1245,8 @@
         </p:nvSpPr>
         <p:spPr bwMode="auto">
           <a:xfrm>
-            <a:off x="142875" y="768350"/>
-            <a:ext cx="6818313" cy="3836988"/>
+            <a:off x="106363" y="752475"/>
+            <a:ext cx="6680200" cy="3757613"/>
           </a:xfrm>
           <a:prstGeom prst="rect">
             <a:avLst/>
@@ -1269,7 +1269,7 @@
               </a14:hiddenFill>
             </a:ext>
             <a:ext uri="{FAA26D3D-D897-4be2-8F04-BA451C77F1D7}">
-              <ma14:placeholderFlag xmlns:ma14="http://schemas.microsoft.com/office/mac/drawingml/2011/main" xmlns="" val="1"/>
+              <ma14:placeholderFlag xmlns="" xmlns:ma14="http://schemas.microsoft.com/office/mac/drawingml/2011/main" val="1"/>
             </a:ext>
           </a:extLst>
         </p:spPr>
@@ -1286,8 +1286,8 @@
         </p:nvSpPr>
         <p:spPr bwMode="auto">
           <a:xfrm>
-            <a:off x="709613" y="4860925"/>
-            <a:ext cx="5680075" cy="4605338"/>
+            <a:off x="688509" y="4759891"/>
+            <a:ext cx="5511147" cy="4509617"/>
           </a:xfrm>
           <a:prstGeom prst="rect">
             <a:avLst/>
@@ -1302,7 +1302,7 @@
           <a:effectLst/>
         </p:spPr>
         <p:txBody>
-          <a:bodyPr vert="horz" wrap="square" lIns="94566" tIns="47283" rIns="94566" bIns="47283" numCol="1" anchor="t" anchorCtr="0" compatLnSpc="1">
+          <a:bodyPr vert="horz" wrap="square" lIns="92249" tIns="46125" rIns="92249" bIns="46125" numCol="1" anchor="t" anchorCtr="0" compatLnSpc="1">
             <a:prstTxWarp prst="textNoShape">
               <a:avLst/>
             </a:prstTxWarp>
@@ -1357,8 +1357,8 @@
         </p:nvSpPr>
         <p:spPr bwMode="auto">
           <a:xfrm>
-            <a:off x="0" y="9721850"/>
-            <a:ext cx="3074988" cy="511175"/>
+            <a:off x="0" y="9519783"/>
+            <a:ext cx="2983536" cy="500550"/>
           </a:xfrm>
           <a:prstGeom prst="rect">
             <a:avLst/>
@@ -1373,13 +1373,13 @@
           <a:effectLst/>
         </p:spPr>
         <p:txBody>
-          <a:bodyPr vert="horz" wrap="square" lIns="94566" tIns="47283" rIns="94566" bIns="47283" numCol="1" anchor="b" anchorCtr="0" compatLnSpc="1">
+          <a:bodyPr vert="horz" wrap="square" lIns="92249" tIns="46125" rIns="92249" bIns="46125" numCol="1" anchor="b" anchorCtr="0" compatLnSpc="1">
             <a:prstTxWarp prst="textNoShape">
               <a:avLst/>
             </a:prstTxWarp>
           </a:bodyPr>
           <a:lstStyle>
-            <a:lvl1pPr algn="l" defTabSz="944563">
+            <a:lvl1pPr algn="l" defTabSz="921421">
               <a:spcBef>
                 <a:spcPct val="0"/>
               </a:spcBef>
@@ -1410,8 +1410,8 @@
         </p:nvSpPr>
         <p:spPr bwMode="auto">
           <a:xfrm>
-            <a:off x="4022725" y="9721850"/>
-            <a:ext cx="3074988" cy="511175"/>
+            <a:off x="3903087" y="9519783"/>
+            <a:ext cx="2983536" cy="500550"/>
           </a:xfrm>
           <a:prstGeom prst="rect">
             <a:avLst/>
@@ -1426,13 +1426,13 @@
           <a:effectLst/>
         </p:spPr>
         <p:txBody>
-          <a:bodyPr vert="horz" wrap="square" lIns="94566" tIns="47283" rIns="94566" bIns="47283" numCol="1" anchor="b" anchorCtr="0" compatLnSpc="1">
+          <a:bodyPr vert="horz" wrap="square" lIns="92249" tIns="46125" rIns="92249" bIns="46125" numCol="1" anchor="b" anchorCtr="0" compatLnSpc="1">
             <a:prstTxWarp prst="textNoShape">
               <a:avLst/>
             </a:prstTxWarp>
           </a:bodyPr>
           <a:lstStyle>
-            <a:lvl1pPr algn="r" defTabSz="944563">
+            <a:lvl1pPr algn="r" defTabSz="921421">
               <a:spcBef>
                 <a:spcPct val="0"/>
               </a:spcBef>
@@ -1619,8 +1619,8 @@
         </p:nvSpPr>
         <p:spPr>
           <a:xfrm>
-            <a:off x="142875" y="768350"/>
-            <a:ext cx="6818313" cy="3836988"/>
+            <a:off x="106363" y="752475"/>
+            <a:ext cx="6680200" cy="3757613"/>
           </a:xfrm>
           <a:ln/>
         </p:spPr>
@@ -1657,7 +1657,7 @@
               </a14:hiddenLine>
             </a:ext>
             <a:ext uri="{FAA26D3D-D897-4be2-8F04-BA451C77F1D7}">
-              <ma14:placeholderFlag xmlns="" xmlns:ma14="http://schemas.microsoft.com/office/mac/drawingml/2011/main" val="1"/>
+              <ma14:placeholderFlag xmlns:ma14="http://schemas.microsoft.com/office/mac/drawingml/2011/main" xmlns="" val="1"/>
             </a:ext>
           </a:extLst>
         </p:spPr>
@@ -1665,32 +1665,10 @@
           <a:bodyPr/>
           <a:lstStyle/>
           <a:p>
-            <a:pPr marL="0" marR="0" indent="0" algn="l" defTabSz="914400" rtl="0" eaLnBrk="0" fontAlgn="base" latinLnBrk="0" hangingPunct="0">
-              <a:lnSpc>
-                <a:spcPct val="100000"/>
-              </a:lnSpc>
-              <a:spcBef>
-                <a:spcPct val="30000"/>
-              </a:spcBef>
-              <a:spcAft>
-                <a:spcPct val="0"/>
-              </a:spcAft>
-              <a:buClrTx/>
-              <a:buSzTx/>
-              <a:buFontTx/>
-              <a:buNone/>
-              <a:tabLst/>
+            <a:pPr defTabSz="891997">
               <a:defRPr/>
             </a:pPr>
-            <a:endParaRPr kumimoji="1" lang="zh-CN" altLang="zh-CN" sz="1200" kern="1200">
-              <a:solidFill>
-                <a:schemeClr val="tx1"/>
-              </a:solidFill>
-              <a:effectLst/>
-              <a:latin typeface="Arial" charset="0"/>
-              <a:ea typeface="宋体" pitchFamily="2" charset="-122"/>
-              <a:cs typeface="宋体" charset="0"/>
-            </a:endParaRPr>
+            <a:endParaRPr lang="zh-CN" altLang="zh-CN"/>
           </a:p>
         </p:txBody>
       </p:sp>
@@ -1748,8 +1726,8 @@
         </p:nvSpPr>
         <p:spPr>
           <a:xfrm>
-            <a:off x="142875" y="768350"/>
-            <a:ext cx="6818313" cy="3836988"/>
+            <a:off x="106363" y="752475"/>
+            <a:ext cx="6680200" cy="3757613"/>
           </a:xfrm>
         </p:spPr>
       </p:sp>
@@ -1870,8 +1848,8 @@
         </p:nvSpPr>
         <p:spPr>
           <a:xfrm>
-            <a:off x="142875" y="768350"/>
-            <a:ext cx="6818313" cy="3836988"/>
+            <a:off x="106363" y="752475"/>
+            <a:ext cx="6680200" cy="3757613"/>
           </a:xfrm>
         </p:spPr>
       </p:sp>
@@ -1954,8 +1932,8 @@
         </p:nvSpPr>
         <p:spPr>
           <a:xfrm>
-            <a:off x="142875" y="768350"/>
-            <a:ext cx="6818313" cy="3836988"/>
+            <a:off x="106363" y="752475"/>
+            <a:ext cx="6680200" cy="3757613"/>
           </a:xfrm>
         </p:spPr>
       </p:sp>
@@ -2045,8 +2023,8 @@
         </p:nvSpPr>
         <p:spPr>
           <a:xfrm>
-            <a:off x="142875" y="768350"/>
-            <a:ext cx="6818313" cy="3836988"/>
+            <a:off x="106363" y="752475"/>
+            <a:ext cx="6680200" cy="3757613"/>
           </a:xfrm>
         </p:spPr>
       </p:sp>
@@ -2136,8 +2114,8 @@
         </p:nvSpPr>
         <p:spPr>
           <a:xfrm>
-            <a:off x="142875" y="768350"/>
-            <a:ext cx="6818313" cy="3836988"/>
+            <a:off x="106363" y="752475"/>
+            <a:ext cx="6680200" cy="3757613"/>
           </a:xfrm>
         </p:spPr>
       </p:sp>
@@ -2208,8 +2186,8 @@
         </p:nvSpPr>
         <p:spPr>
           <a:xfrm>
-            <a:off x="142875" y="768350"/>
-            <a:ext cx="6818313" cy="3836988"/>
+            <a:off x="106363" y="752475"/>
+            <a:ext cx="6680200" cy="3757613"/>
           </a:xfrm>
         </p:spPr>
       </p:sp>
@@ -2274,8 +2252,8 @@
         </p:nvSpPr>
         <p:spPr>
           <a:xfrm>
-            <a:off x="142875" y="768350"/>
-            <a:ext cx="6818313" cy="3836988"/>
+            <a:off x="106363" y="752475"/>
+            <a:ext cx="6680200" cy="3757613"/>
           </a:xfrm>
         </p:spPr>
       </p:sp>
@@ -2294,7 +2272,7 @@
           <a:bodyPr/>
           <a:lstStyle/>
           <a:p>
-            <a:pPr marL="228600" indent="-228600">
+            <a:pPr marL="222999" indent="-222999">
               <a:buAutoNum type="arabicPeriod"/>
             </a:pPr>
             <a:r>
@@ -2320,7 +2298,7 @@
             <a:endParaRPr lang="en-US" altLang="zh-CN" dirty="0"/>
           </a:p>
           <a:p>
-            <a:pPr marL="228600" indent="-228600">
+            <a:pPr marL="222999" indent="-222999">
               <a:buAutoNum type="arabicPeriod"/>
             </a:pPr>
             <a:r>
@@ -2330,7 +2308,7 @@
             <a:endParaRPr lang="en-US" altLang="zh-CN" dirty="0"/>
           </a:p>
           <a:p>
-            <a:pPr marL="228600" indent="-228600">
+            <a:pPr marL="222999" indent="-222999">
               <a:buAutoNum type="arabicPeriod"/>
             </a:pPr>
             <a:r>
@@ -2348,7 +2326,7 @@
             <a:endParaRPr lang="en-US" altLang="zh-CN" dirty="0"/>
           </a:p>
           <a:p>
-            <a:pPr marL="228600" indent="-228600">
+            <a:pPr marL="222999" indent="-222999">
               <a:buAutoNum type="arabicPeriod"/>
             </a:pPr>
             <a:r>
@@ -2401,8 +2379,8 @@
         </p:nvSpPr>
         <p:spPr>
           <a:xfrm>
-            <a:off x="142875" y="768350"/>
-            <a:ext cx="6818313" cy="3836988"/>
+            <a:off x="106363" y="752475"/>
+            <a:ext cx="6680200" cy="3757613"/>
           </a:xfrm>
         </p:spPr>
       </p:sp>
@@ -2421,7 +2399,7 @@
           <a:bodyPr/>
           <a:lstStyle/>
           <a:p>
-            <a:pPr marL="228600" indent="-228600">
+            <a:pPr marL="222999" indent="-222999">
               <a:buAutoNum type="arabicPeriod"/>
             </a:pPr>
             <a:endParaRPr lang="zh-CN" altLang="en-US" dirty="0"/>
@@ -2470,8 +2448,8 @@
         </p:nvSpPr>
         <p:spPr>
           <a:xfrm>
-            <a:off x="142875" y="768350"/>
-            <a:ext cx="6818313" cy="3836988"/>
+            <a:off x="106363" y="752475"/>
+            <a:ext cx="6680200" cy="3757613"/>
           </a:xfrm>
         </p:spPr>
       </p:sp>
@@ -2490,7 +2468,7 @@
           <a:bodyPr/>
           <a:lstStyle/>
           <a:p>
-            <a:pPr marL="228600" indent="-228600">
+            <a:pPr marL="222999" indent="-222999">
               <a:buAutoNum type="arabicPeriod"/>
             </a:pPr>
             <a:endParaRPr lang="zh-CN" altLang="en-US" dirty="0"/>
@@ -2539,8 +2517,8 @@
         </p:nvSpPr>
         <p:spPr>
           <a:xfrm>
-            <a:off x="142875" y="768350"/>
-            <a:ext cx="6818313" cy="3836988"/>
+            <a:off x="106363" y="752475"/>
+            <a:ext cx="6680200" cy="3757613"/>
           </a:xfrm>
         </p:spPr>
       </p:sp>
@@ -2605,8 +2583,8 @@
         </p:nvSpPr>
         <p:spPr>
           <a:xfrm>
-            <a:off x="142875" y="768350"/>
-            <a:ext cx="6818313" cy="3836988"/>
+            <a:off x="106363" y="752475"/>
+            <a:ext cx="6680200" cy="3757613"/>
           </a:xfrm>
         </p:spPr>
       </p:sp>
@@ -2671,8 +2649,8 @@
         </p:nvSpPr>
         <p:spPr>
           <a:xfrm>
-            <a:off x="142875" y="768350"/>
-            <a:ext cx="6818313" cy="3836988"/>
+            <a:off x="106363" y="752475"/>
+            <a:ext cx="6680200" cy="3757613"/>
           </a:xfrm>
         </p:spPr>
       </p:sp>
@@ -2737,8 +2715,8 @@
         </p:nvSpPr>
         <p:spPr>
           <a:xfrm>
-            <a:off x="142875" y="768350"/>
-            <a:ext cx="6818313" cy="3836988"/>
+            <a:off x="106363" y="752475"/>
+            <a:ext cx="6680200" cy="3757613"/>
           </a:xfrm>
         </p:spPr>
       </p:sp>
@@ -2803,8 +2781,8 @@
         </p:nvSpPr>
         <p:spPr>
           <a:xfrm>
-            <a:off x="142875" y="768350"/>
-            <a:ext cx="6818313" cy="3836988"/>
+            <a:off x="106363" y="752475"/>
+            <a:ext cx="6680200" cy="3757613"/>
           </a:xfrm>
         </p:spPr>
       </p:sp>
@@ -2869,8 +2847,8 @@
         </p:nvSpPr>
         <p:spPr>
           <a:xfrm>
-            <a:off x="142875" y="768350"/>
-            <a:ext cx="6818313" cy="3836988"/>
+            <a:off x="106363" y="752475"/>
+            <a:ext cx="6680200" cy="3757613"/>
           </a:xfrm>
         </p:spPr>
       </p:sp>
@@ -2935,8 +2913,8 @@
         </p:nvSpPr>
         <p:spPr>
           <a:xfrm>
-            <a:off x="142875" y="768350"/>
-            <a:ext cx="6818313" cy="3836988"/>
+            <a:off x="106363" y="752475"/>
+            <a:ext cx="6680200" cy="3757613"/>
           </a:xfrm>
         </p:spPr>
       </p:sp>
@@ -3001,8 +2979,8 @@
         </p:nvSpPr>
         <p:spPr>
           <a:xfrm>
-            <a:off x="142875" y="768350"/>
-            <a:ext cx="6818313" cy="3836988"/>
+            <a:off x="106363" y="752475"/>
+            <a:ext cx="6680200" cy="3757613"/>
           </a:xfrm>
         </p:spPr>
       </p:sp>
@@ -3067,8 +3045,8 @@
         </p:nvSpPr>
         <p:spPr>
           <a:xfrm>
-            <a:off x="142875" y="768350"/>
-            <a:ext cx="6818313" cy="3836988"/>
+            <a:off x="106363" y="752475"/>
+            <a:ext cx="6680200" cy="3757613"/>
           </a:xfrm>
         </p:spPr>
       </p:sp>
@@ -3133,8 +3111,8 @@
         </p:nvSpPr>
         <p:spPr>
           <a:xfrm>
-            <a:off x="142875" y="768350"/>
-            <a:ext cx="6818313" cy="3836988"/>
+            <a:off x="106363" y="752475"/>
+            <a:ext cx="6680200" cy="3757613"/>
           </a:xfrm>
         </p:spPr>
       </p:sp>
@@ -3199,8 +3177,8 @@
         </p:nvSpPr>
         <p:spPr>
           <a:xfrm>
-            <a:off x="142875" y="768350"/>
-            <a:ext cx="6818313" cy="3836988"/>
+            <a:off x="106363" y="752475"/>
+            <a:ext cx="6680200" cy="3757613"/>
           </a:xfrm>
         </p:spPr>
       </p:sp>
@@ -3265,8 +3243,8 @@
         </p:nvSpPr>
         <p:spPr>
           <a:xfrm>
-            <a:off x="142875" y="768350"/>
-            <a:ext cx="6818313" cy="3836988"/>
+            <a:off x="106363" y="752475"/>
+            <a:ext cx="6680200" cy="3757613"/>
           </a:xfrm>
         </p:spPr>
       </p:sp>
@@ -3331,8 +3309,8 @@
         </p:nvSpPr>
         <p:spPr>
           <a:xfrm>
-            <a:off x="142875" y="768350"/>
-            <a:ext cx="6818313" cy="3836988"/>
+            <a:off x="106363" y="752475"/>
+            <a:ext cx="6680200" cy="3757613"/>
           </a:xfrm>
         </p:spPr>
       </p:sp>
@@ -3409,8 +3387,8 @@
         </p:nvSpPr>
         <p:spPr>
           <a:xfrm>
-            <a:off x="142875" y="768350"/>
-            <a:ext cx="6818313" cy="3836988"/>
+            <a:off x="106363" y="752475"/>
+            <a:ext cx="6680200" cy="3757613"/>
           </a:xfrm>
         </p:spPr>
       </p:sp>
@@ -3481,8 +3459,8 @@
         </p:nvSpPr>
         <p:spPr>
           <a:xfrm>
-            <a:off x="142875" y="768350"/>
-            <a:ext cx="6818313" cy="3836988"/>
+            <a:off x="106363" y="752475"/>
+            <a:ext cx="6680200" cy="3757613"/>
           </a:xfrm>
         </p:spPr>
       </p:sp>
@@ -3547,8 +3525,8 @@
         </p:nvSpPr>
         <p:spPr>
           <a:xfrm>
-            <a:off x="142875" y="768350"/>
-            <a:ext cx="6818313" cy="3836988"/>
+            <a:off x="106363" y="752475"/>
+            <a:ext cx="6680200" cy="3757613"/>
           </a:xfrm>
         </p:spPr>
       </p:sp>
@@ -3613,8 +3591,8 @@
         </p:nvSpPr>
         <p:spPr>
           <a:xfrm>
-            <a:off x="142875" y="768350"/>
-            <a:ext cx="6818313" cy="3836988"/>
+            <a:off x="106363" y="752475"/>
+            <a:ext cx="6680200" cy="3757613"/>
           </a:xfrm>
         </p:spPr>
       </p:sp>
@@ -3740,8 +3718,8 @@
         </p:nvSpPr>
         <p:spPr>
           <a:xfrm>
-            <a:off x="142875" y="768350"/>
-            <a:ext cx="6818313" cy="3836988"/>
+            <a:off x="106363" y="752475"/>
+            <a:ext cx="6680200" cy="3757613"/>
           </a:xfrm>
         </p:spPr>
       </p:sp>
@@ -3818,8 +3796,8 @@
         </p:nvSpPr>
         <p:spPr>
           <a:xfrm>
-            <a:off x="142875" y="768350"/>
-            <a:ext cx="6818313" cy="3836988"/>
+            <a:off x="106363" y="752475"/>
+            <a:ext cx="6680200" cy="3757613"/>
           </a:xfrm>
         </p:spPr>
       </p:sp>
@@ -3890,8 +3868,8 @@
         </p:nvSpPr>
         <p:spPr>
           <a:xfrm>
-            <a:off x="142875" y="768350"/>
-            <a:ext cx="6818313" cy="3836988"/>
+            <a:off x="106363" y="752475"/>
+            <a:ext cx="6680200" cy="3757613"/>
           </a:xfrm>
         </p:spPr>
       </p:sp>
@@ -3971,8 +3949,8 @@
         </p:nvSpPr>
         <p:spPr>
           <a:xfrm>
-            <a:off x="142875" y="768350"/>
-            <a:ext cx="6818313" cy="3836988"/>
+            <a:off x="106363" y="752475"/>
+            <a:ext cx="6680200" cy="3757613"/>
           </a:xfrm>
         </p:spPr>
       </p:sp>
@@ -4046,8 +4024,8 @@
         </p:nvSpPr>
         <p:spPr>
           <a:xfrm>
-            <a:off x="142875" y="768350"/>
-            <a:ext cx="6818313" cy="3836988"/>
+            <a:off x="106363" y="752475"/>
+            <a:ext cx="6680200" cy="3757613"/>
           </a:xfrm>
           <a:ln/>
         </p:spPr>
@@ -4084,7 +4062,7 @@
               </a14:hiddenLine>
             </a:ext>
             <a:ext uri="{FAA26D3D-D897-4be2-8F04-BA451C77F1D7}">
-              <ma14:placeholderFlag xmlns:ma14="http://schemas.microsoft.com/office/mac/drawingml/2011/main" xmlns="" val="1"/>
+              <ma14:placeholderFlag xmlns="" xmlns:ma14="http://schemas.microsoft.com/office/mac/drawingml/2011/main" val="1"/>
             </a:ext>
           </a:extLst>
         </p:spPr>
@@ -4092,32 +4070,10 @@
           <a:bodyPr/>
           <a:lstStyle/>
           <a:p>
-            <a:pPr marL="0" marR="0" indent="0" algn="l" defTabSz="914400" rtl="0" eaLnBrk="0" fontAlgn="base" latinLnBrk="0" hangingPunct="0">
-              <a:lnSpc>
-                <a:spcPct val="100000"/>
-              </a:lnSpc>
-              <a:spcBef>
-                <a:spcPct val="30000"/>
-              </a:spcBef>
-              <a:spcAft>
-                <a:spcPct val="0"/>
-              </a:spcAft>
-              <a:buClrTx/>
-              <a:buSzTx/>
-              <a:buFontTx/>
-              <a:buNone/>
-              <a:tabLst/>
+            <a:pPr defTabSz="891997">
               <a:defRPr/>
             </a:pPr>
-            <a:endParaRPr kumimoji="1" lang="zh-CN" altLang="zh-CN" sz="1200" kern="1200">
-              <a:solidFill>
-                <a:schemeClr val="tx1"/>
-              </a:solidFill>
-              <a:effectLst/>
-              <a:latin typeface="Arial" charset="0"/>
-              <a:ea typeface="宋体" pitchFamily="2" charset="-122"/>
-              <a:cs typeface="宋体" charset="0"/>
-            </a:endParaRPr>
+            <a:endParaRPr lang="zh-CN" altLang="zh-CN"/>
           </a:p>
         </p:txBody>
       </p:sp>
@@ -4163,8 +4119,8 @@
         </p:nvSpPr>
         <p:spPr>
           <a:xfrm>
-            <a:off x="142875" y="768350"/>
-            <a:ext cx="6818313" cy="3836988"/>
+            <a:off x="106363" y="752475"/>
+            <a:ext cx="6680200" cy="3757613"/>
           </a:xfrm>
         </p:spPr>
       </p:sp>
@@ -4261,8 +4217,8 @@
         </p:nvSpPr>
         <p:spPr>
           <a:xfrm>
-            <a:off x="142875" y="768350"/>
-            <a:ext cx="6818313" cy="3836988"/>
+            <a:off x="106363" y="752475"/>
+            <a:ext cx="6680200" cy="3757613"/>
           </a:xfrm>
         </p:spPr>
       </p:sp>
@@ -6112,7 +6068,7 @@
               </a14:hiddenLine>
             </a:ext>
             <a:ext uri="{FAA26D3D-D897-4be2-8F04-BA451C77F1D7}">
-              <ma14:placeholderFlag xmlns:ma14="http://schemas.microsoft.com/office/mac/drawingml/2011/main" xmlns="" val="1"/>
+              <ma14:placeholderFlag xmlns="" xmlns:ma14="http://schemas.microsoft.com/office/mac/drawingml/2011/main" val="1"/>
             </a:ext>
           </a:extLst>
         </p:spPr>
@@ -9808,7 +9764,7 @@
               </a14:hiddenLine>
             </a:ext>
             <a:ext uri="{FAA26D3D-D897-4be2-8F04-BA451C77F1D7}">
-              <ma14:placeholderFlag xmlns:ma14="http://schemas.microsoft.com/office/mac/drawingml/2011/main" xmlns="" val="1"/>
+              <ma14:placeholderFlag xmlns="" xmlns:ma14="http://schemas.microsoft.com/office/mac/drawingml/2011/main" val="1"/>
             </a:ext>
           </a:extLst>
         </p:spPr>
